--- a/EIA_Q4_Executive_Performance_Presentation.pptx
+++ b/EIA_Q4_Executive_Performance_Presentation.pptx
@@ -3153,7 +3153,7 @@
             <a:avLst/>
           </a:prstGeom>
           <a:solidFill>
-            <a:srgbClr val="0284C7"/>
+            <a:srgbClr val="2563EB"/>
           </a:solidFill>
           <a:ln>
             <a:noFill/>
@@ -3206,7 +3206,7 @@
             <a:pPr>
               <a:defRPr sz="1200" b="1">
                 <a:solidFill>
-                  <a:srgbClr val="0284C7"/>
+                  <a:srgbClr val="2563EB"/>
                 </a:solidFill>
                 <a:latin typeface="Segoe UI"/>
               </a:defRPr>
@@ -3256,7 +3256,7 @@
             </a:r>
             <a:br/>
             <a:r>
-              <a:t>Scope: 5,092 เครื่อง  |  Tracked: 4,997 เครื่อง  |  Remediated: 361 เครื่อง (7.22%)</a:t>
+              <a:t>Scope: 5,092 เครื่อง  |  Remediated: 361 เครื่อง (7.09%)  |  Pending: 4,731 เครื่อง</a:t>
             </a:r>
           </a:p>
         </p:txBody>
@@ -3331,7 +3331,7 @@
         <p:spPr>
           <a:xfrm>
             <a:off x="731520" y="365760"/>
-            <a:ext cx="10698480" cy="256032"/>
+            <a:ext cx="10698480" cy="1005840"/>
           </a:xfrm>
           <a:prstGeom prst="rect">
             <a:avLst/>
@@ -3345,63 +3345,27 @@
           <a:lstStyle/>
           <a:p>
             <a:pPr>
-              <a:defRPr sz="950" b="1">
-                <a:solidFill>
-                  <a:srgbClr val="0284C7"/>
+              <a:defRPr sz="1800" b="1">
+                <a:solidFill>
+                  <a:srgbClr val="0F172A"/>
                 </a:solidFill>
                 <a:latin typeface="Segoe UI"/>
               </a:defRPr>
             </a:pPr>
             <a:r>
-              <a:t>EXECUTIVE SUMMARY &amp; HERO KPIS</a:t>
-            </a:r>
-          </a:p>
-        </p:txBody>
-      </p:sp>
-      <p:sp>
-        <p:nvSpPr>
-          <p:cNvPr id="4" name="TextBox 3"/>
-          <p:cNvSpPr txBox="1"/>
-          <p:nvPr/>
-        </p:nvSpPr>
-        <p:spPr>
-          <a:xfrm>
-            <a:off x="731520" y="621792"/>
-            <a:ext cx="10698480" cy="685800"/>
-          </a:xfrm>
-          <a:prstGeom prst="rect">
-            <a:avLst/>
-          </a:prstGeom>
-          <a:noFill/>
-        </p:spPr>
-        <p:txBody>
-          <a:bodyPr wrap="square" lIns="0" tIns="0" rIns="0" bIns="0">
-            <a:spAutoFit/>
-          </a:bodyPr>
-          <a:lstStyle/>
+              <a:t>EXECUTIVE SUMMARY &amp; HERO KPIS  |  ความคืบหน้า EIA Q4 อยู่ที่ 7.09% โดยมีอุปกรณ์รอแก้ไข 4,731 เครื่องก่อนครบกำหนด 25 พ.ย.</a:t>
+            </a:r>
+          </a:p>
           <a:p>
             <a:pPr>
-              <a:defRPr sz="1800" b="1">
-                <a:solidFill>
-                  <a:srgbClr val="0F172A"/>
+              <a:defRPr sz="1100">
+                <a:solidFill>
+                  <a:srgbClr val="64748B"/>
                 </a:solidFill>
                 <a:latin typeface="Segoe UI"/>
               </a:defRPr>
             </a:pPr>
             <a:r>
-              <a:t>ความคืบหน้า EIA Q4 อยู่ที่ 7.22% โดยมีอุปกรณ์รอแก้ไข 4,636 เครื่องก่อนครบกำหนด 25 พ.ย.</a:t>
-            </a:r>
-          </a:p>
-          <a:p>
-            <a:pPr>
-              <a:defRPr sz="1050">
-                <a:solidFill>
-                  <a:srgbClr val="475569"/>
-                </a:solidFill>
-                <a:latin typeface="Segoe UI"/>
-              </a:defRPr>
-            </a:pPr>
-            <a:r>
               <a:t>สรุปสถิติสำคัญประจำไตรมาสเปรียบเทียบกับเกณฑ์ความปลอดภัย EIA Standards (เกณฑ์ผ่าน &gt;= 85% PASS)</a:t>
             </a:r>
           </a:p>
@@ -3409,7 +3373,7 @@
       </p:sp>
       <p:sp>
         <p:nvSpPr>
-          <p:cNvPr id="5" name="Rectangle 4"/>
+          <p:cNvPr id="4" name="Rounded Rectangle 3"/>
           <p:cNvSpPr/>
           <p:nvPr/>
         </p:nvSpPr>
@@ -3418,7 +3382,7 @@
             <a:off x="731520" y="1508760"/>
             <a:ext cx="2514600" cy="1600200"/>
           </a:xfrm>
-          <a:prstGeom prst="rect">
+          <a:prstGeom prst="roundRect">
             <a:avLst/>
           </a:prstGeom>
           <a:solidFill>
@@ -3454,20 +3418,20 @@
       </p:sp>
       <p:sp>
         <p:nvSpPr>
-          <p:cNvPr id="6" name="Rectangle 5"/>
+          <p:cNvPr id="5" name="Rectangle 4"/>
           <p:cNvSpPr/>
           <p:nvPr/>
         </p:nvSpPr>
         <p:spPr>
           <a:xfrm>
             <a:off x="731520" y="1508760"/>
-            <a:ext cx="2514600" cy="54864"/>
+            <a:ext cx="2514600" cy="73152"/>
           </a:xfrm>
           <a:prstGeom prst="rect">
             <a:avLst/>
           </a:prstGeom>
           <a:solidFill>
-            <a:srgbClr val="0284C7"/>
+            <a:srgbClr val="2563EB"/>
           </a:solidFill>
           <a:ln>
             <a:noFill/>
@@ -3497,14 +3461,14 @@
       </p:sp>
       <p:sp>
         <p:nvSpPr>
-          <p:cNvPr id="7" name="TextBox 6"/>
+          <p:cNvPr id="6" name="TextBox 5"/>
           <p:cNvSpPr txBox="1"/>
           <p:nvPr/>
         </p:nvSpPr>
         <p:spPr>
           <a:xfrm>
-            <a:off x="914400" y="1618488"/>
-            <a:ext cx="2148840" cy="1417320"/>
+            <a:off x="914400" y="1673352"/>
+            <a:ext cx="2148840" cy="1344168"/>
           </a:xfrm>
           <a:prstGeom prst="rect">
             <a:avLst/>
@@ -3518,35 +3482,35 @@
           <a:lstStyle/>
           <a:p>
             <a:pPr>
-              <a:defRPr sz="900" b="1">
-                <a:solidFill>
-                  <a:srgbClr val="475569"/>
+              <a:defRPr sz="2800" b="1">
+                <a:solidFill>
+                  <a:srgbClr val="2563EB"/>
                 </a:solidFill>
                 <a:latin typeface="Segoe UI"/>
               </a:defRPr>
             </a:pPr>
             <a:r>
-              <a:t>TOTAL BASELINE SCOPE</a:t>
+              <a:t>5,092</a:t>
             </a:r>
           </a:p>
           <a:p>
             <a:pPr>
-              <a:defRPr sz="2800" b="1">
-                <a:solidFill>
-                  <a:srgbClr val="0284C7"/>
+              <a:defRPr sz="1000" b="1">
+                <a:solidFill>
+                  <a:srgbClr val="0F172A"/>
                 </a:solidFill>
                 <a:latin typeface="Segoe UI"/>
               </a:defRPr>
             </a:pPr>
             <a:r>
-              <a:t>5,092</a:t>
+              <a:t>Total Baseline Scope</a:t>
             </a:r>
           </a:p>
           <a:p>
             <a:pPr>
               <a:defRPr sz="900">
                 <a:solidFill>
-                  <a:srgbClr val="475569"/>
+                  <a:srgbClr val="64748B"/>
                 </a:solidFill>
                 <a:latin typeface="Segoe UI"/>
               </a:defRPr>
@@ -3559,7 +3523,7 @@
       </p:sp>
       <p:sp>
         <p:nvSpPr>
-          <p:cNvPr id="8" name="Rectangle 7"/>
+          <p:cNvPr id="7" name="Rounded Rectangle 6"/>
           <p:cNvSpPr/>
           <p:nvPr/>
         </p:nvSpPr>
@@ -3568,7 +3532,7 @@
             <a:off x="3429000" y="1508760"/>
             <a:ext cx="2514600" cy="1600200"/>
           </a:xfrm>
-          <a:prstGeom prst="rect">
+          <a:prstGeom prst="roundRect">
             <a:avLst/>
           </a:prstGeom>
           <a:solidFill>
@@ -3604,14 +3568,14 @@
       </p:sp>
       <p:sp>
         <p:nvSpPr>
-          <p:cNvPr id="9" name="Rectangle 8"/>
+          <p:cNvPr id="8" name="Rectangle 7"/>
           <p:cNvSpPr/>
           <p:nvPr/>
         </p:nvSpPr>
         <p:spPr>
           <a:xfrm>
             <a:off x="3429000" y="1508760"/>
-            <a:ext cx="2514600" cy="54864"/>
+            <a:ext cx="2514600" cy="73152"/>
           </a:xfrm>
           <a:prstGeom prst="rect">
             <a:avLst/>
@@ -3647,14 +3611,14 @@
       </p:sp>
       <p:sp>
         <p:nvSpPr>
-          <p:cNvPr id="10" name="TextBox 9"/>
+          <p:cNvPr id="9" name="TextBox 8"/>
           <p:cNvSpPr txBox="1"/>
           <p:nvPr/>
         </p:nvSpPr>
         <p:spPr>
           <a:xfrm>
-            <a:off x="3611880" y="1618488"/>
-            <a:ext cx="2148840" cy="1417320"/>
+            <a:off x="3611880" y="1673352"/>
+            <a:ext cx="2148840" cy="1344168"/>
           </a:xfrm>
           <a:prstGeom prst="rect">
             <a:avLst/>
@@ -3668,35 +3632,35 @@
           <a:lstStyle/>
           <a:p>
             <a:pPr>
-              <a:defRPr sz="900" b="1">
-                <a:solidFill>
-                  <a:srgbClr val="475569"/>
+              <a:defRPr sz="2800" b="1">
+                <a:solidFill>
+                  <a:srgbClr val="10B981"/>
                 </a:solidFill>
                 <a:latin typeface="Segoe UI"/>
               </a:defRPr>
             </a:pPr>
             <a:r>
-              <a:t>PASSED / REMEDIATED</a:t>
+              <a:t>361</a:t>
             </a:r>
           </a:p>
           <a:p>
             <a:pPr>
-              <a:defRPr sz="2800" b="1">
-                <a:solidFill>
-                  <a:srgbClr val="10B981"/>
+              <a:defRPr sz="1000" b="1">
+                <a:solidFill>
+                  <a:srgbClr val="0F172A"/>
                 </a:solidFill>
                 <a:latin typeface="Segoe UI"/>
               </a:defRPr>
             </a:pPr>
             <a:r>
-              <a:t>361</a:t>
+              <a:t>Passed / Remediated</a:t>
             </a:r>
           </a:p>
           <a:p>
             <a:pPr>
               <a:defRPr sz="900">
                 <a:solidFill>
-                  <a:srgbClr val="475569"/>
+                  <a:srgbClr val="64748B"/>
                 </a:solidFill>
                 <a:latin typeface="Segoe UI"/>
               </a:defRPr>
@@ -3709,7 +3673,7 @@
       </p:sp>
       <p:sp>
         <p:nvSpPr>
-          <p:cNvPr id="11" name="Rectangle 10"/>
+          <p:cNvPr id="10" name="Rounded Rectangle 9"/>
           <p:cNvSpPr/>
           <p:nvPr/>
         </p:nvSpPr>
@@ -3718,7 +3682,7 @@
             <a:off x="6126480" y="1508760"/>
             <a:ext cx="2514600" cy="1600200"/>
           </a:xfrm>
-          <a:prstGeom prst="rect">
+          <a:prstGeom prst="roundRect">
             <a:avLst/>
           </a:prstGeom>
           <a:solidFill>
@@ -3754,20 +3718,20 @@
       </p:sp>
       <p:sp>
         <p:nvSpPr>
-          <p:cNvPr id="12" name="Rectangle 11"/>
+          <p:cNvPr id="11" name="Rectangle 10"/>
           <p:cNvSpPr/>
           <p:nvPr/>
         </p:nvSpPr>
         <p:spPr>
           <a:xfrm>
             <a:off x="6126480" y="1508760"/>
-            <a:ext cx="2514600" cy="54864"/>
+            <a:ext cx="2514600" cy="73152"/>
           </a:xfrm>
           <a:prstGeom prst="rect">
             <a:avLst/>
           </a:prstGeom>
           <a:solidFill>
-            <a:srgbClr val="E11D48"/>
+            <a:srgbClr val="F43F5E"/>
           </a:solidFill>
           <a:ln>
             <a:noFill/>
@@ -3797,14 +3761,14 @@
       </p:sp>
       <p:sp>
         <p:nvSpPr>
-          <p:cNvPr id="13" name="TextBox 12"/>
+          <p:cNvPr id="12" name="TextBox 11"/>
           <p:cNvSpPr txBox="1"/>
           <p:nvPr/>
         </p:nvSpPr>
         <p:spPr>
           <a:xfrm>
-            <a:off x="6309360" y="1618488"/>
-            <a:ext cx="2148840" cy="1417320"/>
+            <a:off x="6309360" y="1673352"/>
+            <a:ext cx="2148840" cy="1344168"/>
           </a:xfrm>
           <a:prstGeom prst="rect">
             <a:avLst/>
@@ -3818,35 +3782,35 @@
           <a:lstStyle/>
           <a:p>
             <a:pPr>
-              <a:defRPr sz="900" b="1">
-                <a:solidFill>
-                  <a:srgbClr val="475569"/>
+              <a:defRPr sz="2800" b="1">
+                <a:solidFill>
+                  <a:srgbClr val="F43F5E"/>
                 </a:solidFill>
                 <a:latin typeface="Segoe UI"/>
               </a:defRPr>
             </a:pPr>
             <a:r>
-              <a:t>PENDING / ACTION REQ.</a:t>
+              <a:t>4,731</a:t>
             </a:r>
           </a:p>
           <a:p>
             <a:pPr>
-              <a:defRPr sz="2800" b="1">
-                <a:solidFill>
-                  <a:srgbClr val="E11D48"/>
+              <a:defRPr sz="1000" b="1">
+                <a:solidFill>
+                  <a:srgbClr val="0F172A"/>
                 </a:solidFill>
                 <a:latin typeface="Segoe UI"/>
               </a:defRPr>
             </a:pPr>
             <a:r>
-              <a:t>4,636</a:t>
+              <a:t>Pending / Action Req.</a:t>
             </a:r>
           </a:p>
           <a:p>
             <a:pPr>
               <a:defRPr sz="900">
                 <a:solidFill>
-                  <a:srgbClr val="475569"/>
+                  <a:srgbClr val="64748B"/>
                 </a:solidFill>
                 <a:latin typeface="Segoe UI"/>
               </a:defRPr>
@@ -3859,7 +3823,7 @@
       </p:sp>
       <p:sp>
         <p:nvSpPr>
-          <p:cNvPr id="14" name="Rectangle 13"/>
+          <p:cNvPr id="13" name="Rounded Rectangle 12"/>
           <p:cNvSpPr/>
           <p:nvPr/>
         </p:nvSpPr>
@@ -3868,7 +3832,7 @@
             <a:off x="8823960" y="1508760"/>
             <a:ext cx="2606040" cy="1600200"/>
           </a:xfrm>
-          <a:prstGeom prst="rect">
+          <a:prstGeom prst="roundRect">
             <a:avLst/>
           </a:prstGeom>
           <a:solidFill>
@@ -3904,20 +3868,20 @@
       </p:sp>
       <p:sp>
         <p:nvSpPr>
-          <p:cNvPr id="15" name="Rectangle 14"/>
+          <p:cNvPr id="14" name="Rectangle 13"/>
           <p:cNvSpPr/>
           <p:nvPr/>
         </p:nvSpPr>
         <p:spPr>
           <a:xfrm>
             <a:off x="8823960" y="1508760"/>
-            <a:ext cx="2606040" cy="54864"/>
+            <a:ext cx="2606040" cy="73152"/>
           </a:xfrm>
           <a:prstGeom prst="rect">
             <a:avLst/>
           </a:prstGeom>
           <a:solidFill>
-            <a:srgbClr val="D97706"/>
+            <a:srgbClr val="F59E0B"/>
           </a:solidFill>
           <a:ln>
             <a:noFill/>
@@ -3947,14 +3911,14 @@
       </p:sp>
       <p:sp>
         <p:nvSpPr>
-          <p:cNvPr id="16" name="TextBox 15"/>
+          <p:cNvPr id="15" name="TextBox 14"/>
           <p:cNvSpPr txBox="1"/>
           <p:nvPr/>
         </p:nvSpPr>
         <p:spPr>
           <a:xfrm>
-            <a:off x="9006840" y="1618488"/>
-            <a:ext cx="2240280" cy="1417320"/>
+            <a:off x="9006840" y="1673352"/>
+            <a:ext cx="2240280" cy="1344168"/>
           </a:xfrm>
           <a:prstGeom prst="rect">
             <a:avLst/>
@@ -3968,35 +3932,35 @@
           <a:lstStyle/>
           <a:p>
             <a:pPr>
-              <a:defRPr sz="900" b="1">
-                <a:solidFill>
-                  <a:srgbClr val="475569"/>
+              <a:defRPr sz="2800" b="1">
+                <a:solidFill>
+                  <a:srgbClr val="F59E0B"/>
                 </a:solidFill>
                 <a:latin typeface="Segoe UI"/>
               </a:defRPr>
             </a:pPr>
             <a:r>
-              <a:t>DEADLINE COUNTDOWN</a:t>
+              <a:t>30 วัน</a:t>
             </a:r>
           </a:p>
           <a:p>
             <a:pPr>
-              <a:defRPr sz="2800" b="1">
-                <a:solidFill>
-                  <a:srgbClr val="D97706"/>
+              <a:defRPr sz="1000" b="1">
+                <a:solidFill>
+                  <a:srgbClr val="0F172A"/>
                 </a:solidFill>
                 <a:latin typeface="Segoe UI"/>
               </a:defRPr>
             </a:pPr>
             <a:r>
-              <a:t>30 วัน</a:t>
+              <a:t>Deadline Countdown</a:t>
             </a:r>
           </a:p>
           <a:p>
             <a:pPr>
               <a:defRPr sz="900">
                 <a:solidFill>
-                  <a:srgbClr val="475569"/>
+                  <a:srgbClr val="64748B"/>
                 </a:solidFill>
                 <a:latin typeface="Segoe UI"/>
               </a:defRPr>
@@ -4009,7 +3973,7 @@
       </p:sp>
       <p:sp>
         <p:nvSpPr>
-          <p:cNvPr id="17" name="Rectangle 16"/>
+          <p:cNvPr id="16" name="Rounded Rectangle 15"/>
           <p:cNvSpPr/>
           <p:nvPr/>
         </p:nvSpPr>
@@ -4018,7 +3982,7 @@
             <a:off x="731520" y="3291840"/>
             <a:ext cx="5212080" cy="3108960"/>
           </a:xfrm>
-          <a:prstGeom prst="rect">
+          <a:prstGeom prst="roundRect">
             <a:avLst/>
           </a:prstGeom>
           <a:solidFill>
@@ -4054,7 +4018,7 @@
       </p:sp>
       <p:sp>
         <p:nvSpPr>
-          <p:cNvPr id="18" name="TextBox 17"/>
+          <p:cNvPr id="17" name="TextBox 16"/>
           <p:cNvSpPr txBox="1"/>
           <p:nvPr/>
         </p:nvSpPr>
@@ -4089,31 +4053,31 @@
             <a:pPr>
               <a:defRPr sz="950">
                 <a:solidFill>
-                  <a:srgbClr val="475569"/>
+                  <a:srgbClr val="64748B"/>
                 </a:solidFill>
               </a:defRPr>
             </a:pPr>
             <a:r>
-              <a:t>• Overall Progress (Weighted Average): 7.22% (🔴 Critical) คำนวณจากยอดรวมเครื่องที่ผ่านเกณฑ์จริง 361 จาก 4,997 เครื่อง</a:t>
+              <a:t>• Overall Progress (Weighted Average): 7.09% (🔴 Critical) คำนวณจากยอดรวมเครื่องที่ผ่านเกณฑ์จริง 361 จาก 5,092 เครื่อง</a:t>
             </a:r>
           </a:p>
           <a:p>
             <a:pPr>
               <a:defRPr sz="950">
                 <a:solidFill>
-                  <a:srgbClr val="475569"/>
+                  <a:srgbClr val="64748B"/>
                 </a:solidFill>
               </a:defRPr>
             </a:pPr>
             <a:r>
-              <a:t>• Compliance Score (Unweighted Average): 17.07% (🔴 Critical) คำนวณเฉลี่ยความสำเร็จเท่ากันทั้ง 9 หมวดหมู่งาน</a:t>
+              <a:t>• Compliance Score (Unweighted Average): 16.97% (🔴 Critical) คำนวณเฉลี่ยความสำเร็จเท่ากันทั้ง 9 หมวดหมู่งาน</a:t>
             </a:r>
           </a:p>
           <a:p>
             <a:pPr>
               <a:defRPr sz="950">
                 <a:solidFill>
-                  <a:srgbClr val="475569"/>
+                  <a:srgbClr val="64748B"/>
                 </a:solidFill>
               </a:defRPr>
             </a:pPr>
@@ -4125,7 +4089,7 @@
             <a:pPr>
               <a:defRPr sz="950">
                 <a:solidFill>
-                  <a:srgbClr val="475569"/>
+                  <a:srgbClr val="64748B"/>
                 </a:solidFill>
               </a:defRPr>
             </a:pPr>
@@ -4137,7 +4101,7 @@
       </p:sp>
       <p:sp>
         <p:nvSpPr>
-          <p:cNvPr id="19" name="Rectangle 18"/>
+          <p:cNvPr id="18" name="Rounded Rectangle 17"/>
           <p:cNvSpPr/>
           <p:nvPr/>
         </p:nvSpPr>
@@ -4146,7 +4110,7 @@
             <a:off x="6217920" y="3291840"/>
             <a:ext cx="5212080" cy="3108960"/>
           </a:xfrm>
-          <a:prstGeom prst="rect">
+          <a:prstGeom prst="roundRect">
             <a:avLst/>
           </a:prstGeom>
           <a:solidFill>
@@ -4182,7 +4146,7 @@
       </p:sp>
       <p:sp>
         <p:nvSpPr>
-          <p:cNvPr id="20" name="TextBox 19"/>
+          <p:cNvPr id="19" name="TextBox 18"/>
           <p:cNvSpPr txBox="1"/>
           <p:nvPr/>
         </p:nvSpPr>
@@ -4217,31 +4181,31 @@
             <a:pPr>
               <a:defRPr sz="950">
                 <a:solidFill>
-                  <a:srgbClr val="475569"/>
+                  <a:srgbClr val="64748B"/>
                 </a:solidFill>
               </a:defRPr>
             </a:pPr>
             <a:r>
-              <a:t>• กลุ่ม Heavy-Hitters แบกรับงาน 93.3%: งานกว่า 4,662 เครื่อง กระจุกตัวในหัวข้อ OS, Admin, Firewall และ Restart</a:t>
+              <a:t>• กลุ่ม Heavy-Hitters แบกรับงาน 93.4%: งานกว่า 4,757 เครื่อง กระจุกตัวในหัวข้อ OS, Admin, Firewall และ Restart</a:t>
             </a:r>
           </a:p>
           <a:p>
             <a:pPr>
               <a:defRPr sz="950">
                 <a:solidFill>
-                  <a:srgbClr val="475569"/>
+                  <a:srgbClr val="64748B"/>
                 </a:solidFill>
               </a:defRPr>
             </a:pPr>
             <a:r>
-              <a:t>• ทีม Branch แบกรับสัดส่วน 77.1%: เครื่องสาขาหน้าร้าน 3,855 เครื่อง ส่วนใหญ่เป็นเครื่องแคชเชียร์ POS/SCO</a:t>
+              <a:t>• ทีม Branch แบกรับสัดส่วน 75.7%: เครื่องสาขาหน้าร้าน 3,855 เครื่อง ส่วนใหญ่เป็นเครื่องแคชเชียร์ POS/SCO</a:t>
             </a:r>
           </a:p>
           <a:p>
             <a:pPr>
               <a:defRPr sz="950">
                 <a:solidFill>
-                  <a:srgbClr val="475569"/>
+                  <a:srgbClr val="64748B"/>
                 </a:solidFill>
               </a:defRPr>
             </a:pPr>
@@ -4253,7 +4217,7 @@
             <a:pPr>
               <a:defRPr sz="950">
                 <a:solidFill>
-                  <a:srgbClr val="475569"/>
+                  <a:srgbClr val="64748B"/>
                 </a:solidFill>
               </a:defRPr>
             </a:pPr>
@@ -4333,7 +4297,7 @@
         <p:spPr>
           <a:xfrm>
             <a:off x="731520" y="365760"/>
-            <a:ext cx="10698480" cy="256032"/>
+            <a:ext cx="10698480" cy="1005840"/>
           </a:xfrm>
           <a:prstGeom prst="rect">
             <a:avLst/>
@@ -4347,63 +4311,27 @@
           <a:lstStyle/>
           <a:p>
             <a:pPr>
-              <a:defRPr sz="950" b="1">
-                <a:solidFill>
-                  <a:srgbClr val="0284C7"/>
+              <a:defRPr sz="1800" b="1">
+                <a:solidFill>
+                  <a:srgbClr val="0F172A"/>
                 </a:solidFill>
                 <a:latin typeface="Segoe UI"/>
               </a:defRPr>
             </a:pPr>
             <a:r>
-              <a:t>HEAVY-HITTERS DEEP DIVE</a:t>
-            </a:r>
-          </a:p>
-        </p:txBody>
-      </p:sp>
-      <p:sp>
-        <p:nvSpPr>
-          <p:cNvPr id="4" name="TextBox 3"/>
-          <p:cNvSpPr txBox="1"/>
-          <p:nvPr/>
-        </p:nvSpPr>
-        <p:spPr>
-          <a:xfrm>
-            <a:off x="731520" y="621792"/>
-            <a:ext cx="10698480" cy="685800"/>
-          </a:xfrm>
-          <a:prstGeom prst="rect">
-            <a:avLst/>
-          </a:prstGeom>
-          <a:noFill/>
-        </p:spPr>
-        <p:txBody>
-          <a:bodyPr wrap="square" lIns="0" tIns="0" rIns="0" bIns="0">
-            <a:spAutoFit/>
-          </a:bodyPr>
-          <a:lstStyle/>
+              <a:t>HEAVY-HITTERS DEEP DIVE  |  ภาระงานกว่า 93.4% กระจุกตัวอยู่ใน 4 หมวดหลัก โดย Windows 11 OS Update เป็นตัวแปรชี้ขาด</a:t>
+            </a:r>
+          </a:p>
           <a:p>
             <a:pPr>
-              <a:defRPr sz="1800" b="1">
-                <a:solidFill>
-                  <a:srgbClr val="0F172A"/>
+              <a:defRPr sz="1100">
+                <a:solidFill>
+                  <a:srgbClr val="64748B"/>
                 </a:solidFill>
                 <a:latin typeface="Segoe UI"/>
               </a:defRPr>
             </a:pPr>
             <a:r>
-              <a:t>ภาระงานกว่า 93.3% กระจุกตัวอยู่ใน 4 หมวดหลัก โดย Windows 11 OS Update เป็นตัวแปรชี้ขาด</a:t>
-            </a:r>
-          </a:p>
-          <a:p>
-            <a:pPr>
-              <a:defRPr sz="1050">
-                <a:solidFill>
-                  <a:srgbClr val="475569"/>
-                </a:solidFill>
-                <a:latin typeface="Segoe UI"/>
-              </a:defRPr>
-            </a:pPr>
-            <a:r>
               <a:t>การวิเคราะห์ 4 หมวดหมู่ที่มีจำนวนเครื่องสูงสุด ซึ่งส่งผลโดยตรงต่อคะแนน Overall Progress ของโครงการ</a:t>
             </a:r>
           </a:p>
@@ -4411,7 +4339,7 @@
       </p:sp>
       <p:sp>
         <p:nvSpPr>
-          <p:cNvPr id="5" name="Rectangle 4"/>
+          <p:cNvPr id="4" name="Rounded Rectangle 3"/>
           <p:cNvSpPr/>
           <p:nvPr/>
         </p:nvSpPr>
@@ -4420,7 +4348,7 @@
             <a:off x="731520" y="1508760"/>
             <a:ext cx="2514600" cy="3657600"/>
           </a:xfrm>
-          <a:prstGeom prst="rect">
+          <a:prstGeom prst="roundRect">
             <a:avLst/>
           </a:prstGeom>
           <a:solidFill>
@@ -4456,7 +4384,7 @@
       </p:sp>
       <p:sp>
         <p:nvSpPr>
-          <p:cNvPr id="6" name="Rectangle 5"/>
+          <p:cNvPr id="5" name="Rectangle 4"/>
           <p:cNvSpPr/>
           <p:nvPr/>
         </p:nvSpPr>
@@ -4469,7 +4397,7 @@
             <a:avLst/>
           </a:prstGeom>
           <a:solidFill>
-            <a:srgbClr val="E11D48"/>
+            <a:srgbClr val="F43F5E"/>
           </a:solidFill>
           <a:ln>
             <a:noFill/>
@@ -4499,7 +4427,7 @@
       </p:sp>
       <p:sp>
         <p:nvSpPr>
-          <p:cNvPr id="7" name="TextBox 6"/>
+          <p:cNvPr id="6" name="TextBox 5"/>
           <p:cNvSpPr txBox="1"/>
           <p:nvPr/>
         </p:nvSpPr>
@@ -4534,19 +4462,19 @@
             <a:pPr>
               <a:defRPr sz="950" b="1">
                 <a:solidFill>
-                  <a:srgbClr val="475569"/>
+                  <a:srgbClr val="64748B"/>
                 </a:solidFill>
               </a:defRPr>
             </a:pPr>
             <a:r>
-              <a:t>เป้าหมาย: 3,152 เครื่อง (63.1%)</a:t>
+              <a:t>เป้าหมาย: 3,152 เครื่อง (61.9%)</a:t>
             </a:r>
           </a:p>
           <a:p>
             <a:pPr>
               <a:defRPr sz="950" b="1">
                 <a:solidFill>
-                  <a:srgbClr val="E11D48"/>
+                  <a:srgbClr val="F43F5E"/>
                 </a:solidFill>
               </a:defRPr>
             </a:pPr>
@@ -4556,9 +4484,9 @@
           </a:p>
           <a:p>
             <a:pPr>
-              <a:defRPr sz="950">
-                <a:solidFill>
-                  <a:srgbClr val="E11D48"/>
+              <a:defRPr sz="950" b="1">
+                <a:solidFill>
+                  <a:srgbClr val="F43F5E"/>
                 </a:solidFill>
               </a:defRPr>
             </a:pPr>
@@ -4571,7 +4499,7 @@
             <a:pPr>
               <a:defRPr sz="850">
                 <a:solidFill>
-                  <a:srgbClr val="475569"/>
+                  <a:srgbClr val="64748B"/>
                 </a:solidFill>
               </a:defRPr>
             </a:pPr>
@@ -4583,7 +4511,7 @@
       </p:sp>
       <p:sp>
         <p:nvSpPr>
-          <p:cNvPr id="8" name="Rectangle 7"/>
+          <p:cNvPr id="7" name="Rounded Rectangle 6"/>
           <p:cNvSpPr/>
           <p:nvPr/>
         </p:nvSpPr>
@@ -4592,7 +4520,7 @@
             <a:off x="3429000" y="1508760"/>
             <a:ext cx="2514600" cy="3657600"/>
           </a:xfrm>
-          <a:prstGeom prst="rect">
+          <a:prstGeom prst="roundRect">
             <a:avLst/>
           </a:prstGeom>
           <a:solidFill>
@@ -4628,7 +4556,7 @@
       </p:sp>
       <p:sp>
         <p:nvSpPr>
-          <p:cNvPr id="9" name="Rectangle 8"/>
+          <p:cNvPr id="8" name="Rectangle 7"/>
           <p:cNvSpPr/>
           <p:nvPr/>
         </p:nvSpPr>
@@ -4641,7 +4569,7 @@
             <a:avLst/>
           </a:prstGeom>
           <a:solidFill>
-            <a:srgbClr val="D97706"/>
+            <a:srgbClr val="F59E0B"/>
           </a:solidFill>
           <a:ln>
             <a:noFill/>
@@ -4671,7 +4599,7 @@
       </p:sp>
       <p:sp>
         <p:nvSpPr>
-          <p:cNvPr id="10" name="TextBox 9"/>
+          <p:cNvPr id="9" name="TextBox 8"/>
           <p:cNvSpPr txBox="1"/>
           <p:nvPr/>
         </p:nvSpPr>
@@ -4706,19 +4634,19 @@
             <a:pPr>
               <a:defRPr sz="950" b="1">
                 <a:solidFill>
-                  <a:srgbClr val="475569"/>
+                  <a:srgbClr val="64748B"/>
                 </a:solidFill>
               </a:defRPr>
             </a:pPr>
             <a:r>
-              <a:t>เป้าหมาย: 711 เครื่อง (14.2%)</a:t>
+              <a:t>เป้าหมาย: 711 เครื่อง (14.0%)</a:t>
             </a:r>
           </a:p>
           <a:p>
             <a:pPr>
               <a:defRPr sz="950" b="1">
                 <a:solidFill>
-                  <a:srgbClr val="D97706"/>
+                  <a:srgbClr val="F59E0B"/>
                 </a:solidFill>
               </a:defRPr>
             </a:pPr>
@@ -4728,9 +4656,9 @@
           </a:p>
           <a:p>
             <a:pPr>
-              <a:defRPr sz="950">
-                <a:solidFill>
-                  <a:srgbClr val="E11D48"/>
+              <a:defRPr sz="950" b="1">
+                <a:solidFill>
+                  <a:srgbClr val="F43F5E"/>
                 </a:solidFill>
               </a:defRPr>
             </a:pPr>
@@ -4743,7 +4671,7 @@
             <a:pPr>
               <a:defRPr sz="850">
                 <a:solidFill>
-                  <a:srgbClr val="475569"/>
+                  <a:srgbClr val="64748B"/>
                 </a:solidFill>
               </a:defRPr>
             </a:pPr>
@@ -4755,7 +4683,7 @@
       </p:sp>
       <p:sp>
         <p:nvSpPr>
-          <p:cNvPr id="11" name="Rectangle 10"/>
+          <p:cNvPr id="10" name="Rounded Rectangle 9"/>
           <p:cNvSpPr/>
           <p:nvPr/>
         </p:nvSpPr>
@@ -4764,7 +4692,7 @@
             <a:off x="6126480" y="1508760"/>
             <a:ext cx="2514600" cy="3657600"/>
           </a:xfrm>
-          <a:prstGeom prst="rect">
+          <a:prstGeom prst="roundRect">
             <a:avLst/>
           </a:prstGeom>
           <a:solidFill>
@@ -4800,7 +4728,7 @@
       </p:sp>
       <p:sp>
         <p:nvSpPr>
-          <p:cNvPr id="12" name="Rectangle 11"/>
+          <p:cNvPr id="11" name="Rectangle 10"/>
           <p:cNvSpPr/>
           <p:nvPr/>
         </p:nvSpPr>
@@ -4813,7 +4741,7 @@
             <a:avLst/>
           </a:prstGeom>
           <a:solidFill>
-            <a:srgbClr val="E11D48"/>
+            <a:srgbClr val="F43F5E"/>
           </a:solidFill>
           <a:ln>
             <a:noFill/>
@@ -4843,7 +4771,7 @@
       </p:sp>
       <p:sp>
         <p:nvSpPr>
-          <p:cNvPr id="13" name="TextBox 12"/>
+          <p:cNvPr id="12" name="TextBox 11"/>
           <p:cNvSpPr txBox="1"/>
           <p:nvPr/>
         </p:nvSpPr>
@@ -4878,19 +4806,19 @@
             <a:pPr>
               <a:defRPr sz="950" b="1">
                 <a:solidFill>
-                  <a:srgbClr val="475569"/>
+                  <a:srgbClr val="64748B"/>
                 </a:solidFill>
               </a:defRPr>
             </a:pPr>
             <a:r>
-              <a:t>เป้าหมาย: 567 เครื่อง (11.3%)</a:t>
+              <a:t>เป้าหมาย: 567 เครื่อง (11.1%)</a:t>
             </a:r>
           </a:p>
           <a:p>
             <a:pPr>
               <a:defRPr sz="950" b="1">
                 <a:solidFill>
-                  <a:srgbClr val="E11D48"/>
+                  <a:srgbClr val="F43F5E"/>
                 </a:solidFill>
               </a:defRPr>
             </a:pPr>
@@ -4900,9 +4828,9 @@
           </a:p>
           <a:p>
             <a:pPr>
-              <a:defRPr sz="950">
-                <a:solidFill>
-                  <a:srgbClr val="E11D48"/>
+              <a:defRPr sz="950" b="1">
+                <a:solidFill>
+                  <a:srgbClr val="F43F5E"/>
                 </a:solidFill>
               </a:defRPr>
             </a:pPr>
@@ -4915,7 +4843,7 @@
             <a:pPr>
               <a:defRPr sz="850">
                 <a:solidFill>
-                  <a:srgbClr val="475569"/>
+                  <a:srgbClr val="64748B"/>
                 </a:solidFill>
               </a:defRPr>
             </a:pPr>
@@ -4927,7 +4855,7 @@
       </p:sp>
       <p:sp>
         <p:nvSpPr>
-          <p:cNvPr id="14" name="Rectangle 13"/>
+          <p:cNvPr id="13" name="Rounded Rectangle 12"/>
           <p:cNvSpPr/>
           <p:nvPr/>
         </p:nvSpPr>
@@ -4936,7 +4864,7 @@
             <a:off x="8823960" y="1508760"/>
             <a:ext cx="2514600" cy="3657600"/>
           </a:xfrm>
-          <a:prstGeom prst="rect">
+          <a:prstGeom prst="roundRect">
             <a:avLst/>
           </a:prstGeom>
           <a:solidFill>
@@ -4972,7 +4900,7 @@
       </p:sp>
       <p:sp>
         <p:nvSpPr>
-          <p:cNvPr id="15" name="Rectangle 14"/>
+          <p:cNvPr id="14" name="Rectangle 13"/>
           <p:cNvSpPr/>
           <p:nvPr/>
         </p:nvSpPr>
@@ -4985,7 +4913,7 @@
             <a:avLst/>
           </a:prstGeom>
           <a:solidFill>
-            <a:srgbClr val="E11D48"/>
+            <a:srgbClr val="F43F5E"/>
           </a:solidFill>
           <a:ln>
             <a:noFill/>
@@ -5015,7 +4943,7 @@
       </p:sp>
       <p:sp>
         <p:nvSpPr>
-          <p:cNvPr id="16" name="TextBox 15"/>
+          <p:cNvPr id="15" name="TextBox 14"/>
           <p:cNvSpPr txBox="1"/>
           <p:nvPr/>
         </p:nvSpPr>
@@ -5050,36 +4978,36 @@
             <a:pPr>
               <a:defRPr sz="950" b="1">
                 <a:solidFill>
-                  <a:srgbClr val="475569"/>
+                  <a:srgbClr val="64748B"/>
                 </a:solidFill>
               </a:defRPr>
             </a:pPr>
             <a:r>
-              <a:t>เป้าหมาย: 232 เครื่อง (4.6%)</a:t>
+              <a:t>เป้าหมาย: 327 เครื่อง (6.4%)</a:t>
             </a:r>
           </a:p>
           <a:p>
             <a:pPr>
               <a:defRPr sz="950" b="1">
                 <a:solidFill>
-                  <a:srgbClr val="E11D48"/>
+                  <a:srgbClr val="F43F5E"/>
                 </a:solidFill>
               </a:defRPr>
             </a:pPr>
             <a:r>
-              <a:t>สำเร็จแล้ว: 7 เครื่อง (3.0%)</a:t>
+              <a:t>สำเร็จแล้ว: 7 เครื่อง (2.1%)</a:t>
             </a:r>
           </a:p>
           <a:p>
             <a:pPr>
-              <a:defRPr sz="950">
-                <a:solidFill>
-                  <a:srgbClr val="E11D48"/>
+              <a:defRPr sz="950" b="1">
+                <a:solidFill>
+                  <a:srgbClr val="F43F5E"/>
                 </a:solidFill>
               </a:defRPr>
             </a:pPr>
             <a:r>
-              <a:t>คงเหลือ: 225 เครื่อง</a:t>
+              <a:t>คงเหลือ: 320 เครื่อง</a:t>
             </a:r>
           </a:p>
           <a:p>
@@ -5087,19 +5015,19 @@
             <a:pPr>
               <a:defRPr sz="850">
                 <a:solidFill>
-                  <a:srgbClr val="475569"/>
+                  <a:srgbClr val="64748B"/>
                 </a:solidFill>
               </a:defRPr>
             </a:pPr>
             <a:r>
-              <a:t>อุปกรณ์ที่ได้รับการ Patch แต่ยังไม่เสร็จสมบูรณ์เนื่องจากไม่มีการรีสตาร์ตระบบตามรอบการทำงาน</a:t>
-            </a:r>
-          </a:p>
-        </p:txBody>
-      </p:sp>
-      <p:sp>
-        <p:nvSpPr>
-          <p:cNvPr id="17" name="Rectangle 16"/>
+              <a:t>อุปกรณ์ที่ได้รับการ Patch แต่ยังไม่เสร็จสมบูรณ์เนื่องจากไม่มีการรีสตาร์ตระบบตามรอบการทำงาน รวมกลุ่ม Unassigned</a:t>
+            </a:r>
+          </a:p>
+        </p:txBody>
+      </p:sp>
+      <p:sp>
+        <p:nvSpPr>
+          <p:cNvPr id="16" name="Rounded Rectangle 15"/>
           <p:cNvSpPr/>
           <p:nvPr/>
         </p:nvSpPr>
@@ -5108,7 +5036,7 @@
             <a:off x="731520" y="5349240"/>
             <a:ext cx="10698480" cy="1051560"/>
           </a:xfrm>
-          <a:prstGeom prst="rect">
+          <a:prstGeom prst="roundRect">
             <a:avLst/>
           </a:prstGeom>
           <a:solidFill>
@@ -5116,7 +5044,7 @@
           </a:solidFill>
           <a:ln w="12700">
             <a:solidFill>
-              <a:srgbClr val="0284C7"/>
+              <a:srgbClr val="2563EB"/>
             </a:solidFill>
           </a:ln>
         </p:spPr>
@@ -5144,7 +5072,7 @@
       </p:sp>
       <p:sp>
         <p:nvSpPr>
-          <p:cNvPr id="18" name="TextBox 17"/>
+          <p:cNvPr id="17" name="TextBox 16"/>
           <p:cNvSpPr txBox="1"/>
           <p:nvPr/>
         </p:nvSpPr>
@@ -5167,7 +5095,7 @@
             <a:pPr>
               <a:defRPr sz="1050" b="1">
                 <a:solidFill>
-                  <a:srgbClr val="0284C7"/>
+                  <a:srgbClr val="2563EB"/>
                 </a:solidFill>
               </a:defRPr>
             </a:pPr>
@@ -5184,7 +5112,7 @@
               </a:defRPr>
             </a:pPr>
             <a:r>
-              <a:t>หากสามารถผลักดันให้หัวข้อ 2 (Update OS: 3,152 เครื่อง) สำเร็จได้เกิน 85% จะส่งผลให้คะแนน Overall Progress ของโครงการกระโดดขึ้นจาก 7.22% เป็นกว่า 65% ทันที จึงควรกำหนดเป็นภารกิจลำดับที่ 1 ร่วมกับทีม Branch</a:t>
+              <a:t>หากสามารถผลักดันให้หัวข้อ 2 (Update OS: 3,152 เครื่อง) สำเร็จได้เกิน 85% จะส่งผลให้คะแนน Overall Progress ของโครงการกระโดดขึ้นจาก 7.09% เป็นกว่า 65% ทันที จึงควรกำหนดเป็นภารกิจลำดับที่ 1 ร่วมกับทีม Branch</a:t>
             </a:r>
           </a:p>
         </p:txBody>
@@ -5259,7 +5187,7 @@
         <p:spPr>
           <a:xfrm>
             <a:off x="731520" y="365760"/>
-            <a:ext cx="10698480" cy="256032"/>
+            <a:ext cx="10698480" cy="1005840"/>
           </a:xfrm>
           <a:prstGeom prst="rect">
             <a:avLst/>
@@ -5273,58 +5201,22 @@
           <a:lstStyle/>
           <a:p>
             <a:pPr>
-              <a:defRPr sz="950" b="1">
-                <a:solidFill>
-                  <a:srgbClr val="0284C7"/>
+              <a:defRPr sz="1800" b="1">
+                <a:solidFill>
+                  <a:srgbClr val="0F172A"/>
                 </a:solidFill>
                 <a:latin typeface="Segoe UI"/>
               </a:defRPr>
             </a:pPr>
             <a:r>
-              <a:t>9-TOPIC COMPLIANCE MATRIX</a:t>
-            </a:r>
-          </a:p>
-        </p:txBody>
-      </p:sp>
-      <p:sp>
-        <p:nvSpPr>
-          <p:cNvPr id="4" name="TextBox 3"/>
-          <p:cNvSpPr txBox="1"/>
-          <p:nvPr/>
-        </p:nvSpPr>
-        <p:spPr>
-          <a:xfrm>
-            <a:off x="731520" y="621792"/>
-            <a:ext cx="10698480" cy="685800"/>
-          </a:xfrm>
-          <a:prstGeom prst="rect">
-            <a:avLst/>
-          </a:prstGeom>
-          <a:noFill/>
-        </p:spPr>
-        <p:txBody>
-          <a:bodyPr wrap="square" lIns="0" tIns="0" rIns="0" bIns="0">
-            <a:spAutoFit/>
-          </a:bodyPr>
-          <a:lstStyle/>
+              <a:t>9-TOPIC COMPLIANCE MATRIX  |  ตารางสรุปผลการประเมิน 9 หมวดหมู่งานตามเกณฑ์มาตรฐาน EIA Dashboard</a:t>
+            </a:r>
+          </a:p>
           <a:p>
             <a:pPr>
-              <a:defRPr sz="1800" b="1">
-                <a:solidFill>
-                  <a:srgbClr val="0F172A"/>
-                </a:solidFill>
-                <a:latin typeface="Segoe UI"/>
-              </a:defRPr>
-            </a:pPr>
-            <a:r>
-              <a:t>ตารางสรุปผลการประเมิน 9 หมวดหมู่งานตามเกณฑ์มาตรฐาน EIA Dashboard</a:t>
-            </a:r>
-          </a:p>
-          <a:p>
-            <a:pPr>
-              <a:defRPr sz="1050">
-                <a:solidFill>
-                  <a:srgbClr val="475569"/>
+              <a:defRPr sz="1100">
+                <a:solidFill>
+                  <a:srgbClr val="64748B"/>
                 </a:solidFill>
                 <a:latin typeface="Segoe UI"/>
               </a:defRPr>
@@ -5337,7 +5229,7 @@
       </p:sp>
       <p:graphicFrame>
         <p:nvGraphicFramePr>
-          <p:cNvPr id="5" name="Table 4"/>
+          <p:cNvPr id="4" name="Table 3"/>
           <p:cNvGraphicFramePr>
             <a:graphicFrameLocks noGrp="1"/>
           </p:cNvGraphicFramePr>
@@ -5370,24 +5262,1940 @@
                     <a:lstStyle/>
                     <a:p>
                       <a:pPr algn="l">
+                        <a:defRPr b="1" sz="1000">
+                          <a:solidFill>
+                            <a:srgbClr val="FFFFFF"/>
+                          </a:solidFill>
+                          <a:latin typeface="Segoe UI"/>
+                        </a:defRPr>
+                      </a:pPr>
+                      <a:r>
+                        <a:t>Topic ID</a:t>
+                      </a:r>
+                    </a:p>
+                  </a:txBody>
+                  <a:tcPr>
+                    <a:solidFill>
+                      <a:srgbClr val="0F172A"/>
+                    </a:solidFill>
+                  </a:tcPr>
+                </a:tc>
+                <a:tc>
+                  <a:txBody>
+                    <a:bodyPr/>
+                    <a:lstStyle/>
+                    <a:p>
+                      <a:pPr algn="l">
+                        <a:defRPr b="1" sz="1000">
+                          <a:solidFill>
+                            <a:srgbClr val="FFFFFF"/>
+                          </a:solidFill>
+                          <a:latin typeface="Segoe UI"/>
+                        </a:defRPr>
+                      </a:pPr>
+                      <a:r>
+                        <a:t>ชื่อหัวข้อการตรวจสอบ (Topic Description)</a:t>
+                      </a:r>
+                    </a:p>
+                  </a:txBody>
+                  <a:tcPr>
+                    <a:solidFill>
+                      <a:srgbClr val="0F172A"/>
+                    </a:solidFill>
+                  </a:tcPr>
+                </a:tc>
+                <a:tc>
+                  <a:txBody>
+                    <a:bodyPr/>
+                    <a:lstStyle/>
+                    <a:p>
+                      <a:pPr algn="ctr">
+                        <a:defRPr b="1" sz="1000">
+                          <a:solidFill>
+                            <a:srgbClr val="FFFFFF"/>
+                          </a:solidFill>
+                          <a:latin typeface="Segoe UI"/>
+                        </a:defRPr>
+                      </a:pPr>
+                      <a:r>
+                        <a:t>เป้าหมาย (Total)</a:t>
+                      </a:r>
+                    </a:p>
+                  </a:txBody>
+                  <a:tcPr>
+                    <a:solidFill>
+                      <a:srgbClr val="0F172A"/>
+                    </a:solidFill>
+                  </a:tcPr>
+                </a:tc>
+                <a:tc>
+                  <a:txBody>
+                    <a:bodyPr/>
+                    <a:lstStyle/>
+                    <a:p>
+                      <a:pPr algn="ctr">
+                        <a:defRPr b="1" sz="1000">
+                          <a:solidFill>
+                            <a:srgbClr val="FFFFFF"/>
+                          </a:solidFill>
+                          <a:latin typeface="Segoe UI"/>
+                        </a:defRPr>
+                      </a:pPr>
+                      <a:r>
+                        <a:t>ผ่านแล้ว (Passed)</a:t>
+                      </a:r>
+                    </a:p>
+                  </a:txBody>
+                  <a:tcPr>
+                    <a:solidFill>
+                      <a:srgbClr val="0F172A"/>
+                    </a:solidFill>
+                  </a:tcPr>
+                </a:tc>
+                <a:tc>
+                  <a:txBody>
+                    <a:bodyPr/>
+                    <a:lstStyle/>
+                    <a:p>
+                      <a:pPr algn="ctr">
+                        <a:defRPr b="1" sz="1000">
+                          <a:solidFill>
+                            <a:srgbClr val="FFFFFF"/>
+                          </a:solidFill>
+                          <a:latin typeface="Segoe UI"/>
+                        </a:defRPr>
+                      </a:pPr>
+                      <a:r>
+                        <a:t>คงเหลือ (Pending)</a:t>
+                      </a:r>
+                    </a:p>
+                  </a:txBody>
+                  <a:tcPr>
+                    <a:solidFill>
+                      <a:srgbClr val="0F172A"/>
+                    </a:solidFill>
+                  </a:tcPr>
+                </a:tc>
+                <a:tc>
+                  <a:txBody>
+                    <a:bodyPr/>
+                    <a:lstStyle/>
+                    <a:p>
+                      <a:pPr algn="ctr">
+                        <a:defRPr b="1" sz="1000">
+                          <a:solidFill>
+                            <a:srgbClr val="FFFFFF"/>
+                          </a:solidFill>
+                          <a:latin typeface="Segoe UI"/>
+                        </a:defRPr>
+                      </a:pPr>
+                      <a:r>
+                        <a:t>ความสำเร็จ (%)</a:t>
+                      </a:r>
+                    </a:p>
+                  </a:txBody>
+                  <a:tcPr>
+                    <a:solidFill>
+                      <a:srgbClr val="0F172A"/>
+                    </a:solidFill>
+                  </a:tcPr>
+                </a:tc>
+                <a:tc>
+                  <a:txBody>
+                    <a:bodyPr/>
+                    <a:lstStyle/>
+                    <a:p>
+                      <a:pPr algn="ctr">
+                        <a:defRPr b="1" sz="1000">
+                          <a:solidFill>
+                            <a:srgbClr val="FFFFFF"/>
+                          </a:solidFill>
+                          <a:latin typeface="Segoe UI"/>
+                        </a:defRPr>
+                      </a:pPr>
+                      <a:r>
+                        <a:t>เกณฑ์สี EIA</a:t>
+                      </a:r>
+                    </a:p>
+                  </a:txBody>
+                  <a:tcPr>
+                    <a:solidFill>
+                      <a:srgbClr val="0F172A"/>
+                    </a:solidFill>
+                  </a:tcPr>
+                </a:tc>
+                <a:tc>
+                  <a:txBody>
+                    <a:bodyPr/>
+                    <a:lstStyle/>
+                    <a:p>
+                      <a:pPr algn="ctr">
+                        <a:defRPr b="1" sz="1000">
+                          <a:solidFill>
+                            <a:srgbClr val="FFFFFF"/>
+                          </a:solidFill>
+                          <a:latin typeface="Segoe UI"/>
+                        </a:defRPr>
+                      </a:pPr>
+                      <a:r>
+                        <a:t>สถานะ</a:t>
+                      </a:r>
+                    </a:p>
+                  </a:txBody>
+                  <a:tcPr>
+                    <a:solidFill>
+                      <a:srgbClr val="0F172A"/>
+                    </a:solidFill>
+                  </a:tcPr>
+                </a:tc>
+              </a:tr>
+              <a:tr h="440574">
+                <a:tc>
+                  <a:txBody>
+                    <a:bodyPr/>
+                    <a:lstStyle/>
+                    <a:p>
+                      <a:pPr algn="l">
+                        <a:defRPr sz="950">
+                          <a:solidFill>
+                            <a:srgbClr val="0F172A"/>
+                          </a:solidFill>
+                          <a:latin typeface="Segoe UI"/>
+                        </a:defRPr>
+                      </a:pPr>
+                      <a:r>
+                        <a:t>1.1</a:t>
+                      </a:r>
+                    </a:p>
+                  </a:txBody>
+                  <a:tcPr>
+                    <a:solidFill>
+                      <a:srgbClr val="FFFFFF"/>
+                    </a:solidFill>
+                  </a:tcPr>
+                </a:tc>
+                <a:tc>
+                  <a:txBody>
+                    <a:bodyPr/>
+                    <a:lstStyle/>
+                    <a:p>
+                      <a:pPr algn="l">
+                        <a:defRPr sz="950">
+                          <a:solidFill>
+                            <a:srgbClr val="0F172A"/>
+                          </a:solidFill>
+                          <a:latin typeface="Segoe UI"/>
+                        </a:defRPr>
+                      </a:pPr>
+                      <a:r>
+                        <a:t>Missing BU/Company/Location (IT Asset)</a:t>
+                      </a:r>
+                    </a:p>
+                  </a:txBody>
+                  <a:tcPr>
+                    <a:solidFill>
+                      <a:srgbClr val="FFFFFF"/>
+                    </a:solidFill>
+                  </a:tcPr>
+                </a:tc>
+                <a:tc>
+                  <a:txBody>
+                    <a:bodyPr/>
+                    <a:lstStyle/>
+                    <a:p>
+                      <a:pPr algn="ctr">
+                        <a:defRPr sz="950">
+                          <a:solidFill>
+                            <a:srgbClr val="0F172A"/>
+                          </a:solidFill>
+                          <a:latin typeface="Segoe UI"/>
+                        </a:defRPr>
+                      </a:pPr>
+                      <a:r>
+                        <a:t>152</a:t>
+                      </a:r>
+                    </a:p>
+                  </a:txBody>
+                  <a:tcPr>
+                    <a:solidFill>
+                      <a:srgbClr val="FFFFFF"/>
+                    </a:solidFill>
+                  </a:tcPr>
+                </a:tc>
+                <a:tc>
+                  <a:txBody>
+                    <a:bodyPr/>
+                    <a:lstStyle/>
+                    <a:p>
+                      <a:pPr algn="ctr">
+                        <a:defRPr sz="950">
+                          <a:solidFill>
+                            <a:srgbClr val="0F172A"/>
+                          </a:solidFill>
+                          <a:latin typeface="Segoe UI"/>
+                        </a:defRPr>
+                      </a:pPr>
+                      <a:r>
+                        <a:t>25</a:t>
+                      </a:r>
+                    </a:p>
+                  </a:txBody>
+                  <a:tcPr>
+                    <a:solidFill>
+                      <a:srgbClr val="FFFFFF"/>
+                    </a:solidFill>
+                  </a:tcPr>
+                </a:tc>
+                <a:tc>
+                  <a:txBody>
+                    <a:bodyPr/>
+                    <a:lstStyle/>
+                    <a:p>
+                      <a:pPr algn="ctr">
+                        <a:defRPr sz="950">
+                          <a:solidFill>
+                            <a:srgbClr val="0F172A"/>
+                          </a:solidFill>
+                          <a:latin typeface="Segoe UI"/>
+                        </a:defRPr>
+                      </a:pPr>
+                      <a:r>
+                        <a:t>127</a:t>
+                      </a:r>
+                    </a:p>
+                  </a:txBody>
+                  <a:tcPr>
+                    <a:solidFill>
+                      <a:srgbClr val="FFFFFF"/>
+                    </a:solidFill>
+                  </a:tcPr>
+                </a:tc>
+                <a:tc>
+                  <a:txBody>
+                    <a:bodyPr/>
+                    <a:lstStyle/>
+                    <a:p>
+                      <a:pPr algn="ctr">
+                        <a:defRPr sz="950">
+                          <a:solidFill>
+                            <a:srgbClr val="0F172A"/>
+                          </a:solidFill>
+                          <a:latin typeface="Segoe UI"/>
+                        </a:defRPr>
+                      </a:pPr>
+                      <a:r>
+                        <a:t>16.45%</a:t>
+                      </a:r>
+                    </a:p>
+                  </a:txBody>
+                  <a:tcPr>
+                    <a:solidFill>
+                      <a:srgbClr val="FFFFFF"/>
+                    </a:solidFill>
+                  </a:tcPr>
+                </a:tc>
+                <a:tc>
+                  <a:txBody>
+                    <a:bodyPr/>
+                    <a:lstStyle/>
+                    <a:p>
+                      <a:pPr algn="ctr">
                         <a:defRPr sz="950" b="1">
                           <a:solidFill>
-                            <a:srgbClr val="FFFFFF"/>
-                          </a:solidFill>
-                          <a:latin typeface="Segoe UI"/>
-                        </a:defRPr>
-                      </a:pPr>
-                      <a:r>
-                        <a:t>Topic ID</a:t>
-                      </a:r>
-                    </a:p>
-                  </a:txBody>
-                  <a:tcPr anchor="ctr">
-                    <a:solidFill>
-                      <a:srgbClr val="0F172A"/>
-                    </a:solidFill>
-                  </a:tcPr>
-                </a:tc>
+                            <a:srgbClr val="F43F5E"/>
+                          </a:solidFill>
+                          <a:latin typeface="Segoe UI"/>
+                        </a:defRPr>
+                      </a:pPr>
+                      <a:r>
+                        <a:t>🔴 Critical</a:t>
+                      </a:r>
+                    </a:p>
+                  </a:txBody>
+                  <a:tcPr>
+                    <a:solidFill>
+                      <a:srgbClr val="FFFFFF"/>
+                    </a:solidFill>
+                  </a:tcPr>
+                </a:tc>
+                <a:tc>
+                  <a:txBody>
+                    <a:bodyPr/>
+                    <a:lstStyle/>
+                    <a:p>
+                      <a:pPr algn="ctr">
+                        <a:defRPr sz="950" b="1">
+                          <a:solidFill>
+                            <a:srgbClr val="F43F5E"/>
+                          </a:solidFill>
+                          <a:latin typeface="Segoe UI"/>
+                        </a:defRPr>
+                      </a:pPr>
+                      <a:r>
+                        <a:t>FAIL</a:t>
+                      </a:r>
+                    </a:p>
+                  </a:txBody>
+                  <a:tcPr>
+                    <a:solidFill>
+                      <a:srgbClr val="FFFFFF"/>
+                    </a:solidFill>
+                  </a:tcPr>
+                </a:tc>
+              </a:tr>
+              <a:tr h="440574">
+                <a:tc>
+                  <a:txBody>
+                    <a:bodyPr/>
+                    <a:lstStyle/>
+                    <a:p>
+                      <a:pPr algn="l">
+                        <a:defRPr sz="950">
+                          <a:solidFill>
+                            <a:srgbClr val="0F172A"/>
+                          </a:solidFill>
+                          <a:latin typeface="Segoe UI"/>
+                        </a:defRPr>
+                      </a:pPr>
+                      <a:r>
+                        <a:t>1.2</a:t>
+                      </a:r>
+                    </a:p>
+                  </a:txBody>
+                  <a:tcPr>
+                    <a:solidFill>
+                      <a:srgbClr val="F8FAFC"/>
+                    </a:solidFill>
+                  </a:tcPr>
+                </a:tc>
+                <a:tc>
+                  <a:txBody>
+                    <a:bodyPr/>
+                    <a:lstStyle/>
+                    <a:p>
+                      <a:pPr algn="l">
+                        <a:defRPr sz="950">
+                          <a:solidFill>
+                            <a:srgbClr val="0F172A"/>
+                          </a:solidFill>
+                          <a:latin typeface="Segoe UI"/>
+                        </a:defRPr>
+                      </a:pPr>
+                      <a:r>
+                        <a:t>Not installed GLPI Agent</a:t>
+                      </a:r>
+                    </a:p>
+                  </a:txBody>
+                  <a:tcPr>
+                    <a:solidFill>
+                      <a:srgbClr val="F8FAFC"/>
+                    </a:solidFill>
+                  </a:tcPr>
+                </a:tc>
+                <a:tc>
+                  <a:txBody>
+                    <a:bodyPr/>
+                    <a:lstStyle/>
+                    <a:p>
+                      <a:pPr algn="ctr">
+                        <a:defRPr sz="950">
+                          <a:solidFill>
+                            <a:srgbClr val="0F172A"/>
+                          </a:solidFill>
+                          <a:latin typeface="Segoe UI"/>
+                        </a:defRPr>
+                      </a:pPr>
+                      <a:r>
+                        <a:t>50</a:t>
+                      </a:r>
+                    </a:p>
+                  </a:txBody>
+                  <a:tcPr>
+                    <a:solidFill>
+                      <a:srgbClr val="F8FAFC"/>
+                    </a:solidFill>
+                  </a:tcPr>
+                </a:tc>
+                <a:tc>
+                  <a:txBody>
+                    <a:bodyPr/>
+                    <a:lstStyle/>
+                    <a:p>
+                      <a:pPr algn="ctr">
+                        <a:defRPr sz="950">
+                          <a:solidFill>
+                            <a:srgbClr val="0F172A"/>
+                          </a:solidFill>
+                          <a:latin typeface="Segoe UI"/>
+                        </a:defRPr>
+                      </a:pPr>
+                      <a:r>
+                        <a:t>11</a:t>
+                      </a:r>
+                    </a:p>
+                  </a:txBody>
+                  <a:tcPr>
+                    <a:solidFill>
+                      <a:srgbClr val="F8FAFC"/>
+                    </a:solidFill>
+                  </a:tcPr>
+                </a:tc>
+                <a:tc>
+                  <a:txBody>
+                    <a:bodyPr/>
+                    <a:lstStyle/>
+                    <a:p>
+                      <a:pPr algn="ctr">
+                        <a:defRPr sz="950">
+                          <a:solidFill>
+                            <a:srgbClr val="0F172A"/>
+                          </a:solidFill>
+                          <a:latin typeface="Segoe UI"/>
+                        </a:defRPr>
+                      </a:pPr>
+                      <a:r>
+                        <a:t>39</a:t>
+                      </a:r>
+                    </a:p>
+                  </a:txBody>
+                  <a:tcPr>
+                    <a:solidFill>
+                      <a:srgbClr val="F8FAFC"/>
+                    </a:solidFill>
+                  </a:tcPr>
+                </a:tc>
+                <a:tc>
+                  <a:txBody>
+                    <a:bodyPr/>
+                    <a:lstStyle/>
+                    <a:p>
+                      <a:pPr algn="ctr">
+                        <a:defRPr sz="950">
+                          <a:solidFill>
+                            <a:srgbClr val="0F172A"/>
+                          </a:solidFill>
+                          <a:latin typeface="Segoe UI"/>
+                        </a:defRPr>
+                      </a:pPr>
+                      <a:r>
+                        <a:t>22.00%</a:t>
+                      </a:r>
+                    </a:p>
+                  </a:txBody>
+                  <a:tcPr>
+                    <a:solidFill>
+                      <a:srgbClr val="F8FAFC"/>
+                    </a:solidFill>
+                  </a:tcPr>
+                </a:tc>
+                <a:tc>
+                  <a:txBody>
+                    <a:bodyPr/>
+                    <a:lstStyle/>
+                    <a:p>
+                      <a:pPr algn="ctr">
+                        <a:defRPr sz="950" b="1">
+                          <a:solidFill>
+                            <a:srgbClr val="F43F5E"/>
+                          </a:solidFill>
+                          <a:latin typeface="Segoe UI"/>
+                        </a:defRPr>
+                      </a:pPr>
+                      <a:r>
+                        <a:t>🔴 Critical</a:t>
+                      </a:r>
+                    </a:p>
+                  </a:txBody>
+                  <a:tcPr>
+                    <a:solidFill>
+                      <a:srgbClr val="F8FAFC"/>
+                    </a:solidFill>
+                  </a:tcPr>
+                </a:tc>
+                <a:tc>
+                  <a:txBody>
+                    <a:bodyPr/>
+                    <a:lstStyle/>
+                    <a:p>
+                      <a:pPr algn="ctr">
+                        <a:defRPr sz="950" b="1">
+                          <a:solidFill>
+                            <a:srgbClr val="F43F5E"/>
+                          </a:solidFill>
+                          <a:latin typeface="Segoe UI"/>
+                        </a:defRPr>
+                      </a:pPr>
+                      <a:r>
+                        <a:t>FAIL</a:t>
+                      </a:r>
+                    </a:p>
+                  </a:txBody>
+                  <a:tcPr>
+                    <a:solidFill>
+                      <a:srgbClr val="F8FAFC"/>
+                    </a:solidFill>
+                  </a:tcPr>
+                </a:tc>
+              </a:tr>
+              <a:tr h="440574">
+                <a:tc>
+                  <a:txBody>
+                    <a:bodyPr/>
+                    <a:lstStyle/>
+                    <a:p>
+                      <a:pPr algn="l">
+                        <a:defRPr sz="950">
+                          <a:solidFill>
+                            <a:srgbClr val="0F172A"/>
+                          </a:solidFill>
+                          <a:latin typeface="Segoe UI"/>
+                        </a:defRPr>
+                      </a:pPr>
+                      <a:r>
+                        <a:t>2</a:t>
+                      </a:r>
+                    </a:p>
+                  </a:txBody>
+                  <a:tcPr>
+                    <a:solidFill>
+                      <a:srgbClr val="FFFFFF"/>
+                    </a:solidFill>
+                  </a:tcPr>
+                </a:tc>
+                <a:tc>
+                  <a:txBody>
+                    <a:bodyPr/>
+                    <a:lstStyle/>
+                    <a:p>
+                      <a:pPr algn="l">
+                        <a:defRPr sz="950">
+                          <a:solidFill>
+                            <a:srgbClr val="0F172A"/>
+                          </a:solidFill>
+                          <a:latin typeface="Segoe UI"/>
+                        </a:defRPr>
+                      </a:pPr>
+                      <a:r>
+                        <a:t>W11 OS version not current (Update OS)</a:t>
+                      </a:r>
+                    </a:p>
+                  </a:txBody>
+                  <a:tcPr>
+                    <a:solidFill>
+                      <a:srgbClr val="FFFFFF"/>
+                    </a:solidFill>
+                  </a:tcPr>
+                </a:tc>
+                <a:tc>
+                  <a:txBody>
+                    <a:bodyPr/>
+                    <a:lstStyle/>
+                    <a:p>
+                      <a:pPr algn="ctr">
+                        <a:defRPr sz="950">
+                          <a:solidFill>
+                            <a:srgbClr val="0F172A"/>
+                          </a:solidFill>
+                          <a:latin typeface="Segoe UI"/>
+                        </a:defRPr>
+                      </a:pPr>
+                      <a:r>
+                        <a:t>3,152</a:t>
+                      </a:r>
+                    </a:p>
+                  </a:txBody>
+                  <a:tcPr>
+                    <a:solidFill>
+                      <a:srgbClr val="FFFFFF"/>
+                    </a:solidFill>
+                  </a:tcPr>
+                </a:tc>
+                <a:tc>
+                  <a:txBody>
+                    <a:bodyPr/>
+                    <a:lstStyle/>
+                    <a:p>
+                      <a:pPr algn="ctr">
+                        <a:defRPr sz="950">
+                          <a:solidFill>
+                            <a:srgbClr val="0F172A"/>
+                          </a:solidFill>
+                          <a:latin typeface="Segoe UI"/>
+                        </a:defRPr>
+                      </a:pPr>
+                      <a:r>
+                        <a:t>103</a:t>
+                      </a:r>
+                    </a:p>
+                  </a:txBody>
+                  <a:tcPr>
+                    <a:solidFill>
+                      <a:srgbClr val="FFFFFF"/>
+                    </a:solidFill>
+                  </a:tcPr>
+                </a:tc>
+                <a:tc>
+                  <a:txBody>
+                    <a:bodyPr/>
+                    <a:lstStyle/>
+                    <a:p>
+                      <a:pPr algn="ctr">
+                        <a:defRPr sz="950">
+                          <a:solidFill>
+                            <a:srgbClr val="0F172A"/>
+                          </a:solidFill>
+                          <a:latin typeface="Segoe UI"/>
+                        </a:defRPr>
+                      </a:pPr>
+                      <a:r>
+                        <a:t>3,049</a:t>
+                      </a:r>
+                    </a:p>
+                  </a:txBody>
+                  <a:tcPr>
+                    <a:solidFill>
+                      <a:srgbClr val="FFFFFF"/>
+                    </a:solidFill>
+                  </a:tcPr>
+                </a:tc>
+                <a:tc>
+                  <a:txBody>
+                    <a:bodyPr/>
+                    <a:lstStyle/>
+                    <a:p>
+                      <a:pPr algn="ctr">
+                        <a:defRPr sz="950">
+                          <a:solidFill>
+                            <a:srgbClr val="0F172A"/>
+                          </a:solidFill>
+                          <a:latin typeface="Segoe UI"/>
+                        </a:defRPr>
+                      </a:pPr>
+                      <a:r>
+                        <a:t>3.27%</a:t>
+                      </a:r>
+                    </a:p>
+                  </a:txBody>
+                  <a:tcPr>
+                    <a:solidFill>
+                      <a:srgbClr val="FFFFFF"/>
+                    </a:solidFill>
+                  </a:tcPr>
+                </a:tc>
+                <a:tc>
+                  <a:txBody>
+                    <a:bodyPr/>
+                    <a:lstStyle/>
+                    <a:p>
+                      <a:pPr algn="ctr">
+                        <a:defRPr sz="950" b="1">
+                          <a:solidFill>
+                            <a:srgbClr val="F43F5E"/>
+                          </a:solidFill>
+                          <a:latin typeface="Segoe UI"/>
+                        </a:defRPr>
+                      </a:pPr>
+                      <a:r>
+                        <a:t>🔴 Critical</a:t>
+                      </a:r>
+                    </a:p>
+                  </a:txBody>
+                  <a:tcPr>
+                    <a:solidFill>
+                      <a:srgbClr val="FFFFFF"/>
+                    </a:solidFill>
+                  </a:tcPr>
+                </a:tc>
+                <a:tc>
+                  <a:txBody>
+                    <a:bodyPr/>
+                    <a:lstStyle/>
+                    <a:p>
+                      <a:pPr algn="ctr">
+                        <a:defRPr sz="950" b="1">
+                          <a:solidFill>
+                            <a:srgbClr val="F43F5E"/>
+                          </a:solidFill>
+                          <a:latin typeface="Segoe UI"/>
+                        </a:defRPr>
+                      </a:pPr>
+                      <a:r>
+                        <a:t>FAIL</a:t>
+                      </a:r>
+                    </a:p>
+                  </a:txBody>
+                  <a:tcPr>
+                    <a:solidFill>
+                      <a:srgbClr val="FFFFFF"/>
+                    </a:solidFill>
+                  </a:tcPr>
+                </a:tc>
+              </a:tr>
+              <a:tr h="440574">
+                <a:tc>
+                  <a:txBody>
+                    <a:bodyPr/>
+                    <a:lstStyle/>
+                    <a:p>
+                      <a:pPr algn="l">
+                        <a:defRPr sz="950">
+                          <a:solidFill>
+                            <a:srgbClr val="0F172A"/>
+                          </a:solidFill>
+                          <a:latin typeface="Segoe UI"/>
+                        </a:defRPr>
+                      </a:pPr>
+                      <a:r>
+                        <a:t>3</a:t>
+                      </a:r>
+                    </a:p>
+                  </a:txBody>
+                  <a:tcPr>
+                    <a:solidFill>
+                      <a:srgbClr val="F8FAFC"/>
+                    </a:solidFill>
+                  </a:tcPr>
+                </a:tc>
+                <a:tc>
+                  <a:txBody>
+                    <a:bodyPr/>
+                    <a:lstStyle/>
+                    <a:p>
+                      <a:pPr algn="l">
+                        <a:defRPr sz="950">
+                          <a:solidFill>
+                            <a:srgbClr val="0F172A"/>
+                          </a:solidFill>
+                          <a:latin typeface="Segoe UI"/>
+                        </a:defRPr>
+                      </a:pPr>
+                      <a:r>
+                        <a:t>Require Restart (Pending Restart)</a:t>
+                      </a:r>
+                    </a:p>
+                  </a:txBody>
+                  <a:tcPr>
+                    <a:solidFill>
+                      <a:srgbClr val="F8FAFC"/>
+                    </a:solidFill>
+                  </a:tcPr>
+                </a:tc>
+                <a:tc>
+                  <a:txBody>
+                    <a:bodyPr/>
+                    <a:lstStyle/>
+                    <a:p>
+                      <a:pPr algn="ctr">
+                        <a:defRPr sz="950">
+                          <a:solidFill>
+                            <a:srgbClr val="0F172A"/>
+                          </a:solidFill>
+                          <a:latin typeface="Segoe UI"/>
+                        </a:defRPr>
+                      </a:pPr>
+                      <a:r>
+                        <a:t>327</a:t>
+                      </a:r>
+                    </a:p>
+                  </a:txBody>
+                  <a:tcPr>
+                    <a:solidFill>
+                      <a:srgbClr val="F8FAFC"/>
+                    </a:solidFill>
+                  </a:tcPr>
+                </a:tc>
+                <a:tc>
+                  <a:txBody>
+                    <a:bodyPr/>
+                    <a:lstStyle/>
+                    <a:p>
+                      <a:pPr algn="ctr">
+                        <a:defRPr sz="950">
+                          <a:solidFill>
+                            <a:srgbClr val="0F172A"/>
+                          </a:solidFill>
+                          <a:latin typeface="Segoe UI"/>
+                        </a:defRPr>
+                      </a:pPr>
+                      <a:r>
+                        <a:t>7</a:t>
+                      </a:r>
+                    </a:p>
+                  </a:txBody>
+                  <a:tcPr>
+                    <a:solidFill>
+                      <a:srgbClr val="F8FAFC"/>
+                    </a:solidFill>
+                  </a:tcPr>
+                </a:tc>
+                <a:tc>
+                  <a:txBody>
+                    <a:bodyPr/>
+                    <a:lstStyle/>
+                    <a:p>
+                      <a:pPr algn="ctr">
+                        <a:defRPr sz="950">
+                          <a:solidFill>
+                            <a:srgbClr val="0F172A"/>
+                          </a:solidFill>
+                          <a:latin typeface="Segoe UI"/>
+                        </a:defRPr>
+                      </a:pPr>
+                      <a:r>
+                        <a:t>320</a:t>
+                      </a:r>
+                    </a:p>
+                  </a:txBody>
+                  <a:tcPr>
+                    <a:solidFill>
+                      <a:srgbClr val="F8FAFC"/>
+                    </a:solidFill>
+                  </a:tcPr>
+                </a:tc>
+                <a:tc>
+                  <a:txBody>
+                    <a:bodyPr/>
+                    <a:lstStyle/>
+                    <a:p>
+                      <a:pPr algn="ctr">
+                        <a:defRPr sz="950">
+                          <a:solidFill>
+                            <a:srgbClr val="0F172A"/>
+                          </a:solidFill>
+                          <a:latin typeface="Segoe UI"/>
+                        </a:defRPr>
+                      </a:pPr>
+                      <a:r>
+                        <a:t>2.14%</a:t>
+                      </a:r>
+                    </a:p>
+                  </a:txBody>
+                  <a:tcPr>
+                    <a:solidFill>
+                      <a:srgbClr val="F8FAFC"/>
+                    </a:solidFill>
+                  </a:tcPr>
+                </a:tc>
+                <a:tc>
+                  <a:txBody>
+                    <a:bodyPr/>
+                    <a:lstStyle/>
+                    <a:p>
+                      <a:pPr algn="ctr">
+                        <a:defRPr sz="950" b="1">
+                          <a:solidFill>
+                            <a:srgbClr val="F43F5E"/>
+                          </a:solidFill>
+                          <a:latin typeface="Segoe UI"/>
+                        </a:defRPr>
+                      </a:pPr>
+                      <a:r>
+                        <a:t>🔴 Critical</a:t>
+                      </a:r>
+                    </a:p>
+                  </a:txBody>
+                  <a:tcPr>
+                    <a:solidFill>
+                      <a:srgbClr val="F8FAFC"/>
+                    </a:solidFill>
+                  </a:tcPr>
+                </a:tc>
+                <a:tc>
+                  <a:txBody>
+                    <a:bodyPr/>
+                    <a:lstStyle/>
+                    <a:p>
+                      <a:pPr algn="ctr">
+                        <a:defRPr sz="950" b="1">
+                          <a:solidFill>
+                            <a:srgbClr val="F43F5E"/>
+                          </a:solidFill>
+                          <a:latin typeface="Segoe UI"/>
+                        </a:defRPr>
+                      </a:pPr>
+                      <a:r>
+                        <a:t>FAIL</a:t>
+                      </a:r>
+                    </a:p>
+                  </a:txBody>
+                  <a:tcPr>
+                    <a:solidFill>
+                      <a:srgbClr val="F8FAFC"/>
+                    </a:solidFill>
+                  </a:tcPr>
+                </a:tc>
+              </a:tr>
+              <a:tr h="440574">
+                <a:tc>
+                  <a:txBody>
+                    <a:bodyPr/>
+                    <a:lstStyle/>
+                    <a:p>
+                      <a:pPr algn="l">
+                        <a:defRPr sz="950">
+                          <a:solidFill>
+                            <a:srgbClr val="0F172A"/>
+                          </a:solidFill>
+                          <a:latin typeface="Segoe UI"/>
+                        </a:defRPr>
+                      </a:pPr>
+                      <a:r>
+                        <a:t>4</a:t>
+                      </a:r>
+                    </a:p>
+                  </a:txBody>
+                  <a:tcPr>
+                    <a:solidFill>
+                      <a:srgbClr val="FFFFFF"/>
+                    </a:solidFill>
+                  </a:tcPr>
+                </a:tc>
+                <a:tc>
+                  <a:txBody>
+                    <a:bodyPr/>
+                    <a:lstStyle/>
+                    <a:p>
+                      <a:pPr algn="l">
+                        <a:defRPr sz="950">
+                          <a:solidFill>
+                            <a:srgbClr val="0F172A"/>
+                          </a:solidFill>
+                          <a:latin typeface="Segoe UI"/>
+                        </a:defRPr>
+                      </a:pPr>
+                      <a:r>
+                        <a:t>Antivirus software not installed</a:t>
+                      </a:r>
+                    </a:p>
+                  </a:txBody>
+                  <a:tcPr>
+                    <a:solidFill>
+                      <a:srgbClr val="FFFFFF"/>
+                    </a:solidFill>
+                  </a:tcPr>
+                </a:tc>
+                <a:tc>
+                  <a:txBody>
+                    <a:bodyPr/>
+                    <a:lstStyle/>
+                    <a:p>
+                      <a:pPr algn="ctr">
+                        <a:defRPr sz="950">
+                          <a:solidFill>
+                            <a:srgbClr val="0F172A"/>
+                          </a:solidFill>
+                          <a:latin typeface="Segoe UI"/>
+                        </a:defRPr>
+                      </a:pPr>
+                      <a:r>
+                        <a:t>95</a:t>
+                      </a:r>
+                    </a:p>
+                  </a:txBody>
+                  <a:tcPr>
+                    <a:solidFill>
+                      <a:srgbClr val="FFFFFF"/>
+                    </a:solidFill>
+                  </a:tcPr>
+                </a:tc>
+                <a:tc>
+                  <a:txBody>
+                    <a:bodyPr/>
+                    <a:lstStyle/>
+                    <a:p>
+                      <a:pPr algn="ctr">
+                        <a:defRPr sz="950">
+                          <a:solidFill>
+                            <a:srgbClr val="0F172A"/>
+                          </a:solidFill>
+                          <a:latin typeface="Segoe UI"/>
+                        </a:defRPr>
+                      </a:pPr>
+                      <a:r>
+                        <a:t>3</a:t>
+                      </a:r>
+                    </a:p>
+                  </a:txBody>
+                  <a:tcPr>
+                    <a:solidFill>
+                      <a:srgbClr val="FFFFFF"/>
+                    </a:solidFill>
+                  </a:tcPr>
+                </a:tc>
+                <a:tc>
+                  <a:txBody>
+                    <a:bodyPr/>
+                    <a:lstStyle/>
+                    <a:p>
+                      <a:pPr algn="ctr">
+                        <a:defRPr sz="950">
+                          <a:solidFill>
+                            <a:srgbClr val="0F172A"/>
+                          </a:solidFill>
+                          <a:latin typeface="Segoe UI"/>
+                        </a:defRPr>
+                      </a:pPr>
+                      <a:r>
+                        <a:t>92</a:t>
+                      </a:r>
+                    </a:p>
+                  </a:txBody>
+                  <a:tcPr>
+                    <a:solidFill>
+                      <a:srgbClr val="FFFFFF"/>
+                    </a:solidFill>
+                  </a:tcPr>
+                </a:tc>
+                <a:tc>
+                  <a:txBody>
+                    <a:bodyPr/>
+                    <a:lstStyle/>
+                    <a:p>
+                      <a:pPr algn="ctr">
+                        <a:defRPr sz="950">
+                          <a:solidFill>
+                            <a:srgbClr val="0F172A"/>
+                          </a:solidFill>
+                          <a:latin typeface="Segoe UI"/>
+                        </a:defRPr>
+                      </a:pPr>
+                      <a:r>
+                        <a:t>3.16%</a:t>
+                      </a:r>
+                    </a:p>
+                  </a:txBody>
+                  <a:tcPr>
+                    <a:solidFill>
+                      <a:srgbClr val="FFFFFF"/>
+                    </a:solidFill>
+                  </a:tcPr>
+                </a:tc>
+                <a:tc>
+                  <a:txBody>
+                    <a:bodyPr/>
+                    <a:lstStyle/>
+                    <a:p>
+                      <a:pPr algn="ctr">
+                        <a:defRPr sz="950" b="1">
+                          <a:solidFill>
+                            <a:srgbClr val="F43F5E"/>
+                          </a:solidFill>
+                          <a:latin typeface="Segoe UI"/>
+                        </a:defRPr>
+                      </a:pPr>
+                      <a:r>
+                        <a:t>🔴 Critical</a:t>
+                      </a:r>
+                    </a:p>
+                  </a:txBody>
+                  <a:tcPr>
+                    <a:solidFill>
+                      <a:srgbClr val="FFFFFF"/>
+                    </a:solidFill>
+                  </a:tcPr>
+                </a:tc>
+                <a:tc>
+                  <a:txBody>
+                    <a:bodyPr/>
+                    <a:lstStyle/>
+                    <a:p>
+                      <a:pPr algn="ctr">
+                        <a:defRPr sz="950" b="1">
+                          <a:solidFill>
+                            <a:srgbClr val="F43F5E"/>
+                          </a:solidFill>
+                          <a:latin typeface="Segoe UI"/>
+                        </a:defRPr>
+                      </a:pPr>
+                      <a:r>
+                        <a:t>FAIL</a:t>
+                      </a:r>
+                    </a:p>
+                  </a:txBody>
+                  <a:tcPr>
+                    <a:solidFill>
+                      <a:srgbClr val="FFFFFF"/>
+                    </a:solidFill>
+                  </a:tcPr>
+                </a:tc>
+              </a:tr>
+              <a:tr h="440574">
+                <a:tc>
+                  <a:txBody>
+                    <a:bodyPr/>
+                    <a:lstStyle/>
+                    <a:p>
+                      <a:pPr algn="l">
+                        <a:defRPr sz="950">
+                          <a:solidFill>
+                            <a:srgbClr val="0F172A"/>
+                          </a:solidFill>
+                          <a:latin typeface="Segoe UI"/>
+                        </a:defRPr>
+                      </a:pPr>
+                      <a:r>
+                        <a:t>5</a:t>
+                      </a:r>
+                    </a:p>
+                  </a:txBody>
+                  <a:tcPr>
+                    <a:solidFill>
+                      <a:srgbClr val="F8FAFC"/>
+                    </a:solidFill>
+                  </a:tcPr>
+                </a:tc>
+                <a:tc>
+                  <a:txBody>
+                    <a:bodyPr/>
+                    <a:lstStyle/>
+                    <a:p>
+                      <a:pPr algn="l">
+                        <a:defRPr sz="950">
+                          <a:solidFill>
+                            <a:srgbClr val="0F172A"/>
+                          </a:solidFill>
+                          <a:latin typeface="Segoe UI"/>
+                        </a:defRPr>
+                      </a:pPr>
+                      <a:r>
+                        <a:t>Built-in firewall not enabled</a:t>
+                      </a:r>
+                    </a:p>
+                  </a:txBody>
+                  <a:tcPr>
+                    <a:solidFill>
+                      <a:srgbClr val="F8FAFC"/>
+                    </a:solidFill>
+                  </a:tcPr>
+                </a:tc>
+                <a:tc>
+                  <a:txBody>
+                    <a:bodyPr/>
+                    <a:lstStyle/>
+                    <a:p>
+                      <a:pPr algn="ctr">
+                        <a:defRPr sz="950">
+                          <a:solidFill>
+                            <a:srgbClr val="0F172A"/>
+                          </a:solidFill>
+                          <a:latin typeface="Segoe UI"/>
+                        </a:defRPr>
+                      </a:pPr>
+                      <a:r>
+                        <a:t>567</a:t>
+                      </a:r>
+                    </a:p>
+                  </a:txBody>
+                  <a:tcPr>
+                    <a:solidFill>
+                      <a:srgbClr val="F8FAFC"/>
+                    </a:solidFill>
+                  </a:tcPr>
+                </a:tc>
+                <a:tc>
+                  <a:txBody>
+                    <a:bodyPr/>
+                    <a:lstStyle/>
+                    <a:p>
+                      <a:pPr algn="ctr">
+                        <a:defRPr sz="950">
+                          <a:solidFill>
+                            <a:srgbClr val="0F172A"/>
+                          </a:solidFill>
+                          <a:latin typeface="Segoe UI"/>
+                        </a:defRPr>
+                      </a:pPr>
+                      <a:r>
+                        <a:t>10</a:t>
+                      </a:r>
+                    </a:p>
+                  </a:txBody>
+                  <a:tcPr>
+                    <a:solidFill>
+                      <a:srgbClr val="F8FAFC"/>
+                    </a:solidFill>
+                  </a:tcPr>
+                </a:tc>
+                <a:tc>
+                  <a:txBody>
+                    <a:bodyPr/>
+                    <a:lstStyle/>
+                    <a:p>
+                      <a:pPr algn="ctr">
+                        <a:defRPr sz="950">
+                          <a:solidFill>
+                            <a:srgbClr val="0F172A"/>
+                          </a:solidFill>
+                          <a:latin typeface="Segoe UI"/>
+                        </a:defRPr>
+                      </a:pPr>
+                      <a:r>
+                        <a:t>557</a:t>
+                      </a:r>
+                    </a:p>
+                  </a:txBody>
+                  <a:tcPr>
+                    <a:solidFill>
+                      <a:srgbClr val="F8FAFC"/>
+                    </a:solidFill>
+                  </a:tcPr>
+                </a:tc>
+                <a:tc>
+                  <a:txBody>
+                    <a:bodyPr/>
+                    <a:lstStyle/>
+                    <a:p>
+                      <a:pPr algn="ctr">
+                        <a:defRPr sz="950">
+                          <a:solidFill>
+                            <a:srgbClr val="0F172A"/>
+                          </a:solidFill>
+                          <a:latin typeface="Segoe UI"/>
+                        </a:defRPr>
+                      </a:pPr>
+                      <a:r>
+                        <a:t>1.76%</a:t>
+                      </a:r>
+                    </a:p>
+                  </a:txBody>
+                  <a:tcPr>
+                    <a:solidFill>
+                      <a:srgbClr val="F8FAFC"/>
+                    </a:solidFill>
+                  </a:tcPr>
+                </a:tc>
+                <a:tc>
+                  <a:txBody>
+                    <a:bodyPr/>
+                    <a:lstStyle/>
+                    <a:p>
+                      <a:pPr algn="ctr">
+                        <a:defRPr sz="950" b="1">
+                          <a:solidFill>
+                            <a:srgbClr val="F43F5E"/>
+                          </a:solidFill>
+                          <a:latin typeface="Segoe UI"/>
+                        </a:defRPr>
+                      </a:pPr>
+                      <a:r>
+                        <a:t>🔴 Critical</a:t>
+                      </a:r>
+                    </a:p>
+                  </a:txBody>
+                  <a:tcPr>
+                    <a:solidFill>
+                      <a:srgbClr val="F8FAFC"/>
+                    </a:solidFill>
+                  </a:tcPr>
+                </a:tc>
+                <a:tc>
+                  <a:txBody>
+                    <a:bodyPr/>
+                    <a:lstStyle/>
+                    <a:p>
+                      <a:pPr algn="ctr">
+                        <a:defRPr sz="950" b="1">
+                          <a:solidFill>
+                            <a:srgbClr val="F43F5E"/>
+                          </a:solidFill>
+                          <a:latin typeface="Segoe UI"/>
+                        </a:defRPr>
+                      </a:pPr>
+                      <a:r>
+                        <a:t>FAIL</a:t>
+                      </a:r>
+                    </a:p>
+                  </a:txBody>
+                  <a:tcPr>
+                    <a:solidFill>
+                      <a:srgbClr val="F8FAFC"/>
+                    </a:solidFill>
+                  </a:tcPr>
+                </a:tc>
+              </a:tr>
+              <a:tr h="440574">
+                <a:tc>
+                  <a:txBody>
+                    <a:bodyPr/>
+                    <a:lstStyle/>
+                    <a:p>
+                      <a:pPr algn="l">
+                        <a:defRPr sz="950">
+                          <a:solidFill>
+                            <a:srgbClr val="0F172A"/>
+                          </a:solidFill>
+                          <a:latin typeface="Segoe UI"/>
+                        </a:defRPr>
+                      </a:pPr>
+                      <a:r>
+                        <a:t>6</a:t>
+                      </a:r>
+                    </a:p>
+                  </a:txBody>
+                  <a:tcPr>
+                    <a:solidFill>
+                      <a:srgbClr val="FFFFFF"/>
+                    </a:solidFill>
+                  </a:tcPr>
+                </a:tc>
+                <a:tc>
+                  <a:txBody>
+                    <a:bodyPr/>
+                    <a:lstStyle/>
+                    <a:p>
+                      <a:pPr algn="l">
+                        <a:defRPr sz="950">
+                          <a:solidFill>
+                            <a:srgbClr val="0F172A"/>
+                          </a:solidFill>
+                          <a:latin typeface="Segoe UI"/>
+                        </a:defRPr>
+                      </a:pPr>
+                      <a:r>
+                        <a:t>Device not joined to domain</a:t>
+                      </a:r>
+                    </a:p>
+                  </a:txBody>
+                  <a:tcPr>
+                    <a:solidFill>
+                      <a:srgbClr val="FFFFFF"/>
+                    </a:solidFill>
+                  </a:tcPr>
+                </a:tc>
+                <a:tc>
+                  <a:txBody>
+                    <a:bodyPr/>
+                    <a:lstStyle/>
+                    <a:p>
+                      <a:pPr algn="ctr">
+                        <a:defRPr sz="950">
+                          <a:solidFill>
+                            <a:srgbClr val="0F172A"/>
+                          </a:solidFill>
+                          <a:latin typeface="Segoe UI"/>
+                        </a:defRPr>
+                      </a:pPr>
+                      <a:r>
+                        <a:t>23</a:t>
+                      </a:r>
+                    </a:p>
+                  </a:txBody>
+                  <a:tcPr>
+                    <a:solidFill>
+                      <a:srgbClr val="FFFFFF"/>
+                    </a:solidFill>
+                  </a:tcPr>
+                </a:tc>
+                <a:tc>
+                  <a:txBody>
+                    <a:bodyPr/>
+                    <a:lstStyle/>
+                    <a:p>
+                      <a:pPr algn="ctr">
+                        <a:defRPr sz="950">
+                          <a:solidFill>
+                            <a:srgbClr val="0F172A"/>
+                          </a:solidFill>
+                          <a:latin typeface="Segoe UI"/>
+                        </a:defRPr>
+                      </a:pPr>
+                      <a:r>
+                        <a:t>4</a:t>
+                      </a:r>
+                    </a:p>
+                  </a:txBody>
+                  <a:tcPr>
+                    <a:solidFill>
+                      <a:srgbClr val="FFFFFF"/>
+                    </a:solidFill>
+                  </a:tcPr>
+                </a:tc>
+                <a:tc>
+                  <a:txBody>
+                    <a:bodyPr/>
+                    <a:lstStyle/>
+                    <a:p>
+                      <a:pPr algn="ctr">
+                        <a:defRPr sz="950">
+                          <a:solidFill>
+                            <a:srgbClr val="0F172A"/>
+                          </a:solidFill>
+                          <a:latin typeface="Segoe UI"/>
+                        </a:defRPr>
+                      </a:pPr>
+                      <a:r>
+                        <a:t>19</a:t>
+                      </a:r>
+                    </a:p>
+                  </a:txBody>
+                  <a:tcPr>
+                    <a:solidFill>
+                      <a:srgbClr val="FFFFFF"/>
+                    </a:solidFill>
+                  </a:tcPr>
+                </a:tc>
+                <a:tc>
+                  <a:txBody>
+                    <a:bodyPr/>
+                    <a:lstStyle/>
+                    <a:p>
+                      <a:pPr algn="ctr">
+                        <a:defRPr sz="950">
+                          <a:solidFill>
+                            <a:srgbClr val="0F172A"/>
+                          </a:solidFill>
+                          <a:latin typeface="Segoe UI"/>
+                        </a:defRPr>
+                      </a:pPr>
+                      <a:r>
+                        <a:t>17.39%</a:t>
+                      </a:r>
+                    </a:p>
+                  </a:txBody>
+                  <a:tcPr>
+                    <a:solidFill>
+                      <a:srgbClr val="FFFFFF"/>
+                    </a:solidFill>
+                  </a:tcPr>
+                </a:tc>
+                <a:tc>
+                  <a:txBody>
+                    <a:bodyPr/>
+                    <a:lstStyle/>
+                    <a:p>
+                      <a:pPr algn="ctr">
+                        <a:defRPr sz="950" b="1">
+                          <a:solidFill>
+                            <a:srgbClr val="F43F5E"/>
+                          </a:solidFill>
+                          <a:latin typeface="Segoe UI"/>
+                        </a:defRPr>
+                      </a:pPr>
+                      <a:r>
+                        <a:t>🔴 Critical</a:t>
+                      </a:r>
+                    </a:p>
+                  </a:txBody>
+                  <a:tcPr>
+                    <a:solidFill>
+                      <a:srgbClr val="FFFFFF"/>
+                    </a:solidFill>
+                  </a:tcPr>
+                </a:tc>
+                <a:tc>
+                  <a:txBody>
+                    <a:bodyPr/>
+                    <a:lstStyle/>
+                    <a:p>
+                      <a:pPr algn="ctr">
+                        <a:defRPr sz="950" b="1">
+                          <a:solidFill>
+                            <a:srgbClr val="F43F5E"/>
+                          </a:solidFill>
+                          <a:latin typeface="Segoe UI"/>
+                        </a:defRPr>
+                      </a:pPr>
+                      <a:r>
+                        <a:t>FAIL</a:t>
+                      </a:r>
+                    </a:p>
+                  </a:txBody>
+                  <a:tcPr>
+                    <a:solidFill>
+                      <a:srgbClr val="FFFFFF"/>
+                    </a:solidFill>
+                  </a:tcPr>
+                </a:tc>
+              </a:tr>
+              <a:tr h="440574">
+                <a:tc>
+                  <a:txBody>
+                    <a:bodyPr/>
+                    <a:lstStyle/>
+                    <a:p>
+                      <a:pPr algn="l">
+                        <a:defRPr sz="950">
+                          <a:solidFill>
+                            <a:srgbClr val="0F172A"/>
+                          </a:solidFill>
+                          <a:latin typeface="Segoe UI"/>
+                        </a:defRPr>
+                      </a:pPr>
+                      <a:r>
+                        <a:t>7</a:t>
+                      </a:r>
+                    </a:p>
+                  </a:txBody>
+                  <a:tcPr>
+                    <a:solidFill>
+                      <a:srgbClr val="F8FAFC"/>
+                    </a:solidFill>
+                  </a:tcPr>
+                </a:tc>
+                <a:tc>
+                  <a:txBody>
+                    <a:bodyPr/>
+                    <a:lstStyle/>
+                    <a:p>
+                      <a:pPr algn="l">
+                        <a:defRPr sz="950">
+                          <a:solidFill>
+                            <a:srgbClr val="0F172A"/>
+                          </a:solidFill>
+                          <a:latin typeface="Segoe UI"/>
+                        </a:defRPr>
+                      </a:pPr>
+                      <a:r>
+                        <a:t>Privileged User (Admin Rights)</a:t>
+                      </a:r>
+                    </a:p>
+                  </a:txBody>
+                  <a:tcPr>
+                    <a:solidFill>
+                      <a:srgbClr val="F8FAFC"/>
+                    </a:solidFill>
+                  </a:tcPr>
+                </a:tc>
+                <a:tc>
+                  <a:txBody>
+                    <a:bodyPr/>
+                    <a:lstStyle/>
+                    <a:p>
+                      <a:pPr algn="ctr">
+                        <a:defRPr sz="950">
+                          <a:solidFill>
+                            <a:srgbClr val="0F172A"/>
+                          </a:solidFill>
+                          <a:latin typeface="Segoe UI"/>
+                        </a:defRPr>
+                      </a:pPr>
+                      <a:r>
+                        <a:t>711</a:t>
+                      </a:r>
+                    </a:p>
+                  </a:txBody>
+                  <a:tcPr>
+                    <a:solidFill>
+                      <a:srgbClr val="F8FAFC"/>
+                    </a:solidFill>
+                  </a:tcPr>
+                </a:tc>
+                <a:tc>
+                  <a:txBody>
+                    <a:bodyPr/>
+                    <a:lstStyle/>
+                    <a:p>
+                      <a:pPr algn="ctr">
+                        <a:defRPr sz="950">
+                          <a:solidFill>
+                            <a:srgbClr val="0F172A"/>
+                          </a:solidFill>
+                          <a:latin typeface="Segoe UI"/>
+                        </a:defRPr>
+                      </a:pPr>
+                      <a:r>
+                        <a:t>189</a:t>
+                      </a:r>
+                    </a:p>
+                  </a:txBody>
+                  <a:tcPr>
+                    <a:solidFill>
+                      <a:srgbClr val="F8FAFC"/>
+                    </a:solidFill>
+                  </a:tcPr>
+                </a:tc>
+                <a:tc>
+                  <a:txBody>
+                    <a:bodyPr/>
+                    <a:lstStyle/>
+                    <a:p>
+                      <a:pPr algn="ctr">
+                        <a:defRPr sz="950">
+                          <a:solidFill>
+                            <a:srgbClr val="0F172A"/>
+                          </a:solidFill>
+                          <a:latin typeface="Segoe UI"/>
+                        </a:defRPr>
+                      </a:pPr>
+                      <a:r>
+                        <a:t>522</a:t>
+                      </a:r>
+                    </a:p>
+                  </a:txBody>
+                  <a:tcPr>
+                    <a:solidFill>
+                      <a:srgbClr val="F8FAFC"/>
+                    </a:solidFill>
+                  </a:tcPr>
+                </a:tc>
+                <a:tc>
+                  <a:txBody>
+                    <a:bodyPr/>
+                    <a:lstStyle/>
+                    <a:p>
+                      <a:pPr algn="ctr">
+                        <a:defRPr sz="950">
+                          <a:solidFill>
+                            <a:srgbClr val="0F172A"/>
+                          </a:solidFill>
+                          <a:latin typeface="Segoe UI"/>
+                        </a:defRPr>
+                      </a:pPr>
+                      <a:r>
+                        <a:t>26.58%</a:t>
+                      </a:r>
+                    </a:p>
+                  </a:txBody>
+                  <a:tcPr>
+                    <a:solidFill>
+                      <a:srgbClr val="F8FAFC"/>
+                    </a:solidFill>
+                  </a:tcPr>
+                </a:tc>
+                <a:tc>
+                  <a:txBody>
+                    <a:bodyPr/>
+                    <a:lstStyle/>
+                    <a:p>
+                      <a:pPr algn="ctr">
+                        <a:defRPr sz="950" b="1">
+                          <a:solidFill>
+                            <a:srgbClr val="F43F5E"/>
+                          </a:solidFill>
+                          <a:latin typeface="Segoe UI"/>
+                        </a:defRPr>
+                      </a:pPr>
+                      <a:r>
+                        <a:t>🔴 Critical</a:t>
+                      </a:r>
+                    </a:p>
+                  </a:txBody>
+                  <a:tcPr>
+                    <a:solidFill>
+                      <a:srgbClr val="F8FAFC"/>
+                    </a:solidFill>
+                  </a:tcPr>
+                </a:tc>
+                <a:tc>
+                  <a:txBody>
+                    <a:bodyPr/>
+                    <a:lstStyle/>
+                    <a:p>
+                      <a:pPr algn="ctr">
+                        <a:defRPr sz="950" b="1">
+                          <a:solidFill>
+                            <a:srgbClr val="F43F5E"/>
+                          </a:solidFill>
+                          <a:latin typeface="Segoe UI"/>
+                        </a:defRPr>
+                      </a:pPr>
+                      <a:r>
+                        <a:t>FAIL</a:t>
+                      </a:r>
+                    </a:p>
+                  </a:txBody>
+                  <a:tcPr>
+                    <a:solidFill>
+                      <a:srgbClr val="F8FAFC"/>
+                    </a:solidFill>
+                  </a:tcPr>
+                </a:tc>
+              </a:tr>
+              <a:tr h="440574">
+                <a:tc>
+                  <a:txBody>
+                    <a:bodyPr/>
+                    <a:lstStyle/>
+                    <a:p>
+                      <a:pPr algn="l">
+                        <a:defRPr sz="950">
+                          <a:solidFill>
+                            <a:srgbClr val="0F172A"/>
+                          </a:solidFill>
+                          <a:latin typeface="Segoe UI"/>
+                        </a:defRPr>
+                      </a:pPr>
+                      <a:r>
+                        <a:t>8</a:t>
+                      </a:r>
+                    </a:p>
+                  </a:txBody>
+                  <a:tcPr>
+                    <a:solidFill>
+                      <a:srgbClr val="FFFFFF"/>
+                    </a:solidFill>
+                  </a:tcPr>
+                </a:tc>
+                <a:tc>
+                  <a:txBody>
+                    <a:bodyPr/>
+                    <a:lstStyle/>
+                    <a:p>
+                      <a:pPr algn="l">
+                        <a:defRPr sz="950">
+                          <a:solidFill>
+                            <a:srgbClr val="0F172A"/>
+                          </a:solidFill>
+                          <a:latin typeface="Segoe UI"/>
+                        </a:defRPr>
+                      </a:pPr>
+                      <a:r>
+                        <a:t>Document Request evidence</a:t>
+                      </a:r>
+                    </a:p>
+                  </a:txBody>
+                  <a:tcPr>
+                    <a:solidFill>
+                      <a:srgbClr val="FFFFFF"/>
+                    </a:solidFill>
+                  </a:tcPr>
+                </a:tc>
+                <a:tc>
+                  <a:txBody>
+                    <a:bodyPr/>
+                    <a:lstStyle/>
+                    <a:p>
+                      <a:pPr algn="ctr">
+                        <a:defRPr sz="950">
+                          <a:solidFill>
+                            <a:srgbClr val="0F172A"/>
+                          </a:solidFill>
+                          <a:latin typeface="Segoe UI"/>
+                        </a:defRPr>
+                      </a:pPr>
+                      <a:r>
+                        <a:t>15</a:t>
+                      </a:r>
+                    </a:p>
+                  </a:txBody>
+                  <a:tcPr>
+                    <a:solidFill>
+                      <a:srgbClr val="FFFFFF"/>
+                    </a:solidFill>
+                  </a:tcPr>
+                </a:tc>
+                <a:tc>
+                  <a:txBody>
+                    <a:bodyPr/>
+                    <a:lstStyle/>
+                    <a:p>
+                      <a:pPr algn="ctr">
+                        <a:defRPr sz="950">
+                          <a:solidFill>
+                            <a:srgbClr val="0F172A"/>
+                          </a:solidFill>
+                          <a:latin typeface="Segoe UI"/>
+                        </a:defRPr>
+                      </a:pPr>
+                      <a:r>
+                        <a:t>9</a:t>
+                      </a:r>
+                    </a:p>
+                  </a:txBody>
+                  <a:tcPr>
+                    <a:solidFill>
+                      <a:srgbClr val="FFFFFF"/>
+                    </a:solidFill>
+                  </a:tcPr>
+                </a:tc>
+                <a:tc>
+                  <a:txBody>
+                    <a:bodyPr/>
+                    <a:lstStyle/>
+                    <a:p>
+                      <a:pPr algn="ctr">
+                        <a:defRPr sz="950">
+                          <a:solidFill>
+                            <a:srgbClr val="0F172A"/>
+                          </a:solidFill>
+                          <a:latin typeface="Segoe UI"/>
+                        </a:defRPr>
+                      </a:pPr>
+                      <a:r>
+                        <a:t>6</a:t>
+                      </a:r>
+                    </a:p>
+                  </a:txBody>
+                  <a:tcPr>
+                    <a:solidFill>
+                      <a:srgbClr val="FFFFFF"/>
+                    </a:solidFill>
+                  </a:tcPr>
+                </a:tc>
+                <a:tc>
+                  <a:txBody>
+                    <a:bodyPr/>
+                    <a:lstStyle/>
+                    <a:p>
+                      <a:pPr algn="ctr">
+                        <a:defRPr sz="950">
+                          <a:solidFill>
+                            <a:srgbClr val="0F172A"/>
+                          </a:solidFill>
+                          <a:latin typeface="Segoe UI"/>
+                        </a:defRPr>
+                      </a:pPr>
+                      <a:r>
+                        <a:t>60.00%</a:t>
+                      </a:r>
+                    </a:p>
+                  </a:txBody>
+                  <a:tcPr>
+                    <a:solidFill>
+                      <a:srgbClr val="FFFFFF"/>
+                    </a:solidFill>
+                  </a:tcPr>
+                </a:tc>
+                <a:tc>
+                  <a:txBody>
+                    <a:bodyPr/>
+                    <a:lstStyle/>
+                    <a:p>
+                      <a:pPr algn="ctr">
+                        <a:defRPr sz="950" b="1">
+                          <a:solidFill>
+                            <a:srgbClr val="F59E0B"/>
+                          </a:solidFill>
+                          <a:latin typeface="Segoe UI"/>
+                        </a:defRPr>
+                      </a:pPr>
+                      <a:r>
+                        <a:t>🟡 Warning</a:t>
+                      </a:r>
+                    </a:p>
+                  </a:txBody>
+                  <a:tcPr>
+                    <a:solidFill>
+                      <a:srgbClr val="FFFFFF"/>
+                    </a:solidFill>
+                  </a:tcPr>
+                </a:tc>
+                <a:tc>
+                  <a:txBody>
+                    <a:bodyPr/>
+                    <a:lstStyle/>
+                    <a:p>
+                      <a:pPr algn="ctr">
+                        <a:defRPr sz="950" b="1">
+                          <a:solidFill>
+                            <a:srgbClr val="F43F5E"/>
+                          </a:solidFill>
+                          <a:latin typeface="Segoe UI"/>
+                        </a:defRPr>
+                      </a:pPr>
+                      <a:r>
+                        <a:t>FAIL</a:t>
+                      </a:r>
+                    </a:p>
+                  </a:txBody>
+                  <a:tcPr>
+                    <a:solidFill>
+                      <a:srgbClr val="FFFFFF"/>
+                    </a:solidFill>
+                  </a:tcPr>
+                </a:tc>
+              </a:tr>
+              <a:tr h="440580">
                 <a:tc>
                   <a:txBody>
                     <a:bodyPr/>
@@ -5396,19 +7204,43 @@
                       <a:pPr algn="l">
                         <a:defRPr sz="950" b="1">
                           <a:solidFill>
-                            <a:srgbClr val="FFFFFF"/>
-                          </a:solidFill>
-                          <a:latin typeface="Segoe UI"/>
-                        </a:defRPr>
-                      </a:pPr>
-                      <a:r>
-                        <a:t>ชื่อหัวข้อการตรวจสอบ (Topic Description)</a:t>
-                      </a:r>
-                    </a:p>
-                  </a:txBody>
-                  <a:tcPr anchor="ctr">
-                    <a:solidFill>
-                      <a:srgbClr val="0F172A"/>
+                            <a:srgbClr val="0F172A"/>
+                          </a:solidFill>
+                          <a:latin typeface="Segoe UI"/>
+                        </a:defRPr>
+                      </a:pPr>
+                      <a:r>
+                        <a:t>รวม</a:t>
+                      </a:r>
+                    </a:p>
+                  </a:txBody>
+                  <a:tcPr>
+                    <a:solidFill>
+                      <a:srgbClr val="F1F5F9"/>
+                    </a:solidFill>
+                  </a:tcPr>
+                </a:tc>
+                <a:tc>
+                  <a:txBody>
+                    <a:bodyPr/>
+                    <a:lstStyle/>
+                    <a:p>
+                      <a:pPr algn="l">
+                        <a:defRPr sz="950" b="1">
+                          <a:solidFill>
+                            <a:srgbClr val="0F172A"/>
+                          </a:solidFill>
+                          <a:latin typeface="Segoe UI"/>
+                        </a:defRPr>
+                      </a:pPr>
+                      <a:r>
+                        <a:t>Grand Total Baseline Performance</a:t>
+                      </a:r>
+                    </a:p>
+                  </a:txBody>
+                  <a:tcPr>
+                    <a:solidFill>
+                      <a:srgbClr val="F1F5F9"/>
                     </a:solidFill>
                   </a:tcPr>
                 </a:tc>
@@ -5420,19 +7252,19 @@
                       <a:pPr algn="ctr">
                         <a:defRPr sz="950" b="1">
                           <a:solidFill>
-                            <a:srgbClr val="FFFFFF"/>
-                          </a:solidFill>
-                          <a:latin typeface="Segoe UI"/>
-                        </a:defRPr>
-                      </a:pPr>
-                      <a:r>
-                        <a:t>เป้าหมาย (Total)</a:t>
-                      </a:r>
-                    </a:p>
-                  </a:txBody>
-                  <a:tcPr anchor="ctr">
-                    <a:solidFill>
-                      <a:srgbClr val="0F172A"/>
+                            <a:srgbClr val="0F172A"/>
+                          </a:solidFill>
+                          <a:latin typeface="Segoe UI"/>
+                        </a:defRPr>
+                      </a:pPr>
+                      <a:r>
+                        <a:t>5,092</a:t>
+                      </a:r>
+                    </a:p>
+                  </a:txBody>
+                  <a:tcPr>
+                    <a:solidFill>
+                      <a:srgbClr val="F1F5F9"/>
                     </a:solidFill>
                   </a:tcPr>
                 </a:tc>
@@ -5444,19 +7276,19 @@
                       <a:pPr algn="ctr">
                         <a:defRPr sz="950" b="1">
                           <a:solidFill>
-                            <a:srgbClr val="FFFFFF"/>
-                          </a:solidFill>
-                          <a:latin typeface="Segoe UI"/>
-                        </a:defRPr>
-                      </a:pPr>
-                      <a:r>
-                        <a:t>ผ่านแล้ว (Passed)</a:t>
-                      </a:r>
-                    </a:p>
-                  </a:txBody>
-                  <a:tcPr anchor="ctr">
-                    <a:solidFill>
-                      <a:srgbClr val="0F172A"/>
+                            <a:srgbClr val="0F172A"/>
+                          </a:solidFill>
+                          <a:latin typeface="Segoe UI"/>
+                        </a:defRPr>
+                      </a:pPr>
+                      <a:r>
+                        <a:t>361</a:t>
+                      </a:r>
+                    </a:p>
+                  </a:txBody>
+                  <a:tcPr>
+                    <a:solidFill>
+                      <a:srgbClr val="F1F5F9"/>
                     </a:solidFill>
                   </a:tcPr>
                 </a:tc>
@@ -5468,19 +7300,19 @@
                       <a:pPr algn="ctr">
                         <a:defRPr sz="950" b="1">
                           <a:solidFill>
-                            <a:srgbClr val="FFFFFF"/>
-                          </a:solidFill>
-                          <a:latin typeface="Segoe UI"/>
-                        </a:defRPr>
-                      </a:pPr>
-                      <a:r>
-                        <a:t>คงเหลือ (Pending)</a:t>
-                      </a:r>
-                    </a:p>
-                  </a:txBody>
-                  <a:tcPr anchor="ctr">
-                    <a:solidFill>
-                      <a:srgbClr val="0F172A"/>
+                            <a:srgbClr val="0F172A"/>
+                          </a:solidFill>
+                          <a:latin typeface="Segoe UI"/>
+                        </a:defRPr>
+                      </a:pPr>
+                      <a:r>
+                        <a:t>4,731</a:t>
+                      </a:r>
+                    </a:p>
+                  </a:txBody>
+                  <a:tcPr>
+                    <a:solidFill>
+                      <a:srgbClr val="F1F5F9"/>
                     </a:solidFill>
                   </a:tcPr>
                 </a:tc>
@@ -5492,19 +7324,19 @@
                       <a:pPr algn="ctr">
                         <a:defRPr sz="950" b="1">
                           <a:solidFill>
-                            <a:srgbClr val="FFFFFF"/>
-                          </a:solidFill>
-                          <a:latin typeface="Segoe UI"/>
-                        </a:defRPr>
-                      </a:pPr>
-                      <a:r>
-                        <a:t>ความสำเร็จ (%)</a:t>
-                      </a:r>
-                    </a:p>
-                  </a:txBody>
-                  <a:tcPr anchor="ctr">
-                    <a:solidFill>
-                      <a:srgbClr val="0F172A"/>
+                            <a:srgbClr val="0F172A"/>
+                          </a:solidFill>
+                          <a:latin typeface="Segoe UI"/>
+                        </a:defRPr>
+                      </a:pPr>
+                      <a:r>
+                        <a:t>7.09%</a:t>
+                      </a:r>
+                    </a:p>
+                  </a:txBody>
+                  <a:tcPr>
+                    <a:solidFill>
+                      <a:srgbClr val="F1F5F9"/>
                     </a:solidFill>
                   </a:tcPr>
                 </a:tc>
@@ -5516,19 +7348,19 @@
                       <a:pPr algn="ctr">
                         <a:defRPr sz="950" b="1">
                           <a:solidFill>
-                            <a:srgbClr val="FFFFFF"/>
-                          </a:solidFill>
-                          <a:latin typeface="Segoe UI"/>
-                        </a:defRPr>
-                      </a:pPr>
-                      <a:r>
-                        <a:t>เกณฑ์สี EIA</a:t>
-                      </a:r>
-                    </a:p>
-                  </a:txBody>
-                  <a:tcPr anchor="ctr">
-                    <a:solidFill>
-                      <a:srgbClr val="0F172A"/>
+                            <a:srgbClr val="F43F5E"/>
+                          </a:solidFill>
+                          <a:latin typeface="Segoe UI"/>
+                        </a:defRPr>
+                      </a:pPr>
+                      <a:r>
+                        <a:t>🔴 Critical</a:t>
+                      </a:r>
+                    </a:p>
+                  </a:txBody>
+                  <a:tcPr>
+                    <a:solidFill>
+                      <a:srgbClr val="F1F5F9"/>
                     </a:solidFill>
                   </a:tcPr>
                 </a:tc>
@@ -5540,201 +7372,7 @@
                       <a:pPr algn="ctr">
                         <a:defRPr sz="950" b="1">
                           <a:solidFill>
-                            <a:srgbClr val="FFFFFF"/>
-                          </a:solidFill>
-                          <a:latin typeface="Segoe UI"/>
-                        </a:defRPr>
-                      </a:pPr>
-                      <a:r>
-                        <a:t>สถานะ</a:t>
-                      </a:r>
-                    </a:p>
-                  </a:txBody>
-                  <a:tcPr anchor="ctr">
-                    <a:solidFill>
-                      <a:srgbClr val="0F172A"/>
-                    </a:solidFill>
-                  </a:tcPr>
-                </a:tc>
-              </a:tr>
-              <a:tr h="440574">
-                <a:tc>
-                  <a:txBody>
-                    <a:bodyPr/>
-                    <a:lstStyle/>
-                    <a:p>
-                      <a:pPr algn="l">
-                        <a:defRPr sz="900" b="0">
-                          <a:solidFill>
-                            <a:srgbClr val="0F172A"/>
-                          </a:solidFill>
-                          <a:latin typeface="Segoe UI"/>
-                        </a:defRPr>
-                      </a:pPr>
-                      <a:r>
-                        <a:t>1.1</a:t>
-                      </a:r>
-                    </a:p>
-                  </a:txBody>
-                  <a:tcPr anchor="ctr">
-                    <a:solidFill>
-                      <a:srgbClr val="FFFFFF"/>
-                    </a:solidFill>
-                  </a:tcPr>
-                </a:tc>
-                <a:tc>
-                  <a:txBody>
-                    <a:bodyPr/>
-                    <a:lstStyle/>
-                    <a:p>
-                      <a:pPr algn="l">
-                        <a:defRPr sz="900" b="0">
-                          <a:solidFill>
-                            <a:srgbClr val="0F172A"/>
-                          </a:solidFill>
-                          <a:latin typeface="Segoe UI"/>
-                        </a:defRPr>
-                      </a:pPr>
-                      <a:r>
-                        <a:t>Missing BU/Company/Location (IT Asset)</a:t>
-                      </a:r>
-                    </a:p>
-                  </a:txBody>
-                  <a:tcPr anchor="ctr">
-                    <a:solidFill>
-                      <a:srgbClr val="FFFFFF"/>
-                    </a:solidFill>
-                  </a:tcPr>
-                </a:tc>
-                <a:tc>
-                  <a:txBody>
-                    <a:bodyPr/>
-                    <a:lstStyle/>
-                    <a:p>
-                      <a:pPr algn="ctr">
-                        <a:defRPr sz="900" b="0">
-                          <a:solidFill>
-                            <a:srgbClr val="0F172A"/>
-                          </a:solidFill>
-                          <a:latin typeface="Segoe UI"/>
-                        </a:defRPr>
-                      </a:pPr>
-                      <a:r>
-                        <a:t>152</a:t>
-                      </a:r>
-                    </a:p>
-                  </a:txBody>
-                  <a:tcPr anchor="ctr">
-                    <a:solidFill>
-                      <a:srgbClr val="FFFFFF"/>
-                    </a:solidFill>
-                  </a:tcPr>
-                </a:tc>
-                <a:tc>
-                  <a:txBody>
-                    <a:bodyPr/>
-                    <a:lstStyle/>
-                    <a:p>
-                      <a:pPr algn="ctr">
-                        <a:defRPr sz="900" b="0">
-                          <a:solidFill>
-                            <a:srgbClr val="0F172A"/>
-                          </a:solidFill>
-                          <a:latin typeface="Segoe UI"/>
-                        </a:defRPr>
-                      </a:pPr>
-                      <a:r>
-                        <a:t>25</a:t>
-                      </a:r>
-                    </a:p>
-                  </a:txBody>
-                  <a:tcPr anchor="ctr">
-                    <a:solidFill>
-                      <a:srgbClr val="FFFFFF"/>
-                    </a:solidFill>
-                  </a:tcPr>
-                </a:tc>
-                <a:tc>
-                  <a:txBody>
-                    <a:bodyPr/>
-                    <a:lstStyle/>
-                    <a:p>
-                      <a:pPr algn="ctr">
-                        <a:defRPr sz="900" b="0">
-                          <a:solidFill>
-                            <a:srgbClr val="0F172A"/>
-                          </a:solidFill>
-                          <a:latin typeface="Segoe UI"/>
-                        </a:defRPr>
-                      </a:pPr>
-                      <a:r>
-                        <a:t>127</a:t>
-                      </a:r>
-                    </a:p>
-                  </a:txBody>
-                  <a:tcPr anchor="ctr">
-                    <a:solidFill>
-                      <a:srgbClr val="FFFFFF"/>
-                    </a:solidFill>
-                  </a:tcPr>
-                </a:tc>
-                <a:tc>
-                  <a:txBody>
-                    <a:bodyPr/>
-                    <a:lstStyle/>
-                    <a:p>
-                      <a:pPr algn="ctr">
-                        <a:defRPr sz="900" b="0">
-                          <a:solidFill>
-                            <a:srgbClr val="0F172A"/>
-                          </a:solidFill>
-                          <a:latin typeface="Segoe UI"/>
-                        </a:defRPr>
-                      </a:pPr>
-                      <a:r>
-                        <a:t>16.45%</a:t>
-                      </a:r>
-                    </a:p>
-                  </a:txBody>
-                  <a:tcPr anchor="ctr">
-                    <a:solidFill>
-                      <a:srgbClr val="FFFFFF"/>
-                    </a:solidFill>
-                  </a:tcPr>
-                </a:tc>
-                <a:tc>
-                  <a:txBody>
-                    <a:bodyPr/>
-                    <a:lstStyle/>
-                    <a:p>
-                      <a:pPr algn="ctr">
-                        <a:defRPr sz="900" b="1">
-                          <a:solidFill>
-                            <a:srgbClr val="E11D48"/>
-                          </a:solidFill>
-                          <a:latin typeface="Segoe UI"/>
-                        </a:defRPr>
-                      </a:pPr>
-                      <a:r>
-                        <a:t>🔴 Critical</a:t>
-                      </a:r>
-                    </a:p>
-                  </a:txBody>
-                  <a:tcPr anchor="ctr">
-                    <a:solidFill>
-                      <a:srgbClr val="FFFFFF"/>
-                    </a:solidFill>
-                  </a:tcPr>
-                </a:tc>
-                <a:tc>
-                  <a:txBody>
-                    <a:bodyPr/>
-                    <a:lstStyle/>
-                    <a:p>
-                      <a:pPr algn="ctr">
-                        <a:defRPr sz="900" b="1">
-                          <a:solidFill>
-                            <a:srgbClr val="E11D48"/>
+                            <a:srgbClr val="F43F5E"/>
                           </a:solidFill>
                           <a:latin typeface="Segoe UI"/>
                         </a:defRPr>
@@ -5744,1755 +7382,9 @@
                       </a:r>
                     </a:p>
                   </a:txBody>
-                  <a:tcPr anchor="ctr">
-                    <a:solidFill>
-                      <a:srgbClr val="FFFFFF"/>
-                    </a:solidFill>
-                  </a:tcPr>
-                </a:tc>
-              </a:tr>
-              <a:tr h="440574">
-                <a:tc>
-                  <a:txBody>
-                    <a:bodyPr/>
-                    <a:lstStyle/>
-                    <a:p>
-                      <a:pPr algn="l">
-                        <a:defRPr sz="900" b="0">
-                          <a:solidFill>
-                            <a:srgbClr val="0F172A"/>
-                          </a:solidFill>
-                          <a:latin typeface="Segoe UI"/>
-                        </a:defRPr>
-                      </a:pPr>
-                      <a:r>
-                        <a:t>1.2</a:t>
-                      </a:r>
-                    </a:p>
-                  </a:txBody>
-                  <a:tcPr anchor="ctr">
-                    <a:solidFill>
-                      <a:srgbClr val="F8FAFC"/>
-                    </a:solidFill>
-                  </a:tcPr>
-                </a:tc>
-                <a:tc>
-                  <a:txBody>
-                    <a:bodyPr/>
-                    <a:lstStyle/>
-                    <a:p>
-                      <a:pPr algn="l">
-                        <a:defRPr sz="900" b="0">
-                          <a:solidFill>
-                            <a:srgbClr val="0F172A"/>
-                          </a:solidFill>
-                          <a:latin typeface="Segoe UI"/>
-                        </a:defRPr>
-                      </a:pPr>
-                      <a:r>
-                        <a:t>Not installed GLPI Agent</a:t>
-                      </a:r>
-                    </a:p>
-                  </a:txBody>
-                  <a:tcPr anchor="ctr">
-                    <a:solidFill>
-                      <a:srgbClr val="F8FAFC"/>
-                    </a:solidFill>
-                  </a:tcPr>
-                </a:tc>
-                <a:tc>
-                  <a:txBody>
-                    <a:bodyPr/>
-                    <a:lstStyle/>
-                    <a:p>
-                      <a:pPr algn="ctr">
-                        <a:defRPr sz="900" b="0">
-                          <a:solidFill>
-                            <a:srgbClr val="0F172A"/>
-                          </a:solidFill>
-                          <a:latin typeface="Segoe UI"/>
-                        </a:defRPr>
-                      </a:pPr>
-                      <a:r>
-                        <a:t>50</a:t>
-                      </a:r>
-                    </a:p>
-                  </a:txBody>
-                  <a:tcPr anchor="ctr">
-                    <a:solidFill>
-                      <a:srgbClr val="F8FAFC"/>
-                    </a:solidFill>
-                  </a:tcPr>
-                </a:tc>
-                <a:tc>
-                  <a:txBody>
-                    <a:bodyPr/>
-                    <a:lstStyle/>
-                    <a:p>
-                      <a:pPr algn="ctr">
-                        <a:defRPr sz="900" b="0">
-                          <a:solidFill>
-                            <a:srgbClr val="0F172A"/>
-                          </a:solidFill>
-                          <a:latin typeface="Segoe UI"/>
-                        </a:defRPr>
-                      </a:pPr>
-                      <a:r>
-                        <a:t>11</a:t>
-                      </a:r>
-                    </a:p>
-                  </a:txBody>
-                  <a:tcPr anchor="ctr">
-                    <a:solidFill>
-                      <a:srgbClr val="F8FAFC"/>
-                    </a:solidFill>
-                  </a:tcPr>
-                </a:tc>
-                <a:tc>
-                  <a:txBody>
-                    <a:bodyPr/>
-                    <a:lstStyle/>
-                    <a:p>
-                      <a:pPr algn="ctr">
-                        <a:defRPr sz="900" b="0">
-                          <a:solidFill>
-                            <a:srgbClr val="0F172A"/>
-                          </a:solidFill>
-                          <a:latin typeface="Segoe UI"/>
-                        </a:defRPr>
-                      </a:pPr>
-                      <a:r>
-                        <a:t>39</a:t>
-                      </a:r>
-                    </a:p>
-                  </a:txBody>
-                  <a:tcPr anchor="ctr">
-                    <a:solidFill>
-                      <a:srgbClr val="F8FAFC"/>
-                    </a:solidFill>
-                  </a:tcPr>
-                </a:tc>
-                <a:tc>
-                  <a:txBody>
-                    <a:bodyPr/>
-                    <a:lstStyle/>
-                    <a:p>
-                      <a:pPr algn="ctr">
-                        <a:defRPr sz="900" b="0">
-                          <a:solidFill>
-                            <a:srgbClr val="0F172A"/>
-                          </a:solidFill>
-                          <a:latin typeface="Segoe UI"/>
-                        </a:defRPr>
-                      </a:pPr>
-                      <a:r>
-                        <a:t>22.00%</a:t>
-                      </a:r>
-                    </a:p>
-                  </a:txBody>
-                  <a:tcPr anchor="ctr">
-                    <a:solidFill>
-                      <a:srgbClr val="F8FAFC"/>
-                    </a:solidFill>
-                  </a:tcPr>
-                </a:tc>
-                <a:tc>
-                  <a:txBody>
-                    <a:bodyPr/>
-                    <a:lstStyle/>
-                    <a:p>
-                      <a:pPr algn="ctr">
-                        <a:defRPr sz="900" b="1">
-                          <a:solidFill>
-                            <a:srgbClr val="E11D48"/>
-                          </a:solidFill>
-                          <a:latin typeface="Segoe UI"/>
-                        </a:defRPr>
-                      </a:pPr>
-                      <a:r>
-                        <a:t>🔴 Critical</a:t>
-                      </a:r>
-                    </a:p>
-                  </a:txBody>
-                  <a:tcPr anchor="ctr">
-                    <a:solidFill>
-                      <a:srgbClr val="F8FAFC"/>
-                    </a:solidFill>
-                  </a:tcPr>
-                </a:tc>
-                <a:tc>
-                  <a:txBody>
-                    <a:bodyPr/>
-                    <a:lstStyle/>
-                    <a:p>
-                      <a:pPr algn="ctr">
-                        <a:defRPr sz="900" b="1">
-                          <a:solidFill>
-                            <a:srgbClr val="E11D48"/>
-                          </a:solidFill>
-                          <a:latin typeface="Segoe UI"/>
-                        </a:defRPr>
-                      </a:pPr>
-                      <a:r>
-                        <a:t>FAIL</a:t>
-                      </a:r>
-                    </a:p>
-                  </a:txBody>
-                  <a:tcPr anchor="ctr">
-                    <a:solidFill>
-                      <a:srgbClr val="F8FAFC"/>
-                    </a:solidFill>
-                  </a:tcPr>
-                </a:tc>
-              </a:tr>
-              <a:tr h="440574">
-                <a:tc>
-                  <a:txBody>
-                    <a:bodyPr/>
-                    <a:lstStyle/>
-                    <a:p>
-                      <a:pPr algn="l">
-                        <a:defRPr sz="900" b="0">
-                          <a:solidFill>
-                            <a:srgbClr val="0F172A"/>
-                          </a:solidFill>
-                          <a:latin typeface="Segoe UI"/>
-                        </a:defRPr>
-                      </a:pPr>
-                      <a:r>
-                        <a:t>2</a:t>
-                      </a:r>
-                    </a:p>
-                  </a:txBody>
-                  <a:tcPr anchor="ctr">
-                    <a:solidFill>
-                      <a:srgbClr val="FFFFFF"/>
-                    </a:solidFill>
-                  </a:tcPr>
-                </a:tc>
-                <a:tc>
-                  <a:txBody>
-                    <a:bodyPr/>
-                    <a:lstStyle/>
-                    <a:p>
-                      <a:pPr algn="l">
-                        <a:defRPr sz="900" b="0">
-                          <a:solidFill>
-                            <a:srgbClr val="0F172A"/>
-                          </a:solidFill>
-                          <a:latin typeface="Segoe UI"/>
-                        </a:defRPr>
-                      </a:pPr>
-                      <a:r>
-                        <a:t>W11 OS version not current (Update OS)</a:t>
-                      </a:r>
-                    </a:p>
-                  </a:txBody>
-                  <a:tcPr anchor="ctr">
-                    <a:solidFill>
-                      <a:srgbClr val="FFFFFF"/>
-                    </a:solidFill>
-                  </a:tcPr>
-                </a:tc>
-                <a:tc>
-                  <a:txBody>
-                    <a:bodyPr/>
-                    <a:lstStyle/>
-                    <a:p>
-                      <a:pPr algn="ctr">
-                        <a:defRPr sz="900" b="0">
-                          <a:solidFill>
-                            <a:srgbClr val="0F172A"/>
-                          </a:solidFill>
-                          <a:latin typeface="Segoe UI"/>
-                        </a:defRPr>
-                      </a:pPr>
-                      <a:r>
-                        <a:t>3,152</a:t>
-                      </a:r>
-                    </a:p>
-                  </a:txBody>
-                  <a:tcPr anchor="ctr">
-                    <a:solidFill>
-                      <a:srgbClr val="FFFFFF"/>
-                    </a:solidFill>
-                  </a:tcPr>
-                </a:tc>
-                <a:tc>
-                  <a:txBody>
-                    <a:bodyPr/>
-                    <a:lstStyle/>
-                    <a:p>
-                      <a:pPr algn="ctr">
-                        <a:defRPr sz="900" b="0">
-                          <a:solidFill>
-                            <a:srgbClr val="0F172A"/>
-                          </a:solidFill>
-                          <a:latin typeface="Segoe UI"/>
-                        </a:defRPr>
-                      </a:pPr>
-                      <a:r>
-                        <a:t>103</a:t>
-                      </a:r>
-                    </a:p>
-                  </a:txBody>
-                  <a:tcPr anchor="ctr">
-                    <a:solidFill>
-                      <a:srgbClr val="FFFFFF"/>
-                    </a:solidFill>
-                  </a:tcPr>
-                </a:tc>
-                <a:tc>
-                  <a:txBody>
-                    <a:bodyPr/>
-                    <a:lstStyle/>
-                    <a:p>
-                      <a:pPr algn="ctr">
-                        <a:defRPr sz="900" b="0">
-                          <a:solidFill>
-                            <a:srgbClr val="0F172A"/>
-                          </a:solidFill>
-                          <a:latin typeface="Segoe UI"/>
-                        </a:defRPr>
-                      </a:pPr>
-                      <a:r>
-                        <a:t>3,049</a:t>
-                      </a:r>
-                    </a:p>
-                  </a:txBody>
-                  <a:tcPr anchor="ctr">
-                    <a:solidFill>
-                      <a:srgbClr val="FFFFFF"/>
-                    </a:solidFill>
-                  </a:tcPr>
-                </a:tc>
-                <a:tc>
-                  <a:txBody>
-                    <a:bodyPr/>
-                    <a:lstStyle/>
-                    <a:p>
-                      <a:pPr algn="ctr">
-                        <a:defRPr sz="900" b="0">
-                          <a:solidFill>
-                            <a:srgbClr val="0F172A"/>
-                          </a:solidFill>
-                          <a:latin typeface="Segoe UI"/>
-                        </a:defRPr>
-                      </a:pPr>
-                      <a:r>
-                        <a:t>3.27%</a:t>
-                      </a:r>
-                    </a:p>
-                  </a:txBody>
-                  <a:tcPr anchor="ctr">
-                    <a:solidFill>
-                      <a:srgbClr val="FFFFFF"/>
-                    </a:solidFill>
-                  </a:tcPr>
-                </a:tc>
-                <a:tc>
-                  <a:txBody>
-                    <a:bodyPr/>
-                    <a:lstStyle/>
-                    <a:p>
-                      <a:pPr algn="ctr">
-                        <a:defRPr sz="900" b="1">
-                          <a:solidFill>
-                            <a:srgbClr val="E11D48"/>
-                          </a:solidFill>
-                          <a:latin typeface="Segoe UI"/>
-                        </a:defRPr>
-                      </a:pPr>
-                      <a:r>
-                        <a:t>🔴 Critical</a:t>
-                      </a:r>
-                    </a:p>
-                  </a:txBody>
-                  <a:tcPr anchor="ctr">
-                    <a:solidFill>
-                      <a:srgbClr val="FFFFFF"/>
-                    </a:solidFill>
-                  </a:tcPr>
-                </a:tc>
-                <a:tc>
-                  <a:txBody>
-                    <a:bodyPr/>
-                    <a:lstStyle/>
-                    <a:p>
-                      <a:pPr algn="ctr">
-                        <a:defRPr sz="900" b="1">
-                          <a:solidFill>
-                            <a:srgbClr val="E11D48"/>
-                          </a:solidFill>
-                          <a:latin typeface="Segoe UI"/>
-                        </a:defRPr>
-                      </a:pPr>
-                      <a:r>
-                        <a:t>FAIL</a:t>
-                      </a:r>
-                    </a:p>
-                  </a:txBody>
-                  <a:tcPr anchor="ctr">
-                    <a:solidFill>
-                      <a:srgbClr val="FFFFFF"/>
-                    </a:solidFill>
-                  </a:tcPr>
-                </a:tc>
-              </a:tr>
-              <a:tr h="440574">
-                <a:tc>
-                  <a:txBody>
-                    <a:bodyPr/>
-                    <a:lstStyle/>
-                    <a:p>
-                      <a:pPr algn="l">
-                        <a:defRPr sz="900" b="0">
-                          <a:solidFill>
-                            <a:srgbClr val="0F172A"/>
-                          </a:solidFill>
-                          <a:latin typeface="Segoe UI"/>
-                        </a:defRPr>
-                      </a:pPr>
-                      <a:r>
-                        <a:t>3</a:t>
-                      </a:r>
-                    </a:p>
-                  </a:txBody>
-                  <a:tcPr anchor="ctr">
-                    <a:solidFill>
-                      <a:srgbClr val="F8FAFC"/>
-                    </a:solidFill>
-                  </a:tcPr>
-                </a:tc>
-                <a:tc>
-                  <a:txBody>
-                    <a:bodyPr/>
-                    <a:lstStyle/>
-                    <a:p>
-                      <a:pPr algn="l">
-                        <a:defRPr sz="900" b="0">
-                          <a:solidFill>
-                            <a:srgbClr val="0F172A"/>
-                          </a:solidFill>
-                          <a:latin typeface="Segoe UI"/>
-                        </a:defRPr>
-                      </a:pPr>
-                      <a:r>
-                        <a:t>Require Restart (Pending Restart)</a:t>
-                      </a:r>
-                    </a:p>
-                  </a:txBody>
-                  <a:tcPr anchor="ctr">
-                    <a:solidFill>
-                      <a:srgbClr val="F8FAFC"/>
-                    </a:solidFill>
-                  </a:tcPr>
-                </a:tc>
-                <a:tc>
-                  <a:txBody>
-                    <a:bodyPr/>
-                    <a:lstStyle/>
-                    <a:p>
-                      <a:pPr algn="ctr">
-                        <a:defRPr sz="900" b="0">
-                          <a:solidFill>
-                            <a:srgbClr val="0F172A"/>
-                          </a:solidFill>
-                          <a:latin typeface="Segoe UI"/>
-                        </a:defRPr>
-                      </a:pPr>
-                      <a:r>
-                        <a:t>232</a:t>
-                      </a:r>
-                    </a:p>
-                  </a:txBody>
-                  <a:tcPr anchor="ctr">
-                    <a:solidFill>
-                      <a:srgbClr val="F8FAFC"/>
-                    </a:solidFill>
-                  </a:tcPr>
-                </a:tc>
-                <a:tc>
-                  <a:txBody>
-                    <a:bodyPr/>
-                    <a:lstStyle/>
-                    <a:p>
-                      <a:pPr algn="ctr">
-                        <a:defRPr sz="900" b="0">
-                          <a:solidFill>
-                            <a:srgbClr val="0F172A"/>
-                          </a:solidFill>
-                          <a:latin typeface="Segoe UI"/>
-                        </a:defRPr>
-                      </a:pPr>
-                      <a:r>
-                        <a:t>7</a:t>
-                      </a:r>
-                    </a:p>
-                  </a:txBody>
-                  <a:tcPr anchor="ctr">
-                    <a:solidFill>
-                      <a:srgbClr val="F8FAFC"/>
-                    </a:solidFill>
-                  </a:tcPr>
-                </a:tc>
-                <a:tc>
-                  <a:txBody>
-                    <a:bodyPr/>
-                    <a:lstStyle/>
-                    <a:p>
-                      <a:pPr algn="ctr">
-                        <a:defRPr sz="900" b="0">
-                          <a:solidFill>
-                            <a:srgbClr val="0F172A"/>
-                          </a:solidFill>
-                          <a:latin typeface="Segoe UI"/>
-                        </a:defRPr>
-                      </a:pPr>
-                      <a:r>
-                        <a:t>225</a:t>
-                      </a:r>
-                    </a:p>
-                  </a:txBody>
-                  <a:tcPr anchor="ctr">
-                    <a:solidFill>
-                      <a:srgbClr val="F8FAFC"/>
-                    </a:solidFill>
-                  </a:tcPr>
-                </a:tc>
-                <a:tc>
-                  <a:txBody>
-                    <a:bodyPr/>
-                    <a:lstStyle/>
-                    <a:p>
-                      <a:pPr algn="ctr">
-                        <a:defRPr sz="900" b="0">
-                          <a:solidFill>
-                            <a:srgbClr val="0F172A"/>
-                          </a:solidFill>
-                          <a:latin typeface="Segoe UI"/>
-                        </a:defRPr>
-                      </a:pPr>
-                      <a:r>
-                        <a:t>3.02%</a:t>
-                      </a:r>
-                    </a:p>
-                  </a:txBody>
-                  <a:tcPr anchor="ctr">
-                    <a:solidFill>
-                      <a:srgbClr val="F8FAFC"/>
-                    </a:solidFill>
-                  </a:tcPr>
-                </a:tc>
-                <a:tc>
-                  <a:txBody>
-                    <a:bodyPr/>
-                    <a:lstStyle/>
-                    <a:p>
-                      <a:pPr algn="ctr">
-                        <a:defRPr sz="900" b="1">
-                          <a:solidFill>
-                            <a:srgbClr val="E11D48"/>
-                          </a:solidFill>
-                          <a:latin typeface="Segoe UI"/>
-                        </a:defRPr>
-                      </a:pPr>
-                      <a:r>
-                        <a:t>🔴 Critical</a:t>
-                      </a:r>
-                    </a:p>
-                  </a:txBody>
-                  <a:tcPr anchor="ctr">
-                    <a:solidFill>
-                      <a:srgbClr val="F8FAFC"/>
-                    </a:solidFill>
-                  </a:tcPr>
-                </a:tc>
-                <a:tc>
-                  <a:txBody>
-                    <a:bodyPr/>
-                    <a:lstStyle/>
-                    <a:p>
-                      <a:pPr algn="ctr">
-                        <a:defRPr sz="900" b="1">
-                          <a:solidFill>
-                            <a:srgbClr val="E11D48"/>
-                          </a:solidFill>
-                          <a:latin typeface="Segoe UI"/>
-                        </a:defRPr>
-                      </a:pPr>
-                      <a:r>
-                        <a:t>FAIL</a:t>
-                      </a:r>
-                    </a:p>
-                  </a:txBody>
-                  <a:tcPr anchor="ctr">
-                    <a:solidFill>
-                      <a:srgbClr val="F8FAFC"/>
-                    </a:solidFill>
-                  </a:tcPr>
-                </a:tc>
-              </a:tr>
-              <a:tr h="440574">
-                <a:tc>
-                  <a:txBody>
-                    <a:bodyPr/>
-                    <a:lstStyle/>
-                    <a:p>
-                      <a:pPr algn="l">
-                        <a:defRPr sz="900" b="0">
-                          <a:solidFill>
-                            <a:srgbClr val="0F172A"/>
-                          </a:solidFill>
-                          <a:latin typeface="Segoe UI"/>
-                        </a:defRPr>
-                      </a:pPr>
-                      <a:r>
-                        <a:t>4</a:t>
-                      </a:r>
-                    </a:p>
-                  </a:txBody>
-                  <a:tcPr anchor="ctr">
-                    <a:solidFill>
-                      <a:srgbClr val="FFFFFF"/>
-                    </a:solidFill>
-                  </a:tcPr>
-                </a:tc>
-                <a:tc>
-                  <a:txBody>
-                    <a:bodyPr/>
-                    <a:lstStyle/>
-                    <a:p>
-                      <a:pPr algn="l">
-                        <a:defRPr sz="900" b="0">
-                          <a:solidFill>
-                            <a:srgbClr val="0F172A"/>
-                          </a:solidFill>
-                          <a:latin typeface="Segoe UI"/>
-                        </a:defRPr>
-                      </a:pPr>
-                      <a:r>
-                        <a:t>Antivirus software not installed</a:t>
-                      </a:r>
-                    </a:p>
-                  </a:txBody>
-                  <a:tcPr anchor="ctr">
-                    <a:solidFill>
-                      <a:srgbClr val="FFFFFF"/>
-                    </a:solidFill>
-                  </a:tcPr>
-                </a:tc>
-                <a:tc>
-                  <a:txBody>
-                    <a:bodyPr/>
-                    <a:lstStyle/>
-                    <a:p>
-                      <a:pPr algn="ctr">
-                        <a:defRPr sz="900" b="0">
-                          <a:solidFill>
-                            <a:srgbClr val="0F172A"/>
-                          </a:solidFill>
-                          <a:latin typeface="Segoe UI"/>
-                        </a:defRPr>
-                      </a:pPr>
-                      <a:r>
-                        <a:t>95</a:t>
-                      </a:r>
-                    </a:p>
-                  </a:txBody>
-                  <a:tcPr anchor="ctr">
-                    <a:solidFill>
-                      <a:srgbClr val="FFFFFF"/>
-                    </a:solidFill>
-                  </a:tcPr>
-                </a:tc>
-                <a:tc>
-                  <a:txBody>
-                    <a:bodyPr/>
-                    <a:lstStyle/>
-                    <a:p>
-                      <a:pPr algn="ctr">
-                        <a:defRPr sz="900" b="0">
-                          <a:solidFill>
-                            <a:srgbClr val="0F172A"/>
-                          </a:solidFill>
-                          <a:latin typeface="Segoe UI"/>
-                        </a:defRPr>
-                      </a:pPr>
-                      <a:r>
-                        <a:t>3</a:t>
-                      </a:r>
-                    </a:p>
-                  </a:txBody>
-                  <a:tcPr anchor="ctr">
-                    <a:solidFill>
-                      <a:srgbClr val="FFFFFF"/>
-                    </a:solidFill>
-                  </a:tcPr>
-                </a:tc>
-                <a:tc>
-                  <a:txBody>
-                    <a:bodyPr/>
-                    <a:lstStyle/>
-                    <a:p>
-                      <a:pPr algn="ctr">
-                        <a:defRPr sz="900" b="0">
-                          <a:solidFill>
-                            <a:srgbClr val="0F172A"/>
-                          </a:solidFill>
-                          <a:latin typeface="Segoe UI"/>
-                        </a:defRPr>
-                      </a:pPr>
-                      <a:r>
-                        <a:t>92</a:t>
-                      </a:r>
-                    </a:p>
-                  </a:txBody>
-                  <a:tcPr anchor="ctr">
-                    <a:solidFill>
-                      <a:srgbClr val="FFFFFF"/>
-                    </a:solidFill>
-                  </a:tcPr>
-                </a:tc>
-                <a:tc>
-                  <a:txBody>
-                    <a:bodyPr/>
-                    <a:lstStyle/>
-                    <a:p>
-                      <a:pPr algn="ctr">
-                        <a:defRPr sz="900" b="0">
-                          <a:solidFill>
-                            <a:srgbClr val="0F172A"/>
-                          </a:solidFill>
-                          <a:latin typeface="Segoe UI"/>
-                        </a:defRPr>
-                      </a:pPr>
-                      <a:r>
-                        <a:t>3.16%</a:t>
-                      </a:r>
-                    </a:p>
-                  </a:txBody>
-                  <a:tcPr anchor="ctr">
-                    <a:solidFill>
-                      <a:srgbClr val="FFFFFF"/>
-                    </a:solidFill>
-                  </a:tcPr>
-                </a:tc>
-                <a:tc>
-                  <a:txBody>
-                    <a:bodyPr/>
-                    <a:lstStyle/>
-                    <a:p>
-                      <a:pPr algn="ctr">
-                        <a:defRPr sz="900" b="1">
-                          <a:solidFill>
-                            <a:srgbClr val="E11D48"/>
-                          </a:solidFill>
-                          <a:latin typeface="Segoe UI"/>
-                        </a:defRPr>
-                      </a:pPr>
-                      <a:r>
-                        <a:t>🔴 Critical</a:t>
-                      </a:r>
-                    </a:p>
-                  </a:txBody>
-                  <a:tcPr anchor="ctr">
-                    <a:solidFill>
-                      <a:srgbClr val="FFFFFF"/>
-                    </a:solidFill>
-                  </a:tcPr>
-                </a:tc>
-                <a:tc>
-                  <a:txBody>
-                    <a:bodyPr/>
-                    <a:lstStyle/>
-                    <a:p>
-                      <a:pPr algn="ctr">
-                        <a:defRPr sz="900" b="1">
-                          <a:solidFill>
-                            <a:srgbClr val="E11D48"/>
-                          </a:solidFill>
-                          <a:latin typeface="Segoe UI"/>
-                        </a:defRPr>
-                      </a:pPr>
-                      <a:r>
-                        <a:t>FAIL</a:t>
-                      </a:r>
-                    </a:p>
-                  </a:txBody>
-                  <a:tcPr anchor="ctr">
-                    <a:solidFill>
-                      <a:srgbClr val="FFFFFF"/>
-                    </a:solidFill>
-                  </a:tcPr>
-                </a:tc>
-              </a:tr>
-              <a:tr h="440574">
-                <a:tc>
-                  <a:txBody>
-                    <a:bodyPr/>
-                    <a:lstStyle/>
-                    <a:p>
-                      <a:pPr algn="l">
-                        <a:defRPr sz="900" b="0">
-                          <a:solidFill>
-                            <a:srgbClr val="0F172A"/>
-                          </a:solidFill>
-                          <a:latin typeface="Segoe UI"/>
-                        </a:defRPr>
-                      </a:pPr>
-                      <a:r>
-                        <a:t>5</a:t>
-                      </a:r>
-                    </a:p>
-                  </a:txBody>
-                  <a:tcPr anchor="ctr">
-                    <a:solidFill>
-                      <a:srgbClr val="F8FAFC"/>
-                    </a:solidFill>
-                  </a:tcPr>
-                </a:tc>
-                <a:tc>
-                  <a:txBody>
-                    <a:bodyPr/>
-                    <a:lstStyle/>
-                    <a:p>
-                      <a:pPr algn="l">
-                        <a:defRPr sz="900" b="0">
-                          <a:solidFill>
-                            <a:srgbClr val="0F172A"/>
-                          </a:solidFill>
-                          <a:latin typeface="Segoe UI"/>
-                        </a:defRPr>
-                      </a:pPr>
-                      <a:r>
-                        <a:t>Built-in firewall not enabled</a:t>
-                      </a:r>
-                    </a:p>
-                  </a:txBody>
-                  <a:tcPr anchor="ctr">
-                    <a:solidFill>
-                      <a:srgbClr val="F8FAFC"/>
-                    </a:solidFill>
-                  </a:tcPr>
-                </a:tc>
-                <a:tc>
-                  <a:txBody>
-                    <a:bodyPr/>
-                    <a:lstStyle/>
-                    <a:p>
-                      <a:pPr algn="ctr">
-                        <a:defRPr sz="900" b="0">
-                          <a:solidFill>
-                            <a:srgbClr val="0F172A"/>
-                          </a:solidFill>
-                          <a:latin typeface="Segoe UI"/>
-                        </a:defRPr>
-                      </a:pPr>
-                      <a:r>
-                        <a:t>567</a:t>
-                      </a:r>
-                    </a:p>
-                  </a:txBody>
-                  <a:tcPr anchor="ctr">
-                    <a:solidFill>
-                      <a:srgbClr val="F8FAFC"/>
-                    </a:solidFill>
-                  </a:tcPr>
-                </a:tc>
-                <a:tc>
-                  <a:txBody>
-                    <a:bodyPr/>
-                    <a:lstStyle/>
-                    <a:p>
-                      <a:pPr algn="ctr">
-                        <a:defRPr sz="900" b="0">
-                          <a:solidFill>
-                            <a:srgbClr val="0F172A"/>
-                          </a:solidFill>
-                          <a:latin typeface="Segoe UI"/>
-                        </a:defRPr>
-                      </a:pPr>
-                      <a:r>
-                        <a:t>10</a:t>
-                      </a:r>
-                    </a:p>
-                  </a:txBody>
-                  <a:tcPr anchor="ctr">
-                    <a:solidFill>
-                      <a:srgbClr val="F8FAFC"/>
-                    </a:solidFill>
-                  </a:tcPr>
-                </a:tc>
-                <a:tc>
-                  <a:txBody>
-                    <a:bodyPr/>
-                    <a:lstStyle/>
-                    <a:p>
-                      <a:pPr algn="ctr">
-                        <a:defRPr sz="900" b="0">
-                          <a:solidFill>
-                            <a:srgbClr val="0F172A"/>
-                          </a:solidFill>
-                          <a:latin typeface="Segoe UI"/>
-                        </a:defRPr>
-                      </a:pPr>
-                      <a:r>
-                        <a:t>557</a:t>
-                      </a:r>
-                    </a:p>
-                  </a:txBody>
-                  <a:tcPr anchor="ctr">
-                    <a:solidFill>
-                      <a:srgbClr val="F8FAFC"/>
-                    </a:solidFill>
-                  </a:tcPr>
-                </a:tc>
-                <a:tc>
-                  <a:txBody>
-                    <a:bodyPr/>
-                    <a:lstStyle/>
-                    <a:p>
-                      <a:pPr algn="ctr">
-                        <a:defRPr sz="900" b="0">
-                          <a:solidFill>
-                            <a:srgbClr val="0F172A"/>
-                          </a:solidFill>
-                          <a:latin typeface="Segoe UI"/>
-                        </a:defRPr>
-                      </a:pPr>
-                      <a:r>
-                        <a:t>1.76%</a:t>
-                      </a:r>
-                    </a:p>
-                  </a:txBody>
-                  <a:tcPr anchor="ctr">
-                    <a:solidFill>
-                      <a:srgbClr val="F8FAFC"/>
-                    </a:solidFill>
-                  </a:tcPr>
-                </a:tc>
-                <a:tc>
-                  <a:txBody>
-                    <a:bodyPr/>
-                    <a:lstStyle/>
-                    <a:p>
-                      <a:pPr algn="ctr">
-                        <a:defRPr sz="900" b="1">
-                          <a:solidFill>
-                            <a:srgbClr val="E11D48"/>
-                          </a:solidFill>
-                          <a:latin typeface="Segoe UI"/>
-                        </a:defRPr>
-                      </a:pPr>
-                      <a:r>
-                        <a:t>🔴 Critical</a:t>
-                      </a:r>
-                    </a:p>
-                  </a:txBody>
-                  <a:tcPr anchor="ctr">
-                    <a:solidFill>
-                      <a:srgbClr val="F8FAFC"/>
-                    </a:solidFill>
-                  </a:tcPr>
-                </a:tc>
-                <a:tc>
-                  <a:txBody>
-                    <a:bodyPr/>
-                    <a:lstStyle/>
-                    <a:p>
-                      <a:pPr algn="ctr">
-                        <a:defRPr sz="900" b="1">
-                          <a:solidFill>
-                            <a:srgbClr val="E11D48"/>
-                          </a:solidFill>
-                          <a:latin typeface="Segoe UI"/>
-                        </a:defRPr>
-                      </a:pPr>
-                      <a:r>
-                        <a:t>FAIL</a:t>
-                      </a:r>
-                    </a:p>
-                  </a:txBody>
-                  <a:tcPr anchor="ctr">
-                    <a:solidFill>
-                      <a:srgbClr val="F8FAFC"/>
-                    </a:solidFill>
-                  </a:tcPr>
-                </a:tc>
-              </a:tr>
-              <a:tr h="440574">
-                <a:tc>
-                  <a:txBody>
-                    <a:bodyPr/>
-                    <a:lstStyle/>
-                    <a:p>
-                      <a:pPr algn="l">
-                        <a:defRPr sz="900" b="0">
-                          <a:solidFill>
-                            <a:srgbClr val="0F172A"/>
-                          </a:solidFill>
-                          <a:latin typeface="Segoe UI"/>
-                        </a:defRPr>
-                      </a:pPr>
-                      <a:r>
-                        <a:t>6</a:t>
-                      </a:r>
-                    </a:p>
-                  </a:txBody>
-                  <a:tcPr anchor="ctr">
-                    <a:solidFill>
-                      <a:srgbClr val="FFFFFF"/>
-                    </a:solidFill>
-                  </a:tcPr>
-                </a:tc>
-                <a:tc>
-                  <a:txBody>
-                    <a:bodyPr/>
-                    <a:lstStyle/>
-                    <a:p>
-                      <a:pPr algn="l">
-                        <a:defRPr sz="900" b="0">
-                          <a:solidFill>
-                            <a:srgbClr val="0F172A"/>
-                          </a:solidFill>
-                          <a:latin typeface="Segoe UI"/>
-                        </a:defRPr>
-                      </a:pPr>
-                      <a:r>
-                        <a:t>Device not joined to domain</a:t>
-                      </a:r>
-                    </a:p>
-                  </a:txBody>
-                  <a:tcPr anchor="ctr">
-                    <a:solidFill>
-                      <a:srgbClr val="FFFFFF"/>
-                    </a:solidFill>
-                  </a:tcPr>
-                </a:tc>
-                <a:tc>
-                  <a:txBody>
-                    <a:bodyPr/>
-                    <a:lstStyle/>
-                    <a:p>
-                      <a:pPr algn="ctr">
-                        <a:defRPr sz="900" b="0">
-                          <a:solidFill>
-                            <a:srgbClr val="0F172A"/>
-                          </a:solidFill>
-                          <a:latin typeface="Segoe UI"/>
-                        </a:defRPr>
-                      </a:pPr>
-                      <a:r>
-                        <a:t>23</a:t>
-                      </a:r>
-                    </a:p>
-                  </a:txBody>
-                  <a:tcPr anchor="ctr">
-                    <a:solidFill>
-                      <a:srgbClr val="FFFFFF"/>
-                    </a:solidFill>
-                  </a:tcPr>
-                </a:tc>
-                <a:tc>
-                  <a:txBody>
-                    <a:bodyPr/>
-                    <a:lstStyle/>
-                    <a:p>
-                      <a:pPr algn="ctr">
-                        <a:defRPr sz="900" b="0">
-                          <a:solidFill>
-                            <a:srgbClr val="0F172A"/>
-                          </a:solidFill>
-                          <a:latin typeface="Segoe UI"/>
-                        </a:defRPr>
-                      </a:pPr>
-                      <a:r>
-                        <a:t>4</a:t>
-                      </a:r>
-                    </a:p>
-                  </a:txBody>
-                  <a:tcPr anchor="ctr">
-                    <a:solidFill>
-                      <a:srgbClr val="FFFFFF"/>
-                    </a:solidFill>
-                  </a:tcPr>
-                </a:tc>
-                <a:tc>
-                  <a:txBody>
-                    <a:bodyPr/>
-                    <a:lstStyle/>
-                    <a:p>
-                      <a:pPr algn="ctr">
-                        <a:defRPr sz="900" b="0">
-                          <a:solidFill>
-                            <a:srgbClr val="0F172A"/>
-                          </a:solidFill>
-                          <a:latin typeface="Segoe UI"/>
-                        </a:defRPr>
-                      </a:pPr>
-                      <a:r>
-                        <a:t>19</a:t>
-                      </a:r>
-                    </a:p>
-                  </a:txBody>
-                  <a:tcPr anchor="ctr">
-                    <a:solidFill>
-                      <a:srgbClr val="FFFFFF"/>
-                    </a:solidFill>
-                  </a:tcPr>
-                </a:tc>
-                <a:tc>
-                  <a:txBody>
-                    <a:bodyPr/>
-                    <a:lstStyle/>
-                    <a:p>
-                      <a:pPr algn="ctr">
-                        <a:defRPr sz="900" b="0">
-                          <a:solidFill>
-                            <a:srgbClr val="0F172A"/>
-                          </a:solidFill>
-                          <a:latin typeface="Segoe UI"/>
-                        </a:defRPr>
-                      </a:pPr>
-                      <a:r>
-                        <a:t>17.39%</a:t>
-                      </a:r>
-                    </a:p>
-                  </a:txBody>
-                  <a:tcPr anchor="ctr">
-                    <a:solidFill>
-                      <a:srgbClr val="FFFFFF"/>
-                    </a:solidFill>
-                  </a:tcPr>
-                </a:tc>
-                <a:tc>
-                  <a:txBody>
-                    <a:bodyPr/>
-                    <a:lstStyle/>
-                    <a:p>
-                      <a:pPr algn="ctr">
-                        <a:defRPr sz="900" b="1">
-                          <a:solidFill>
-                            <a:srgbClr val="E11D48"/>
-                          </a:solidFill>
-                          <a:latin typeface="Segoe UI"/>
-                        </a:defRPr>
-                      </a:pPr>
-                      <a:r>
-                        <a:t>🔴 Critical</a:t>
-                      </a:r>
-                    </a:p>
-                  </a:txBody>
-                  <a:tcPr anchor="ctr">
-                    <a:solidFill>
-                      <a:srgbClr val="FFFFFF"/>
-                    </a:solidFill>
-                  </a:tcPr>
-                </a:tc>
-                <a:tc>
-                  <a:txBody>
-                    <a:bodyPr/>
-                    <a:lstStyle/>
-                    <a:p>
-                      <a:pPr algn="ctr">
-                        <a:defRPr sz="900" b="1">
-                          <a:solidFill>
-                            <a:srgbClr val="E11D48"/>
-                          </a:solidFill>
-                          <a:latin typeface="Segoe UI"/>
-                        </a:defRPr>
-                      </a:pPr>
-                      <a:r>
-                        <a:t>FAIL</a:t>
-                      </a:r>
-                    </a:p>
-                  </a:txBody>
-                  <a:tcPr anchor="ctr">
-                    <a:solidFill>
-                      <a:srgbClr val="FFFFFF"/>
-                    </a:solidFill>
-                  </a:tcPr>
-                </a:tc>
-              </a:tr>
-              <a:tr h="440574">
-                <a:tc>
-                  <a:txBody>
-                    <a:bodyPr/>
-                    <a:lstStyle/>
-                    <a:p>
-                      <a:pPr algn="l">
-                        <a:defRPr sz="900" b="0">
-                          <a:solidFill>
-                            <a:srgbClr val="0F172A"/>
-                          </a:solidFill>
-                          <a:latin typeface="Segoe UI"/>
-                        </a:defRPr>
-                      </a:pPr>
-                      <a:r>
-                        <a:t>7</a:t>
-                      </a:r>
-                    </a:p>
-                  </a:txBody>
-                  <a:tcPr anchor="ctr">
-                    <a:solidFill>
-                      <a:srgbClr val="F8FAFC"/>
-                    </a:solidFill>
-                  </a:tcPr>
-                </a:tc>
-                <a:tc>
-                  <a:txBody>
-                    <a:bodyPr/>
-                    <a:lstStyle/>
-                    <a:p>
-                      <a:pPr algn="l">
-                        <a:defRPr sz="900" b="0">
-                          <a:solidFill>
-                            <a:srgbClr val="0F172A"/>
-                          </a:solidFill>
-                          <a:latin typeface="Segoe UI"/>
-                        </a:defRPr>
-                      </a:pPr>
-                      <a:r>
-                        <a:t>Privileged User (Admin Rights)</a:t>
-                      </a:r>
-                    </a:p>
-                  </a:txBody>
-                  <a:tcPr anchor="ctr">
-                    <a:solidFill>
-                      <a:srgbClr val="F8FAFC"/>
-                    </a:solidFill>
-                  </a:tcPr>
-                </a:tc>
-                <a:tc>
-                  <a:txBody>
-                    <a:bodyPr/>
-                    <a:lstStyle/>
-                    <a:p>
-                      <a:pPr algn="ctr">
-                        <a:defRPr sz="900" b="0">
-                          <a:solidFill>
-                            <a:srgbClr val="0F172A"/>
-                          </a:solidFill>
-                          <a:latin typeface="Segoe UI"/>
-                        </a:defRPr>
-                      </a:pPr>
-                      <a:r>
-                        <a:t>711</a:t>
-                      </a:r>
-                    </a:p>
-                  </a:txBody>
-                  <a:tcPr anchor="ctr">
-                    <a:solidFill>
-                      <a:srgbClr val="F8FAFC"/>
-                    </a:solidFill>
-                  </a:tcPr>
-                </a:tc>
-                <a:tc>
-                  <a:txBody>
-                    <a:bodyPr/>
-                    <a:lstStyle/>
-                    <a:p>
-                      <a:pPr algn="ctr">
-                        <a:defRPr sz="900" b="0">
-                          <a:solidFill>
-                            <a:srgbClr val="0F172A"/>
-                          </a:solidFill>
-                          <a:latin typeface="Segoe UI"/>
-                        </a:defRPr>
-                      </a:pPr>
-                      <a:r>
-                        <a:t>189</a:t>
-                      </a:r>
-                    </a:p>
-                  </a:txBody>
-                  <a:tcPr anchor="ctr">
-                    <a:solidFill>
-                      <a:srgbClr val="F8FAFC"/>
-                    </a:solidFill>
-                  </a:tcPr>
-                </a:tc>
-                <a:tc>
-                  <a:txBody>
-                    <a:bodyPr/>
-                    <a:lstStyle/>
-                    <a:p>
-                      <a:pPr algn="ctr">
-                        <a:defRPr sz="900" b="0">
-                          <a:solidFill>
-                            <a:srgbClr val="0F172A"/>
-                          </a:solidFill>
-                          <a:latin typeface="Segoe UI"/>
-                        </a:defRPr>
-                      </a:pPr>
-                      <a:r>
-                        <a:t>522</a:t>
-                      </a:r>
-                    </a:p>
-                  </a:txBody>
-                  <a:tcPr anchor="ctr">
-                    <a:solidFill>
-                      <a:srgbClr val="F8FAFC"/>
-                    </a:solidFill>
-                  </a:tcPr>
-                </a:tc>
-                <a:tc>
-                  <a:txBody>
-                    <a:bodyPr/>
-                    <a:lstStyle/>
-                    <a:p>
-                      <a:pPr algn="ctr">
-                        <a:defRPr sz="900" b="0">
-                          <a:solidFill>
-                            <a:srgbClr val="0F172A"/>
-                          </a:solidFill>
-                          <a:latin typeface="Segoe UI"/>
-                        </a:defRPr>
-                      </a:pPr>
-                      <a:r>
-                        <a:t>26.58%</a:t>
-                      </a:r>
-                    </a:p>
-                  </a:txBody>
-                  <a:tcPr anchor="ctr">
-                    <a:solidFill>
-                      <a:srgbClr val="F8FAFC"/>
-                    </a:solidFill>
-                  </a:tcPr>
-                </a:tc>
-                <a:tc>
-                  <a:txBody>
-                    <a:bodyPr/>
-                    <a:lstStyle/>
-                    <a:p>
-                      <a:pPr algn="ctr">
-                        <a:defRPr sz="900" b="1">
-                          <a:solidFill>
-                            <a:srgbClr val="E11D48"/>
-                          </a:solidFill>
-                          <a:latin typeface="Segoe UI"/>
-                        </a:defRPr>
-                      </a:pPr>
-                      <a:r>
-                        <a:t>🔴 Critical</a:t>
-                      </a:r>
-                    </a:p>
-                  </a:txBody>
-                  <a:tcPr anchor="ctr">
-                    <a:solidFill>
-                      <a:srgbClr val="F8FAFC"/>
-                    </a:solidFill>
-                  </a:tcPr>
-                </a:tc>
-                <a:tc>
-                  <a:txBody>
-                    <a:bodyPr/>
-                    <a:lstStyle/>
-                    <a:p>
-                      <a:pPr algn="ctr">
-                        <a:defRPr sz="900" b="1">
-                          <a:solidFill>
-                            <a:srgbClr val="E11D48"/>
-                          </a:solidFill>
-                          <a:latin typeface="Segoe UI"/>
-                        </a:defRPr>
-                      </a:pPr>
-                      <a:r>
-                        <a:t>FAIL</a:t>
-                      </a:r>
-                    </a:p>
-                  </a:txBody>
-                  <a:tcPr anchor="ctr">
-                    <a:solidFill>
-                      <a:srgbClr val="F8FAFC"/>
-                    </a:solidFill>
-                  </a:tcPr>
-                </a:tc>
-              </a:tr>
-              <a:tr h="440574">
-                <a:tc>
-                  <a:txBody>
-                    <a:bodyPr/>
-                    <a:lstStyle/>
-                    <a:p>
-                      <a:pPr algn="l">
-                        <a:defRPr sz="900" b="0">
-                          <a:solidFill>
-                            <a:srgbClr val="0F172A"/>
-                          </a:solidFill>
-                          <a:latin typeface="Segoe UI"/>
-                        </a:defRPr>
-                      </a:pPr>
-                      <a:r>
-                        <a:t>8</a:t>
-                      </a:r>
-                    </a:p>
-                  </a:txBody>
-                  <a:tcPr anchor="ctr">
-                    <a:solidFill>
-                      <a:srgbClr val="FFFFFF"/>
-                    </a:solidFill>
-                  </a:tcPr>
-                </a:tc>
-                <a:tc>
-                  <a:txBody>
-                    <a:bodyPr/>
-                    <a:lstStyle/>
-                    <a:p>
-                      <a:pPr algn="l">
-                        <a:defRPr sz="900" b="0">
-                          <a:solidFill>
-                            <a:srgbClr val="0F172A"/>
-                          </a:solidFill>
-                          <a:latin typeface="Segoe UI"/>
-                        </a:defRPr>
-                      </a:pPr>
-                      <a:r>
-                        <a:t>Document Request evidence</a:t>
-                      </a:r>
-                    </a:p>
-                  </a:txBody>
-                  <a:tcPr anchor="ctr">
-                    <a:solidFill>
-                      <a:srgbClr val="FFFFFF"/>
-                    </a:solidFill>
-                  </a:tcPr>
-                </a:tc>
-                <a:tc>
-                  <a:txBody>
-                    <a:bodyPr/>
-                    <a:lstStyle/>
-                    <a:p>
-                      <a:pPr algn="ctr">
-                        <a:defRPr sz="900" b="0">
-                          <a:solidFill>
-                            <a:srgbClr val="0F172A"/>
-                          </a:solidFill>
-                          <a:latin typeface="Segoe UI"/>
-                        </a:defRPr>
-                      </a:pPr>
-                      <a:r>
-                        <a:t>15</a:t>
-                      </a:r>
-                    </a:p>
-                  </a:txBody>
-                  <a:tcPr anchor="ctr">
-                    <a:solidFill>
-                      <a:srgbClr val="FFFFFF"/>
-                    </a:solidFill>
-                  </a:tcPr>
-                </a:tc>
-                <a:tc>
-                  <a:txBody>
-                    <a:bodyPr/>
-                    <a:lstStyle/>
-                    <a:p>
-                      <a:pPr algn="ctr">
-                        <a:defRPr sz="900" b="0">
-                          <a:solidFill>
-                            <a:srgbClr val="0F172A"/>
-                          </a:solidFill>
-                          <a:latin typeface="Segoe UI"/>
-                        </a:defRPr>
-                      </a:pPr>
-                      <a:r>
-                        <a:t>9</a:t>
-                      </a:r>
-                    </a:p>
-                  </a:txBody>
-                  <a:tcPr anchor="ctr">
-                    <a:solidFill>
-                      <a:srgbClr val="FFFFFF"/>
-                    </a:solidFill>
-                  </a:tcPr>
-                </a:tc>
-                <a:tc>
-                  <a:txBody>
-                    <a:bodyPr/>
-                    <a:lstStyle/>
-                    <a:p>
-                      <a:pPr algn="ctr">
-                        <a:defRPr sz="900" b="0">
-                          <a:solidFill>
-                            <a:srgbClr val="0F172A"/>
-                          </a:solidFill>
-                          <a:latin typeface="Segoe UI"/>
-                        </a:defRPr>
-                      </a:pPr>
-                      <a:r>
-                        <a:t>6</a:t>
-                      </a:r>
-                    </a:p>
-                  </a:txBody>
-                  <a:tcPr anchor="ctr">
-                    <a:solidFill>
-                      <a:srgbClr val="FFFFFF"/>
-                    </a:solidFill>
-                  </a:tcPr>
-                </a:tc>
-                <a:tc>
-                  <a:txBody>
-                    <a:bodyPr/>
-                    <a:lstStyle/>
-                    <a:p>
-                      <a:pPr algn="ctr">
-                        <a:defRPr sz="900" b="0">
-                          <a:solidFill>
-                            <a:srgbClr val="0F172A"/>
-                          </a:solidFill>
-                          <a:latin typeface="Segoe UI"/>
-                        </a:defRPr>
-                      </a:pPr>
-                      <a:r>
-                        <a:t>60.00%</a:t>
-                      </a:r>
-                    </a:p>
-                  </a:txBody>
-                  <a:tcPr anchor="ctr">
-                    <a:solidFill>
-                      <a:srgbClr val="FFFFFF"/>
-                    </a:solidFill>
-                  </a:tcPr>
-                </a:tc>
-                <a:tc>
-                  <a:txBody>
-                    <a:bodyPr/>
-                    <a:lstStyle/>
-                    <a:p>
-                      <a:pPr algn="ctr">
-                        <a:defRPr sz="900" b="1">
-                          <a:solidFill>
-                            <a:srgbClr val="D97706"/>
-                          </a:solidFill>
-                          <a:latin typeface="Segoe UI"/>
-                        </a:defRPr>
-                      </a:pPr>
-                      <a:r>
-                        <a:t>🟡 Warning</a:t>
-                      </a:r>
-                    </a:p>
-                  </a:txBody>
-                  <a:tcPr anchor="ctr">
-                    <a:solidFill>
-                      <a:srgbClr val="FFFFFF"/>
-                    </a:solidFill>
-                  </a:tcPr>
-                </a:tc>
-                <a:tc>
-                  <a:txBody>
-                    <a:bodyPr/>
-                    <a:lstStyle/>
-                    <a:p>
-                      <a:pPr algn="ctr">
-                        <a:defRPr sz="900" b="1">
-                          <a:solidFill>
-                            <a:srgbClr val="E11D48"/>
-                          </a:solidFill>
-                          <a:latin typeface="Segoe UI"/>
-                        </a:defRPr>
-                      </a:pPr>
-                      <a:r>
-                        <a:t>FAIL</a:t>
-                      </a:r>
-                    </a:p>
-                  </a:txBody>
-                  <a:tcPr anchor="ctr">
-                    <a:solidFill>
-                      <a:srgbClr val="FFFFFF"/>
-                    </a:solidFill>
-                  </a:tcPr>
-                </a:tc>
-              </a:tr>
-              <a:tr h="440580">
-                <a:tc>
-                  <a:txBody>
-                    <a:bodyPr/>
-                    <a:lstStyle/>
-                    <a:p>
-                      <a:pPr algn="l">
-                        <a:defRPr sz="900" b="1">
-                          <a:solidFill>
-                            <a:srgbClr val="0F172A"/>
-                          </a:solidFill>
-                          <a:latin typeface="Segoe UI"/>
-                        </a:defRPr>
-                      </a:pPr>
-                      <a:r>
-                        <a:t>รวม</a:t>
-                      </a:r>
-                    </a:p>
-                  </a:txBody>
-                  <a:tcPr anchor="ctr">
-                    <a:solidFill>
-                      <a:srgbClr val="EAF2FA"/>
-                    </a:solidFill>
-                  </a:tcPr>
-                </a:tc>
-                <a:tc>
-                  <a:txBody>
-                    <a:bodyPr/>
-                    <a:lstStyle/>
-                    <a:p>
-                      <a:pPr algn="l">
-                        <a:defRPr sz="900" b="1">
-                          <a:solidFill>
-                            <a:srgbClr val="0F172A"/>
-                          </a:solidFill>
-                          <a:latin typeface="Segoe UI"/>
-                        </a:defRPr>
-                      </a:pPr>
-                      <a:r>
-                        <a:t>Grand Total Performance (Weighted)</a:t>
-                      </a:r>
-                    </a:p>
-                  </a:txBody>
-                  <a:tcPr anchor="ctr">
-                    <a:solidFill>
-                      <a:srgbClr val="EAF2FA"/>
-                    </a:solidFill>
-                  </a:tcPr>
-                </a:tc>
-                <a:tc>
-                  <a:txBody>
-                    <a:bodyPr/>
-                    <a:lstStyle/>
-                    <a:p>
-                      <a:pPr algn="ctr">
-                        <a:defRPr sz="900" b="1">
-                          <a:solidFill>
-                            <a:srgbClr val="0F172A"/>
-                          </a:solidFill>
-                          <a:latin typeface="Segoe UI"/>
-                        </a:defRPr>
-                      </a:pPr>
-                      <a:r>
-                        <a:t>4,997</a:t>
-                      </a:r>
-                    </a:p>
-                  </a:txBody>
-                  <a:tcPr anchor="ctr">
-                    <a:solidFill>
-                      <a:srgbClr val="EAF2FA"/>
-                    </a:solidFill>
-                  </a:tcPr>
-                </a:tc>
-                <a:tc>
-                  <a:txBody>
-                    <a:bodyPr/>
-                    <a:lstStyle/>
-                    <a:p>
-                      <a:pPr algn="ctr">
-                        <a:defRPr sz="900" b="1">
-                          <a:solidFill>
-                            <a:srgbClr val="0F172A"/>
-                          </a:solidFill>
-                          <a:latin typeface="Segoe UI"/>
-                        </a:defRPr>
-                      </a:pPr>
-                      <a:r>
-                        <a:t>361</a:t>
-                      </a:r>
-                    </a:p>
-                  </a:txBody>
-                  <a:tcPr anchor="ctr">
-                    <a:solidFill>
-                      <a:srgbClr val="EAF2FA"/>
-                    </a:solidFill>
-                  </a:tcPr>
-                </a:tc>
-                <a:tc>
-                  <a:txBody>
-                    <a:bodyPr/>
-                    <a:lstStyle/>
-                    <a:p>
-                      <a:pPr algn="ctr">
-                        <a:defRPr sz="900" b="1">
-                          <a:solidFill>
-                            <a:srgbClr val="0F172A"/>
-                          </a:solidFill>
-                          <a:latin typeface="Segoe UI"/>
-                        </a:defRPr>
-                      </a:pPr>
-                      <a:r>
-                        <a:t>4,636</a:t>
-                      </a:r>
-                    </a:p>
-                  </a:txBody>
-                  <a:tcPr anchor="ctr">
-                    <a:solidFill>
-                      <a:srgbClr val="EAF2FA"/>
-                    </a:solidFill>
-                  </a:tcPr>
-                </a:tc>
-                <a:tc>
-                  <a:txBody>
-                    <a:bodyPr/>
-                    <a:lstStyle/>
-                    <a:p>
-                      <a:pPr algn="ctr">
-                        <a:defRPr sz="900" b="1">
-                          <a:solidFill>
-                            <a:srgbClr val="0F172A"/>
-                          </a:solidFill>
-                          <a:latin typeface="Segoe UI"/>
-                        </a:defRPr>
-                      </a:pPr>
-                      <a:r>
-                        <a:t>7.22%</a:t>
-                      </a:r>
-                    </a:p>
-                  </a:txBody>
-                  <a:tcPr anchor="ctr">
-                    <a:solidFill>
-                      <a:srgbClr val="EAF2FA"/>
-                    </a:solidFill>
-                  </a:tcPr>
-                </a:tc>
-                <a:tc>
-                  <a:txBody>
-                    <a:bodyPr/>
-                    <a:lstStyle/>
-                    <a:p>
-                      <a:pPr algn="ctr">
-                        <a:defRPr sz="900" b="1">
-                          <a:solidFill>
-                            <a:srgbClr val="E11D48"/>
-                          </a:solidFill>
-                          <a:latin typeface="Segoe UI"/>
-                        </a:defRPr>
-                      </a:pPr>
-                      <a:r>
-                        <a:t>🔴 Critical</a:t>
-                      </a:r>
-                    </a:p>
-                  </a:txBody>
-                  <a:tcPr anchor="ctr">
-                    <a:solidFill>
-                      <a:srgbClr val="EAF2FA"/>
-                    </a:solidFill>
-                  </a:tcPr>
-                </a:tc>
-                <a:tc>
-                  <a:txBody>
-                    <a:bodyPr/>
-                    <a:lstStyle/>
-                    <a:p>
-                      <a:pPr algn="ctr">
-                        <a:defRPr sz="900" b="1">
-                          <a:solidFill>
-                            <a:srgbClr val="E11D48"/>
-                          </a:solidFill>
-                          <a:latin typeface="Segoe UI"/>
-                        </a:defRPr>
-                      </a:pPr>
-                      <a:r>
-                        <a:t>FAIL</a:t>
-                      </a:r>
-                    </a:p>
-                  </a:txBody>
-                  <a:tcPr anchor="ctr">
-                    <a:solidFill>
-                      <a:srgbClr val="EAF2FA"/>
+                  <a:tcPr>
+                    <a:solidFill>
+                      <a:srgbClr val="F1F5F9"/>
                     </a:solidFill>
                   </a:tcPr>
                 </a:tc>
@@ -7571,7 +7463,7 @@
         <p:spPr>
           <a:xfrm>
             <a:off x="731520" y="365760"/>
-            <a:ext cx="10698480" cy="256032"/>
+            <a:ext cx="10698480" cy="1005840"/>
           </a:xfrm>
           <a:prstGeom prst="rect">
             <a:avLst/>
@@ -7585,63 +7477,27 @@
           <a:lstStyle/>
           <a:p>
             <a:pPr>
-              <a:defRPr sz="950" b="1">
-                <a:solidFill>
-                  <a:srgbClr val="0284C7"/>
+              <a:defRPr sz="1800" b="1">
+                <a:solidFill>
+                  <a:srgbClr val="0F172A"/>
                 </a:solidFill>
                 <a:latin typeface="Segoe UI"/>
               </a:defRPr>
             </a:pPr>
             <a:r>
-              <a:t>TEAM PERFORMANCE &amp; PODIUM RANKING</a:t>
-            </a:r>
-          </a:p>
-        </p:txBody>
-      </p:sp>
-      <p:sp>
-        <p:nvSpPr>
-          <p:cNvPr id="4" name="TextBox 3"/>
-          <p:cNvSpPr txBox="1"/>
-          <p:nvPr/>
-        </p:nvSpPr>
-        <p:spPr>
-          <a:xfrm>
-            <a:off x="731520" y="621792"/>
-            <a:ext cx="10698480" cy="685800"/>
-          </a:xfrm>
-          <a:prstGeom prst="rect">
-            <a:avLst/>
-          </a:prstGeom>
-          <a:noFill/>
-        </p:spPr>
-        <p:txBody>
-          <a:bodyPr wrap="square" lIns="0" tIns="0" rIns="0" bIns="0">
-            <a:spAutoFit/>
-          </a:bodyPr>
-          <a:lstStyle/>
+              <a:t>TEAM PERFORMANCE &amp; PODIUM RANKING  |  ทีม DC นำอันดับ 1 ด้วยความสำเร็จ 36.4% ขณะที่ทีม Branch แบกรับ 75.7% ของอุปกรณ์ทั่วประเทศ</a:t>
+            </a:r>
+          </a:p>
           <a:p>
             <a:pPr>
-              <a:defRPr sz="1800" b="1">
-                <a:solidFill>
-                  <a:srgbClr val="0F172A"/>
+              <a:defRPr sz="1100">
+                <a:solidFill>
+                  <a:srgbClr val="64748B"/>
                 </a:solidFill>
                 <a:latin typeface="Segoe UI"/>
               </a:defRPr>
             </a:pPr>
             <a:r>
-              <a:t>ทีม DC นำอันดับ 1 ด้วยความสำเร็จ 36.4% ขณะที่ทีม Branch แบกรับ 77.1% ของอุปกรณ์ทั่วประเทศ</a:t>
-            </a:r>
-          </a:p>
-          <a:p>
-            <a:pPr>
-              <a:defRPr sz="1050">
-                <a:solidFill>
-                  <a:srgbClr val="475569"/>
-                </a:solidFill>
-                <a:latin typeface="Segoe UI"/>
-              </a:defRPr>
-            </a:pPr>
-            <a:r>
               <a:t>เปรียบเทียบผลการดำเนินงานของ 3 หน่วยงานปฏิบัติการภายใต้ RIS Endpoint Support</a:t>
             </a:r>
           </a:p>
@@ -7649,16 +7505,16 @@
       </p:sp>
       <p:sp>
         <p:nvSpPr>
-          <p:cNvPr id="5" name="Rectangle 4"/>
+          <p:cNvPr id="4" name="Rounded Rectangle 3"/>
           <p:cNvSpPr/>
           <p:nvPr/>
         </p:nvSpPr>
         <p:spPr>
           <a:xfrm>
             <a:off x="731520" y="1508760"/>
-            <a:ext cx="3383280" cy="2926080"/>
+            <a:ext cx="3383280" cy="3200400"/>
           </a:xfrm>
-          <a:prstGeom prst="rect">
+          <a:prstGeom prst="roundRect">
             <a:avLst/>
           </a:prstGeom>
           <a:solidFill>
@@ -7694,7 +7550,7 @@
       </p:sp>
       <p:sp>
         <p:nvSpPr>
-          <p:cNvPr id="6" name="Rectangle 5"/>
+          <p:cNvPr id="5" name="Rectangle 4"/>
           <p:cNvSpPr/>
           <p:nvPr/>
         </p:nvSpPr>
@@ -7707,7 +7563,7 @@
             <a:avLst/>
           </a:prstGeom>
           <a:solidFill>
-            <a:srgbClr val="EAB308"/>
+            <a:srgbClr val="D97706"/>
           </a:solidFill>
           <a:ln>
             <a:noFill/>
@@ -7737,14 +7593,14 @@
       </p:sp>
       <p:sp>
         <p:nvSpPr>
-          <p:cNvPr id="7" name="TextBox 6"/>
+          <p:cNvPr id="6" name="TextBox 5"/>
           <p:cNvSpPr txBox="1"/>
           <p:nvPr/>
         </p:nvSpPr>
         <p:spPr>
           <a:xfrm>
             <a:off x="914400" y="1691640"/>
-            <a:ext cx="3017520" cy="2651760"/>
+            <a:ext cx="3017520" cy="2834640"/>
           </a:xfrm>
           <a:prstGeom prst="rect">
             <a:avLst/>
@@ -7770,9 +7626,9 @@
           </a:p>
           <a:p>
             <a:pPr>
-              <a:defRPr sz="3200" b="1">
-                <a:solidFill>
-                  <a:srgbClr val="EAB308"/>
+              <a:defRPr sz="2800" b="1">
+                <a:solidFill>
+                  <a:srgbClr val="D97706"/>
                 </a:solidFill>
               </a:defRPr>
             </a:pPr>
@@ -7784,19 +7640,19 @@
             <a:pPr>
               <a:defRPr sz="1000" b="1">
                 <a:solidFill>
-                  <a:srgbClr val="475569"/>
+                  <a:srgbClr val="1E293B"/>
                 </a:solidFill>
               </a:defRPr>
             </a:pPr>
             <a:r>
-              <a:t>ผลงาน: 194 / 533 เครื่อง</a:t>
+              <a:t>สำเร็จแล้ว: 194 / 533 เครื่อง</a:t>
             </a:r>
           </a:p>
           <a:p>
             <a:pPr>
               <a:defRPr sz="950">
                 <a:solidFill>
-                  <a:srgbClr val="E11D48"/>
+                  <a:srgbClr val="F43F5E"/>
                 </a:solidFill>
               </a:defRPr>
             </a:pPr>
@@ -7809,7 +7665,7 @@
             <a:pPr>
               <a:defRPr sz="850">
                 <a:solidFill>
-                  <a:srgbClr val="475569"/>
+                  <a:srgbClr val="64748B"/>
                 </a:solidFill>
               </a:defRPr>
             </a:pPr>
@@ -7821,16 +7677,16 @@
       </p:sp>
       <p:sp>
         <p:nvSpPr>
-          <p:cNvPr id="8" name="Rectangle 7"/>
+          <p:cNvPr id="7" name="Rounded Rectangle 6"/>
           <p:cNvSpPr/>
           <p:nvPr/>
         </p:nvSpPr>
         <p:spPr>
           <a:xfrm>
             <a:off x="4389120" y="1508760"/>
-            <a:ext cx="3383280" cy="2926080"/>
+            <a:ext cx="3383280" cy="3200400"/>
           </a:xfrm>
-          <a:prstGeom prst="rect">
+          <a:prstGeom prst="roundRect">
             <a:avLst/>
           </a:prstGeom>
           <a:solidFill>
@@ -7866,7 +7722,7 @@
       </p:sp>
       <p:sp>
         <p:nvSpPr>
-          <p:cNvPr id="9" name="Rectangle 8"/>
+          <p:cNvPr id="8" name="Rectangle 7"/>
           <p:cNvSpPr/>
           <p:nvPr/>
         </p:nvSpPr>
@@ -7879,7 +7735,7 @@
             <a:avLst/>
           </a:prstGeom>
           <a:solidFill>
-            <a:srgbClr val="94A3B8"/>
+            <a:srgbClr val="2563EB"/>
           </a:solidFill>
           <a:ln>
             <a:noFill/>
@@ -7909,14 +7765,14 @@
       </p:sp>
       <p:sp>
         <p:nvSpPr>
-          <p:cNvPr id="10" name="TextBox 9"/>
+          <p:cNvPr id="9" name="TextBox 8"/>
           <p:cNvSpPr txBox="1"/>
           <p:nvPr/>
         </p:nvSpPr>
         <p:spPr>
           <a:xfrm>
             <a:off x="4572000" y="1691640"/>
-            <a:ext cx="3017520" cy="2651760"/>
+            <a:ext cx="3017520" cy="2834640"/>
           </a:xfrm>
           <a:prstGeom prst="rect">
             <a:avLst/>
@@ -7942,9 +7798,9 @@
           </a:p>
           <a:p>
             <a:pPr>
-              <a:defRPr sz="3200" b="1">
-                <a:solidFill>
-                  <a:srgbClr val="94A3B8"/>
+              <a:defRPr sz="2800" b="1">
+                <a:solidFill>
+                  <a:srgbClr val="2563EB"/>
                 </a:solidFill>
               </a:defRPr>
             </a:pPr>
@@ -7956,19 +7812,19 @@
             <a:pPr>
               <a:defRPr sz="1000" b="1">
                 <a:solidFill>
-                  <a:srgbClr val="475569"/>
+                  <a:srgbClr val="1E293B"/>
                 </a:solidFill>
               </a:defRPr>
             </a:pPr>
             <a:r>
-              <a:t>ผลงาน: 149 / 609 เครื่อง</a:t>
+              <a:t>สำเร็จแล้ว: 149 / 609 เครื่อง</a:t>
             </a:r>
           </a:p>
           <a:p>
             <a:pPr>
               <a:defRPr sz="950">
                 <a:solidFill>
-                  <a:srgbClr val="E11D48"/>
+                  <a:srgbClr val="F43F5E"/>
                 </a:solidFill>
               </a:defRPr>
             </a:pPr>
@@ -7981,28 +7837,28 @@
             <a:pPr>
               <a:defRPr sz="850">
                 <a:solidFill>
-                  <a:srgbClr val="475569"/>
+                  <a:srgbClr val="64748B"/>
                 </a:solidFill>
               </a:defRPr>
             </a:pPr>
             <a:r>
-              <a:t>คืบหน้าต่อเนื่อง ตอบสนองเร็ว รอผู้ใช้งานรีสตาร์ตเครื่องและผลักดัน OS Version Update</a:t>
-            </a:r>
-          </a:p>
-        </p:txBody>
-      </p:sp>
-      <p:sp>
-        <p:nvSpPr>
-          <p:cNvPr id="11" name="Rectangle 10"/>
+              <a:t>ปิดงาน 100% ใน Topic 1.1 และ 1.2 กำลังผลักดันการ Reboot เครื่องเพื่อจบงาน Windows Update</a:t>
+            </a:r>
+          </a:p>
+        </p:txBody>
+      </p:sp>
+      <p:sp>
+        <p:nvSpPr>
+          <p:cNvPr id="10" name="Rounded Rectangle 9"/>
           <p:cNvSpPr/>
           <p:nvPr/>
         </p:nvSpPr>
         <p:spPr>
           <a:xfrm>
             <a:off x="8046720" y="1508760"/>
-            <a:ext cx="3383280" cy="2926080"/>
+            <a:ext cx="3383280" cy="3200400"/>
           </a:xfrm>
-          <a:prstGeom prst="rect">
+          <a:prstGeom prst="roundRect">
             <a:avLst/>
           </a:prstGeom>
           <a:solidFill>
@@ -8038,7 +7894,7 @@
       </p:sp>
       <p:sp>
         <p:nvSpPr>
-          <p:cNvPr id="12" name="Rectangle 11"/>
+          <p:cNvPr id="11" name="Rectangle 10"/>
           <p:cNvSpPr/>
           <p:nvPr/>
         </p:nvSpPr>
@@ -8051,7 +7907,7 @@
             <a:avLst/>
           </a:prstGeom>
           <a:solidFill>
-            <a:srgbClr val="B45309"/>
+            <a:srgbClr val="F43F5E"/>
           </a:solidFill>
           <a:ln>
             <a:noFill/>
@@ -8081,14 +7937,14 @@
       </p:sp>
       <p:sp>
         <p:nvSpPr>
-          <p:cNvPr id="13" name="TextBox 12"/>
+          <p:cNvPr id="12" name="TextBox 11"/>
           <p:cNvSpPr txBox="1"/>
           <p:nvPr/>
         </p:nvSpPr>
         <p:spPr>
           <a:xfrm>
             <a:off x="8229600" y="1691640"/>
-            <a:ext cx="3017520" cy="2651760"/>
+            <a:ext cx="3017520" cy="2834640"/>
           </a:xfrm>
           <a:prstGeom prst="rect">
             <a:avLst/>
@@ -8114,9 +7970,9 @@
           </a:p>
           <a:p>
             <a:pPr>
-              <a:defRPr sz="3200" b="1">
-                <a:solidFill>
-                  <a:srgbClr val="B45309"/>
+              <a:defRPr sz="2800" b="1">
+                <a:solidFill>
+                  <a:srgbClr val="F43F5E"/>
                 </a:solidFill>
               </a:defRPr>
             </a:pPr>
@@ -8128,19 +7984,19 @@
             <a:pPr>
               <a:defRPr sz="1000" b="1">
                 <a:solidFill>
-                  <a:srgbClr val="475569"/>
+                  <a:srgbClr val="1E293B"/>
                 </a:solidFill>
               </a:defRPr>
             </a:pPr>
             <a:r>
-              <a:t>ผลงาน: 18 / 3,855 เครื่อง</a:t>
+              <a:t>สำเร็จแล้ว: 18 / 3,855 เครื่อง</a:t>
             </a:r>
           </a:p>
           <a:p>
             <a:pPr>
               <a:defRPr sz="950">
                 <a:solidFill>
-                  <a:srgbClr val="E11D48"/>
+                  <a:srgbClr val="F43F5E"/>
                 </a:solidFill>
               </a:defRPr>
             </a:pPr>
@@ -8153,28 +8009,28 @@
             <a:pPr>
               <a:defRPr sz="850">
                 <a:solidFill>
-                  <a:srgbClr val="475569"/>
+                  <a:srgbClr val="64748B"/>
                 </a:solidFill>
               </a:defRPr>
             </a:pPr>
             <a:r>
-              <a:t>แบกรับ 77.1% ของอุปกรณ์ทั้งระบบ ข้อจำกัดเครื่อง POS/แคชเชียร์หน้าร้านต้องทำนอกเวลาบริการ</a:t>
-            </a:r>
-          </a:p>
-        </p:txBody>
-      </p:sp>
-      <p:sp>
-        <p:nvSpPr>
-          <p:cNvPr id="14" name="Rectangle 13"/>
+              <a:t>แบกรับภาระงาน 75.7% ของทั้งระบบ (3,855 เครื่อง) ซึ่งส่วนใหญ่เป็นแคชเชียร์ POS รอรอบบำรุงรักษา</a:t>
+            </a:r>
+          </a:p>
+        </p:txBody>
+      </p:sp>
+      <p:sp>
+        <p:nvSpPr>
+          <p:cNvPr id="13" name="Rounded Rectangle 12"/>
           <p:cNvSpPr/>
           <p:nvPr/>
         </p:nvSpPr>
         <p:spPr>
           <a:xfrm>
-            <a:off x="731520" y="4663440"/>
-            <a:ext cx="10698480" cy="1737360"/>
+            <a:off x="731520" y="4892040"/>
+            <a:ext cx="10698480" cy="1508760"/>
           </a:xfrm>
-          <a:prstGeom prst="rect">
+          <a:prstGeom prst="roundRect">
             <a:avLst/>
           </a:prstGeom>
           <a:solidFill>
@@ -8210,14 +8066,14 @@
       </p:sp>
       <p:sp>
         <p:nvSpPr>
-          <p:cNvPr id="15" name="TextBox 14"/>
+          <p:cNvPr id="14" name="TextBox 13"/>
           <p:cNvSpPr txBox="1"/>
           <p:nvPr/>
         </p:nvSpPr>
         <p:spPr>
           <a:xfrm>
-            <a:off x="914400" y="4754880"/>
-            <a:ext cx="10332720" cy="1554480"/>
+            <a:off x="914400" y="4983480"/>
+            <a:ext cx="10332720" cy="1325880"/>
           </a:xfrm>
           <a:prstGeom prst="rect">
             <a:avLst/>
@@ -8245,7 +8101,7 @@
             <a:pPr>
               <a:defRPr sz="950">
                 <a:solidFill>
-                  <a:srgbClr val="475569"/>
+                  <a:srgbClr val="64748B"/>
                 </a:solidFill>
               </a:defRPr>
             </a:pPr>
@@ -8257,7 +8113,7 @@
             <a:pPr>
               <a:defRPr sz="950">
                 <a:solidFill>
-                  <a:srgbClr val="475569"/>
+                  <a:srgbClr val="64748B"/>
                 </a:solidFill>
               </a:defRPr>
             </a:pPr>
@@ -8269,7 +8125,7 @@
             <a:pPr>
               <a:defRPr sz="950">
                 <a:solidFill>
-                  <a:srgbClr val="475569"/>
+                  <a:srgbClr val="64748B"/>
                 </a:solidFill>
               </a:defRPr>
             </a:pPr>
@@ -8349,7 +8205,7 @@
         <p:spPr>
           <a:xfrm>
             <a:off x="731520" y="365760"/>
-            <a:ext cx="10698480" cy="256032"/>
+            <a:ext cx="10698480" cy="1005840"/>
           </a:xfrm>
           <a:prstGeom prst="rect">
             <a:avLst/>
@@ -8363,71 +8219,35 @@
           <a:lstStyle/>
           <a:p>
             <a:pPr>
-              <a:defRPr sz="950" b="1">
-                <a:solidFill>
-                  <a:srgbClr val="0284C7"/>
+              <a:defRPr sz="1800" b="1">
+                <a:solidFill>
+                  <a:srgbClr val="0F172A"/>
                 </a:solidFill>
                 <a:latin typeface="Segoe UI"/>
               </a:defRPr>
             </a:pPr>
             <a:r>
-              <a:t>BUSINESS UNIT (BU) DISTRIBUTION</a:t>
-            </a:r>
-          </a:p>
-        </p:txBody>
-      </p:sp>
-      <p:sp>
-        <p:nvSpPr>
-          <p:cNvPr id="4" name="TextBox 3"/>
-          <p:cNvSpPr txBox="1"/>
-          <p:nvPr/>
-        </p:nvSpPr>
-        <p:spPr>
-          <a:xfrm>
-            <a:off x="731520" y="621792"/>
-            <a:ext cx="10698480" cy="685800"/>
-          </a:xfrm>
-          <a:prstGeom prst="rect">
-            <a:avLst/>
-          </a:prstGeom>
-          <a:noFill/>
-        </p:spPr>
-        <p:txBody>
-          <a:bodyPr wrap="square" lIns="0" tIns="0" rIns="0" bIns="0">
-            <a:spAutoFit/>
-          </a:bodyPr>
-          <a:lstStyle/>
+              <a:t>BUSINESS UNIT (BU) DISTRIBUTION  |  CDG และ CFR ถือครองอุปกรณ์กว่า 53.9% โดย CMG มีความก้าวหน้าสูงสุดที่ 16.8%</a:t>
+            </a:r>
+          </a:p>
           <a:p>
             <a:pPr>
-              <a:defRPr sz="1800" b="1">
-                <a:solidFill>
-                  <a:srgbClr val="0F172A"/>
+              <a:defRPr sz="1100">
+                <a:solidFill>
+                  <a:srgbClr val="64748B"/>
                 </a:solidFill>
                 <a:latin typeface="Segoe UI"/>
               </a:defRPr>
             </a:pPr>
             <a:r>
-              <a:t>5 อันดับ BU สูงสุดถือครองอุปกรณ์กว่า 70% โดย CMG มีความคืบหน้าสูงสุดที่ 47.4%</a:t>
-            </a:r>
-          </a:p>
-          <a:p>
-            <a:pPr>
-              <a:defRPr sz="1050">
-                <a:solidFill>
-                  <a:srgbClr val="475569"/>
-                </a:solidFill>
-                <a:latin typeface="Segoe UI"/>
-              </a:defRPr>
-            </a:pPr>
-            <a:r>
-              <a:t>แจกแจงเป้าหมายและการกระจายตัวของอุปกรณ์ตามกลุ่มธุรกิจภายใต้ Central Group</a:t>
+              <a:t>แจกแจงเป้าหมายและการกระจายตัวของอุปกรณ์ตามกลุ่มธุรกิจภายใต้ Central Group (Overall Scope: 5,092 Targets)</a:t>
             </a:r>
           </a:p>
         </p:txBody>
       </p:sp>
       <p:graphicFrame>
         <p:nvGraphicFramePr>
-          <p:cNvPr id="5" name="Table 4"/>
+          <p:cNvPr id="4" name="Table 3"/>
           <p:cNvGraphicFramePr>
             <a:graphicFrameLocks noGrp="1"/>
           </p:cNvGraphicFramePr>
@@ -8459,7 +8279,7 @@
                     <a:lstStyle/>
                     <a:p>
                       <a:pPr algn="l">
-                        <a:defRPr sz="950" b="1">
+                        <a:defRPr b="1" sz="1000">
                           <a:solidFill>
                             <a:srgbClr val="FFFFFF"/>
                           </a:solidFill>
@@ -8471,7 +8291,7 @@
                       </a:r>
                     </a:p>
                   </a:txBody>
-                  <a:tcPr anchor="ctr">
+                  <a:tcPr>
                     <a:solidFill>
                       <a:srgbClr val="0F172A"/>
                     </a:solidFill>
@@ -8483,7 +8303,7 @@
                     <a:lstStyle/>
                     <a:p>
                       <a:pPr algn="l">
-                        <a:defRPr sz="950" b="1">
+                        <a:defRPr b="1" sz="1000">
                           <a:solidFill>
                             <a:srgbClr val="FFFFFF"/>
                           </a:solidFill>
@@ -8495,9 +8315,275 @@
                       </a:r>
                     </a:p>
                   </a:txBody>
-                  <a:tcPr anchor="ctr">
+                  <a:tcPr>
                     <a:solidFill>
                       <a:srgbClr val="0F172A"/>
+                    </a:solidFill>
+                  </a:tcPr>
+                </a:tc>
+                <a:tc>
+                  <a:txBody>
+                    <a:bodyPr/>
+                    <a:lstStyle/>
+                    <a:p>
+                      <a:pPr algn="ctr">
+                        <a:defRPr b="1" sz="1000">
+                          <a:solidFill>
+                            <a:srgbClr val="FFFFFF"/>
+                          </a:solidFill>
+                          <a:latin typeface="Segoe UI"/>
+                        </a:defRPr>
+                      </a:pPr>
+                      <a:r>
+                        <a:t>เป้าหมายรวม</a:t>
+                      </a:r>
+                    </a:p>
+                  </a:txBody>
+                  <a:tcPr>
+                    <a:solidFill>
+                      <a:srgbClr val="0F172A"/>
+                    </a:solidFill>
+                  </a:tcPr>
+                </a:tc>
+                <a:tc>
+                  <a:txBody>
+                    <a:bodyPr/>
+                    <a:lstStyle/>
+                    <a:p>
+                      <a:pPr algn="ctr">
+                        <a:defRPr b="1" sz="1000">
+                          <a:solidFill>
+                            <a:srgbClr val="FFFFFF"/>
+                          </a:solidFill>
+                          <a:latin typeface="Segoe UI"/>
+                        </a:defRPr>
+                      </a:pPr>
+                      <a:r>
+                        <a:t>ผ่านแล้ว</a:t>
+                      </a:r>
+                    </a:p>
+                  </a:txBody>
+                  <a:tcPr>
+                    <a:solidFill>
+                      <a:srgbClr val="0F172A"/>
+                    </a:solidFill>
+                  </a:tcPr>
+                </a:tc>
+                <a:tc>
+                  <a:txBody>
+                    <a:bodyPr/>
+                    <a:lstStyle/>
+                    <a:p>
+                      <a:pPr algn="ctr">
+                        <a:defRPr b="1" sz="1000">
+                          <a:solidFill>
+                            <a:srgbClr val="FFFFFF"/>
+                          </a:solidFill>
+                          <a:latin typeface="Segoe UI"/>
+                        </a:defRPr>
+                      </a:pPr>
+                      <a:r>
+                        <a:t>คงเหลือ</a:t>
+                      </a:r>
+                    </a:p>
+                  </a:txBody>
+                  <a:tcPr>
+                    <a:solidFill>
+                      <a:srgbClr val="0F172A"/>
+                    </a:solidFill>
+                  </a:tcPr>
+                </a:tc>
+                <a:tc>
+                  <a:txBody>
+                    <a:bodyPr/>
+                    <a:lstStyle/>
+                    <a:p>
+                      <a:pPr algn="ctr">
+                        <a:defRPr b="1" sz="1000">
+                          <a:solidFill>
+                            <a:srgbClr val="FFFFFF"/>
+                          </a:solidFill>
+                          <a:latin typeface="Segoe UI"/>
+                        </a:defRPr>
+                      </a:pPr>
+                      <a:r>
+                        <a:t>อัตราสำเร็จ (%)</a:t>
+                      </a:r>
+                    </a:p>
+                  </a:txBody>
+                  <a:tcPr>
+                    <a:solidFill>
+                      <a:srgbClr val="0F172A"/>
+                    </a:solidFill>
+                  </a:tcPr>
+                </a:tc>
+                <a:tc>
+                  <a:txBody>
+                    <a:bodyPr/>
+                    <a:lstStyle/>
+                    <a:p>
+                      <a:pPr algn="ctr">
+                        <a:defRPr b="1" sz="1000">
+                          <a:solidFill>
+                            <a:srgbClr val="FFFFFF"/>
+                          </a:solidFill>
+                          <a:latin typeface="Segoe UI"/>
+                        </a:defRPr>
+                      </a:pPr>
+                      <a:r>
+                        <a:t>ระดับผลงาน</a:t>
+                      </a:r>
+                    </a:p>
+                  </a:txBody>
+                  <a:tcPr>
+                    <a:solidFill>
+                      <a:srgbClr val="0F172A"/>
+                    </a:solidFill>
+                  </a:tcPr>
+                </a:tc>
+              </a:tr>
+              <a:tr h="440574">
+                <a:tc>
+                  <a:txBody>
+                    <a:bodyPr/>
+                    <a:lstStyle/>
+                    <a:p>
+                      <a:pPr algn="l">
+                        <a:defRPr sz="950">
+                          <a:solidFill>
+                            <a:srgbClr val="0F172A"/>
+                          </a:solidFill>
+                          <a:latin typeface="Segoe UI"/>
+                        </a:defRPr>
+                      </a:pPr>
+                      <a:r>
+                        <a:t>1</a:t>
+                      </a:r>
+                    </a:p>
+                  </a:txBody>
+                  <a:tcPr>
+                    <a:solidFill>
+                      <a:srgbClr val="FFFFFF"/>
+                    </a:solidFill>
+                  </a:tcPr>
+                </a:tc>
+                <a:tc>
+                  <a:txBody>
+                    <a:bodyPr/>
+                    <a:lstStyle/>
+                    <a:p>
+                      <a:pPr algn="l">
+                        <a:defRPr sz="950">
+                          <a:solidFill>
+                            <a:srgbClr val="0F172A"/>
+                          </a:solidFill>
+                          <a:latin typeface="Segoe UI"/>
+                        </a:defRPr>
+                      </a:pPr>
+                      <a:r>
+                        <a:t>CDG (Central Department Store)</a:t>
+                      </a:r>
+                    </a:p>
+                  </a:txBody>
+                  <a:tcPr>
+                    <a:solidFill>
+                      <a:srgbClr val="FFFFFF"/>
+                    </a:solidFill>
+                  </a:tcPr>
+                </a:tc>
+                <a:tc>
+                  <a:txBody>
+                    <a:bodyPr/>
+                    <a:lstStyle/>
+                    <a:p>
+                      <a:pPr algn="ctr">
+                        <a:defRPr sz="950">
+                          <a:solidFill>
+                            <a:srgbClr val="0F172A"/>
+                          </a:solidFill>
+                          <a:latin typeface="Segoe UI"/>
+                        </a:defRPr>
+                      </a:pPr>
+                      <a:r>
+                        <a:t>1,758</a:t>
+                      </a:r>
+                    </a:p>
+                  </a:txBody>
+                  <a:tcPr>
+                    <a:solidFill>
+                      <a:srgbClr val="FFFFFF"/>
+                    </a:solidFill>
+                  </a:tcPr>
+                </a:tc>
+                <a:tc>
+                  <a:txBody>
+                    <a:bodyPr/>
+                    <a:lstStyle/>
+                    <a:p>
+                      <a:pPr algn="ctr">
+                        <a:defRPr sz="950">
+                          <a:solidFill>
+                            <a:srgbClr val="0F172A"/>
+                          </a:solidFill>
+                          <a:latin typeface="Segoe UI"/>
+                        </a:defRPr>
+                      </a:pPr>
+                      <a:r>
+                        <a:t>99</a:t>
+                      </a:r>
+                    </a:p>
+                  </a:txBody>
+                  <a:tcPr>
+                    <a:solidFill>
+                      <a:srgbClr val="FFFFFF"/>
+                    </a:solidFill>
+                  </a:tcPr>
+                </a:tc>
+                <a:tc>
+                  <a:txBody>
+                    <a:bodyPr/>
+                    <a:lstStyle/>
+                    <a:p>
+                      <a:pPr algn="ctr">
+                        <a:defRPr sz="950">
+                          <a:solidFill>
+                            <a:srgbClr val="0F172A"/>
+                          </a:solidFill>
+                          <a:latin typeface="Segoe UI"/>
+                        </a:defRPr>
+                      </a:pPr>
+                      <a:r>
+                        <a:t>1,659</a:t>
+                      </a:r>
+                    </a:p>
+                  </a:txBody>
+                  <a:tcPr>
+                    <a:solidFill>
+                      <a:srgbClr val="FFFFFF"/>
+                    </a:solidFill>
+                  </a:tcPr>
+                </a:tc>
+                <a:tc>
+                  <a:txBody>
+                    <a:bodyPr/>
+                    <a:lstStyle/>
+                    <a:p>
+                      <a:pPr algn="ctr">
+                        <a:defRPr sz="950">
+                          <a:solidFill>
+                            <a:srgbClr val="0F172A"/>
+                          </a:solidFill>
+                          <a:latin typeface="Segoe UI"/>
+                        </a:defRPr>
+                      </a:pPr>
+                      <a:r>
+                        <a:t>5.63%</a:t>
+                      </a:r>
+                    </a:p>
+                  </a:txBody>
+                  <a:tcPr>
+                    <a:solidFill>
+                      <a:srgbClr val="FFFFFF"/>
                     </a:solidFill>
                   </a:tcPr>
                 </a:tc>
@@ -8509,19 +8595,165 @@
                       <a:pPr algn="ctr">
                         <a:defRPr sz="950" b="1">
                           <a:solidFill>
-                            <a:srgbClr val="FFFFFF"/>
-                          </a:solidFill>
-                          <a:latin typeface="Segoe UI"/>
-                        </a:defRPr>
-                      </a:pPr>
-                      <a:r>
-                        <a:t>เป้าหมายรวม</a:t>
-                      </a:r>
-                    </a:p>
-                  </a:txBody>
-                  <a:tcPr anchor="ctr">
-                    <a:solidFill>
-                      <a:srgbClr val="0F172A"/>
+                            <a:srgbClr val="F43F5E"/>
+                          </a:solidFill>
+                          <a:latin typeface="Segoe UI"/>
+                        </a:defRPr>
+                      </a:pPr>
+                      <a:r>
+                        <a:t>🔴 Critical</a:t>
+                      </a:r>
+                    </a:p>
+                  </a:txBody>
+                  <a:tcPr>
+                    <a:solidFill>
+                      <a:srgbClr val="FFFFFF"/>
+                    </a:solidFill>
+                  </a:tcPr>
+                </a:tc>
+              </a:tr>
+              <a:tr h="440574">
+                <a:tc>
+                  <a:txBody>
+                    <a:bodyPr/>
+                    <a:lstStyle/>
+                    <a:p>
+                      <a:pPr algn="l">
+                        <a:defRPr sz="950">
+                          <a:solidFill>
+                            <a:srgbClr val="0F172A"/>
+                          </a:solidFill>
+                          <a:latin typeface="Segoe UI"/>
+                        </a:defRPr>
+                      </a:pPr>
+                      <a:r>
+                        <a:t>2</a:t>
+                      </a:r>
+                    </a:p>
+                  </a:txBody>
+                  <a:tcPr>
+                    <a:solidFill>
+                      <a:srgbClr val="F8FAFC"/>
+                    </a:solidFill>
+                  </a:tcPr>
+                </a:tc>
+                <a:tc>
+                  <a:txBody>
+                    <a:bodyPr/>
+                    <a:lstStyle/>
+                    <a:p>
+                      <a:pPr algn="l">
+                        <a:defRPr sz="950">
+                          <a:solidFill>
+                            <a:srgbClr val="0F172A"/>
+                          </a:solidFill>
+                          <a:latin typeface="Segoe UI"/>
+                        </a:defRPr>
+                      </a:pPr>
+                      <a:r>
+                        <a:t>CFR (Central Food Retail / Tops)</a:t>
+                      </a:r>
+                    </a:p>
+                  </a:txBody>
+                  <a:tcPr>
+                    <a:solidFill>
+                      <a:srgbClr val="F8FAFC"/>
+                    </a:solidFill>
+                  </a:tcPr>
+                </a:tc>
+                <a:tc>
+                  <a:txBody>
+                    <a:bodyPr/>
+                    <a:lstStyle/>
+                    <a:p>
+                      <a:pPr algn="ctr">
+                        <a:defRPr sz="950">
+                          <a:solidFill>
+                            <a:srgbClr val="0F172A"/>
+                          </a:solidFill>
+                          <a:latin typeface="Segoe UI"/>
+                        </a:defRPr>
+                      </a:pPr>
+                      <a:r>
+                        <a:t>987</a:t>
+                      </a:r>
+                    </a:p>
+                  </a:txBody>
+                  <a:tcPr>
+                    <a:solidFill>
+                      <a:srgbClr val="F8FAFC"/>
+                    </a:solidFill>
+                  </a:tcPr>
+                </a:tc>
+                <a:tc>
+                  <a:txBody>
+                    <a:bodyPr/>
+                    <a:lstStyle/>
+                    <a:p>
+                      <a:pPr algn="ctr">
+                        <a:defRPr sz="950">
+                          <a:solidFill>
+                            <a:srgbClr val="0F172A"/>
+                          </a:solidFill>
+                          <a:latin typeface="Segoe UI"/>
+                        </a:defRPr>
+                      </a:pPr>
+                      <a:r>
+                        <a:t>36</a:t>
+                      </a:r>
+                    </a:p>
+                  </a:txBody>
+                  <a:tcPr>
+                    <a:solidFill>
+                      <a:srgbClr val="F8FAFC"/>
+                    </a:solidFill>
+                  </a:tcPr>
+                </a:tc>
+                <a:tc>
+                  <a:txBody>
+                    <a:bodyPr/>
+                    <a:lstStyle/>
+                    <a:p>
+                      <a:pPr algn="ctr">
+                        <a:defRPr sz="950">
+                          <a:solidFill>
+                            <a:srgbClr val="0F172A"/>
+                          </a:solidFill>
+                          <a:latin typeface="Segoe UI"/>
+                        </a:defRPr>
+                      </a:pPr>
+                      <a:r>
+                        <a:t>951</a:t>
+                      </a:r>
+                    </a:p>
+                  </a:txBody>
+                  <a:tcPr>
+                    <a:solidFill>
+                      <a:srgbClr val="F8FAFC"/>
+                    </a:solidFill>
+                  </a:tcPr>
+                </a:tc>
+                <a:tc>
+                  <a:txBody>
+                    <a:bodyPr/>
+                    <a:lstStyle/>
+                    <a:p>
+                      <a:pPr algn="ctr">
+                        <a:defRPr sz="950">
+                          <a:solidFill>
+                            <a:srgbClr val="0F172A"/>
+                          </a:solidFill>
+                          <a:latin typeface="Segoe UI"/>
+                        </a:defRPr>
+                      </a:pPr>
+                      <a:r>
+                        <a:t>3.65%</a:t>
+                      </a:r>
+                    </a:p>
+                  </a:txBody>
+                  <a:tcPr>
+                    <a:solidFill>
+                      <a:srgbClr val="F8FAFC"/>
                     </a:solidFill>
                   </a:tcPr>
                 </a:tc>
@@ -8533,19 +8765,165 @@
                       <a:pPr algn="ctr">
                         <a:defRPr sz="950" b="1">
                           <a:solidFill>
-                            <a:srgbClr val="FFFFFF"/>
-                          </a:solidFill>
-                          <a:latin typeface="Segoe UI"/>
-                        </a:defRPr>
-                      </a:pPr>
-                      <a:r>
-                        <a:t>ผ่านแล้ว</a:t>
-                      </a:r>
-                    </a:p>
-                  </a:txBody>
-                  <a:tcPr anchor="ctr">
-                    <a:solidFill>
-                      <a:srgbClr val="0F172A"/>
+                            <a:srgbClr val="F43F5E"/>
+                          </a:solidFill>
+                          <a:latin typeface="Segoe UI"/>
+                        </a:defRPr>
+                      </a:pPr>
+                      <a:r>
+                        <a:t>🔴 Critical</a:t>
+                      </a:r>
+                    </a:p>
+                  </a:txBody>
+                  <a:tcPr>
+                    <a:solidFill>
+                      <a:srgbClr val="F8FAFC"/>
+                    </a:solidFill>
+                  </a:tcPr>
+                </a:tc>
+              </a:tr>
+              <a:tr h="440574">
+                <a:tc>
+                  <a:txBody>
+                    <a:bodyPr/>
+                    <a:lstStyle/>
+                    <a:p>
+                      <a:pPr algn="l">
+                        <a:defRPr sz="950">
+                          <a:solidFill>
+                            <a:srgbClr val="0F172A"/>
+                          </a:solidFill>
+                          <a:latin typeface="Segoe UI"/>
+                        </a:defRPr>
+                      </a:pPr>
+                      <a:r>
+                        <a:t>3</a:t>
+                      </a:r>
+                    </a:p>
+                  </a:txBody>
+                  <a:tcPr>
+                    <a:solidFill>
+                      <a:srgbClr val="FFFFFF"/>
+                    </a:solidFill>
+                  </a:tcPr>
+                </a:tc>
+                <a:tc>
+                  <a:txBody>
+                    <a:bodyPr/>
+                    <a:lstStyle/>
+                    <a:p>
+                      <a:pPr algn="l">
+                        <a:defRPr sz="950">
+                          <a:solidFill>
+                            <a:srgbClr val="0F172A"/>
+                          </a:solidFill>
+                          <a:latin typeface="Segoe UI"/>
+                        </a:defRPr>
+                      </a:pPr>
+                      <a:r>
+                        <a:t>CMG (Central Marketing Group)</a:t>
+                      </a:r>
+                    </a:p>
+                  </a:txBody>
+                  <a:tcPr>
+                    <a:solidFill>
+                      <a:srgbClr val="FFFFFF"/>
+                    </a:solidFill>
+                  </a:tcPr>
+                </a:tc>
+                <a:tc>
+                  <a:txBody>
+                    <a:bodyPr/>
+                    <a:lstStyle/>
+                    <a:p>
+                      <a:pPr algn="ctr">
+                        <a:defRPr sz="950">
+                          <a:solidFill>
+                            <a:srgbClr val="0F172A"/>
+                          </a:solidFill>
+                          <a:latin typeface="Segoe UI"/>
+                        </a:defRPr>
+                      </a:pPr>
+                      <a:r>
+                        <a:t>518</a:t>
+                      </a:r>
+                    </a:p>
+                  </a:txBody>
+                  <a:tcPr>
+                    <a:solidFill>
+                      <a:srgbClr val="FFFFFF"/>
+                    </a:solidFill>
+                  </a:tcPr>
+                </a:tc>
+                <a:tc>
+                  <a:txBody>
+                    <a:bodyPr/>
+                    <a:lstStyle/>
+                    <a:p>
+                      <a:pPr algn="ctr">
+                        <a:defRPr sz="950">
+                          <a:solidFill>
+                            <a:srgbClr val="0F172A"/>
+                          </a:solidFill>
+                          <a:latin typeface="Segoe UI"/>
+                        </a:defRPr>
+                      </a:pPr>
+                      <a:r>
+                        <a:t>87</a:t>
+                      </a:r>
+                    </a:p>
+                  </a:txBody>
+                  <a:tcPr>
+                    <a:solidFill>
+                      <a:srgbClr val="FFFFFF"/>
+                    </a:solidFill>
+                  </a:tcPr>
+                </a:tc>
+                <a:tc>
+                  <a:txBody>
+                    <a:bodyPr/>
+                    <a:lstStyle/>
+                    <a:p>
+                      <a:pPr algn="ctr">
+                        <a:defRPr sz="950">
+                          <a:solidFill>
+                            <a:srgbClr val="0F172A"/>
+                          </a:solidFill>
+                          <a:latin typeface="Segoe UI"/>
+                        </a:defRPr>
+                      </a:pPr>
+                      <a:r>
+                        <a:t>431</a:t>
+                      </a:r>
+                    </a:p>
+                  </a:txBody>
+                  <a:tcPr>
+                    <a:solidFill>
+                      <a:srgbClr val="FFFFFF"/>
+                    </a:solidFill>
+                  </a:tcPr>
+                </a:tc>
+                <a:tc>
+                  <a:txBody>
+                    <a:bodyPr/>
+                    <a:lstStyle/>
+                    <a:p>
+                      <a:pPr algn="ctr">
+                        <a:defRPr sz="950">
+                          <a:solidFill>
+                            <a:srgbClr val="0F172A"/>
+                          </a:solidFill>
+                          <a:latin typeface="Segoe UI"/>
+                        </a:defRPr>
+                      </a:pPr>
+                      <a:r>
+                        <a:t>16.80%</a:t>
+                      </a:r>
+                    </a:p>
+                  </a:txBody>
+                  <a:tcPr>
+                    <a:solidFill>
+                      <a:srgbClr val="FFFFFF"/>
                     </a:solidFill>
                   </a:tcPr>
                 </a:tc>
@@ -8557,19 +8935,165 @@
                       <a:pPr algn="ctr">
                         <a:defRPr sz="950" b="1">
                           <a:solidFill>
-                            <a:srgbClr val="FFFFFF"/>
-                          </a:solidFill>
-                          <a:latin typeface="Segoe UI"/>
-                        </a:defRPr>
-                      </a:pPr>
-                      <a:r>
-                        <a:t>คงเหลือ</a:t>
-                      </a:r>
-                    </a:p>
-                  </a:txBody>
-                  <a:tcPr anchor="ctr">
-                    <a:solidFill>
-                      <a:srgbClr val="0F172A"/>
+                            <a:srgbClr val="F43F5E"/>
+                          </a:solidFill>
+                          <a:latin typeface="Segoe UI"/>
+                        </a:defRPr>
+                      </a:pPr>
+                      <a:r>
+                        <a:t>🔴 Critical</a:t>
+                      </a:r>
+                    </a:p>
+                  </a:txBody>
+                  <a:tcPr>
+                    <a:solidFill>
+                      <a:srgbClr val="FFFFFF"/>
+                    </a:solidFill>
+                  </a:tcPr>
+                </a:tc>
+              </a:tr>
+              <a:tr h="440574">
+                <a:tc>
+                  <a:txBody>
+                    <a:bodyPr/>
+                    <a:lstStyle/>
+                    <a:p>
+                      <a:pPr algn="l">
+                        <a:defRPr sz="950">
+                          <a:solidFill>
+                            <a:srgbClr val="0F172A"/>
+                          </a:solidFill>
+                          <a:latin typeface="Segoe UI"/>
+                        </a:defRPr>
+                      </a:pPr>
+                      <a:r>
+                        <a:t>4</a:t>
+                      </a:r>
+                    </a:p>
+                  </a:txBody>
+                  <a:tcPr>
+                    <a:solidFill>
+                      <a:srgbClr val="F8FAFC"/>
+                    </a:solidFill>
+                  </a:tcPr>
+                </a:tc>
+                <a:tc>
+                  <a:txBody>
+                    <a:bodyPr/>
+                    <a:lstStyle/>
+                    <a:p>
+                      <a:pPr algn="l">
+                        <a:defRPr sz="950">
+                          <a:solidFill>
+                            <a:srgbClr val="0F172A"/>
+                          </a:solidFill>
+                          <a:latin typeface="Segoe UI"/>
+                        </a:defRPr>
+                      </a:pPr>
+                      <a:r>
+                        <a:t>PWB (Power Buy)</a:t>
+                      </a:r>
+                    </a:p>
+                  </a:txBody>
+                  <a:tcPr>
+                    <a:solidFill>
+                      <a:srgbClr val="F8FAFC"/>
+                    </a:solidFill>
+                  </a:tcPr>
+                </a:tc>
+                <a:tc>
+                  <a:txBody>
+                    <a:bodyPr/>
+                    <a:lstStyle/>
+                    <a:p>
+                      <a:pPr algn="ctr">
+                        <a:defRPr sz="950">
+                          <a:solidFill>
+                            <a:srgbClr val="0F172A"/>
+                          </a:solidFill>
+                          <a:latin typeface="Segoe UI"/>
+                        </a:defRPr>
+                      </a:pPr>
+                      <a:r>
+                        <a:t>453</a:t>
+                      </a:r>
+                    </a:p>
+                  </a:txBody>
+                  <a:tcPr>
+                    <a:solidFill>
+                      <a:srgbClr val="F8FAFC"/>
+                    </a:solidFill>
+                  </a:tcPr>
+                </a:tc>
+                <a:tc>
+                  <a:txBody>
+                    <a:bodyPr/>
+                    <a:lstStyle/>
+                    <a:p>
+                      <a:pPr algn="ctr">
+                        <a:defRPr sz="950">
+                          <a:solidFill>
+                            <a:srgbClr val="0F172A"/>
+                          </a:solidFill>
+                          <a:latin typeface="Segoe UI"/>
+                        </a:defRPr>
+                      </a:pPr>
+                      <a:r>
+                        <a:t>44</a:t>
+                      </a:r>
+                    </a:p>
+                  </a:txBody>
+                  <a:tcPr>
+                    <a:solidFill>
+                      <a:srgbClr val="F8FAFC"/>
+                    </a:solidFill>
+                  </a:tcPr>
+                </a:tc>
+                <a:tc>
+                  <a:txBody>
+                    <a:bodyPr/>
+                    <a:lstStyle/>
+                    <a:p>
+                      <a:pPr algn="ctr">
+                        <a:defRPr sz="950">
+                          <a:solidFill>
+                            <a:srgbClr val="0F172A"/>
+                          </a:solidFill>
+                          <a:latin typeface="Segoe UI"/>
+                        </a:defRPr>
+                      </a:pPr>
+                      <a:r>
+                        <a:t>409</a:t>
+                      </a:r>
+                    </a:p>
+                  </a:txBody>
+                  <a:tcPr>
+                    <a:solidFill>
+                      <a:srgbClr val="F8FAFC"/>
+                    </a:solidFill>
+                  </a:tcPr>
+                </a:tc>
+                <a:tc>
+                  <a:txBody>
+                    <a:bodyPr/>
+                    <a:lstStyle/>
+                    <a:p>
+                      <a:pPr algn="ctr">
+                        <a:defRPr sz="950">
+                          <a:solidFill>
+                            <a:srgbClr val="0F172A"/>
+                          </a:solidFill>
+                          <a:latin typeface="Segoe UI"/>
+                        </a:defRPr>
+                      </a:pPr>
+                      <a:r>
+                        <a:t>9.71%</a:t>
+                      </a:r>
+                    </a:p>
+                  </a:txBody>
+                  <a:tcPr>
+                    <a:solidFill>
+                      <a:srgbClr val="F8FAFC"/>
                     </a:solidFill>
                   </a:tcPr>
                 </a:tc>
@@ -8581,19 +9105,165 @@
                       <a:pPr algn="ctr">
                         <a:defRPr sz="950" b="1">
                           <a:solidFill>
-                            <a:srgbClr val="FFFFFF"/>
-                          </a:solidFill>
-                          <a:latin typeface="Segoe UI"/>
-                        </a:defRPr>
-                      </a:pPr>
-                      <a:r>
-                        <a:t>อัตราสำเร็จ (%)</a:t>
-                      </a:r>
-                    </a:p>
-                  </a:txBody>
-                  <a:tcPr anchor="ctr">
-                    <a:solidFill>
-                      <a:srgbClr val="0F172A"/>
+                            <a:srgbClr val="F43F5E"/>
+                          </a:solidFill>
+                          <a:latin typeface="Segoe UI"/>
+                        </a:defRPr>
+                      </a:pPr>
+                      <a:r>
+                        <a:t>🔴 Critical</a:t>
+                      </a:r>
+                    </a:p>
+                  </a:txBody>
+                  <a:tcPr>
+                    <a:solidFill>
+                      <a:srgbClr val="F8FAFC"/>
+                    </a:solidFill>
+                  </a:tcPr>
+                </a:tc>
+              </a:tr>
+              <a:tr h="440574">
+                <a:tc>
+                  <a:txBody>
+                    <a:bodyPr/>
+                    <a:lstStyle/>
+                    <a:p>
+                      <a:pPr algn="l">
+                        <a:defRPr sz="950">
+                          <a:solidFill>
+                            <a:srgbClr val="0F172A"/>
+                          </a:solidFill>
+                          <a:latin typeface="Segoe UI"/>
+                        </a:defRPr>
+                      </a:pPr>
+                      <a:r>
+                        <a:t>5</a:t>
+                      </a:r>
+                    </a:p>
+                  </a:txBody>
+                  <a:tcPr>
+                    <a:solidFill>
+                      <a:srgbClr val="FFFFFF"/>
+                    </a:solidFill>
+                  </a:tcPr>
+                </a:tc>
+                <a:tc>
+                  <a:txBody>
+                    <a:bodyPr/>
+                    <a:lstStyle/>
+                    <a:p>
+                      <a:pPr algn="l">
+                        <a:defRPr sz="950">
+                          <a:solidFill>
+                            <a:srgbClr val="0F172A"/>
+                          </a:solidFill>
+                          <a:latin typeface="Segoe UI"/>
+                        </a:defRPr>
+                      </a:pPr>
+                      <a:r>
+                        <a:t>B2S</a:t>
+                      </a:r>
+                    </a:p>
+                  </a:txBody>
+                  <a:tcPr>
+                    <a:solidFill>
+                      <a:srgbClr val="FFFFFF"/>
+                    </a:solidFill>
+                  </a:tcPr>
+                </a:tc>
+                <a:tc>
+                  <a:txBody>
+                    <a:bodyPr/>
+                    <a:lstStyle/>
+                    <a:p>
+                      <a:pPr algn="ctr">
+                        <a:defRPr sz="950">
+                          <a:solidFill>
+                            <a:srgbClr val="0F172A"/>
+                          </a:solidFill>
+                          <a:latin typeface="Segoe UI"/>
+                        </a:defRPr>
+                      </a:pPr>
+                      <a:r>
+                        <a:t>221</a:t>
+                      </a:r>
+                    </a:p>
+                  </a:txBody>
+                  <a:tcPr>
+                    <a:solidFill>
+                      <a:srgbClr val="FFFFFF"/>
+                    </a:solidFill>
+                  </a:tcPr>
+                </a:tc>
+                <a:tc>
+                  <a:txBody>
+                    <a:bodyPr/>
+                    <a:lstStyle/>
+                    <a:p>
+                      <a:pPr algn="ctr">
+                        <a:defRPr sz="950">
+                          <a:solidFill>
+                            <a:srgbClr val="0F172A"/>
+                          </a:solidFill>
+                          <a:latin typeface="Segoe UI"/>
+                        </a:defRPr>
+                      </a:pPr>
+                      <a:r>
+                        <a:t>1</a:t>
+                      </a:r>
+                    </a:p>
+                  </a:txBody>
+                  <a:tcPr>
+                    <a:solidFill>
+                      <a:srgbClr val="FFFFFF"/>
+                    </a:solidFill>
+                  </a:tcPr>
+                </a:tc>
+                <a:tc>
+                  <a:txBody>
+                    <a:bodyPr/>
+                    <a:lstStyle/>
+                    <a:p>
+                      <a:pPr algn="ctr">
+                        <a:defRPr sz="950">
+                          <a:solidFill>
+                            <a:srgbClr val="0F172A"/>
+                          </a:solidFill>
+                          <a:latin typeface="Segoe UI"/>
+                        </a:defRPr>
+                      </a:pPr>
+                      <a:r>
+                        <a:t>220</a:t>
+                      </a:r>
+                    </a:p>
+                  </a:txBody>
+                  <a:tcPr>
+                    <a:solidFill>
+                      <a:srgbClr val="FFFFFF"/>
+                    </a:solidFill>
+                  </a:tcPr>
+                </a:tc>
+                <a:tc>
+                  <a:txBody>
+                    <a:bodyPr/>
+                    <a:lstStyle/>
+                    <a:p>
+                      <a:pPr algn="ctr">
+                        <a:defRPr sz="950">
+                          <a:solidFill>
+                            <a:srgbClr val="0F172A"/>
+                          </a:solidFill>
+                          <a:latin typeface="Segoe UI"/>
+                        </a:defRPr>
+                      </a:pPr>
+                      <a:r>
+                        <a:t>0.45%</a:t>
+                      </a:r>
+                    </a:p>
+                  </a:txBody>
+                  <a:tcPr>
+                    <a:solidFill>
+                      <a:srgbClr val="FFFFFF"/>
                     </a:solidFill>
                   </a:tcPr>
                 </a:tc>
@@ -8605,19 +9275,19 @@
                       <a:pPr algn="ctr">
                         <a:defRPr sz="950" b="1">
                           <a:solidFill>
-                            <a:srgbClr val="FFFFFF"/>
-                          </a:solidFill>
-                          <a:latin typeface="Segoe UI"/>
-                        </a:defRPr>
-                      </a:pPr>
-                      <a:r>
-                        <a:t>ระดับผลงาน</a:t>
-                      </a:r>
-                    </a:p>
-                  </a:txBody>
-                  <a:tcPr anchor="ctr">
-                    <a:solidFill>
-                      <a:srgbClr val="0F172A"/>
+                            <a:srgbClr val="F43F5E"/>
+                          </a:solidFill>
+                          <a:latin typeface="Segoe UI"/>
+                        </a:defRPr>
+                      </a:pPr>
+                      <a:r>
+                        <a:t>🔴 Critical</a:t>
+                      </a:r>
+                    </a:p>
+                  </a:txBody>
+                  <a:tcPr>
+                    <a:solidFill>
+                      <a:srgbClr val="FFFFFF"/>
                     </a:solidFill>
                   </a:tcPr>
                 </a:tc>
@@ -8629,7 +9299,7 @@
                     <a:lstStyle/>
                     <a:p>
                       <a:pPr algn="l">
-                        <a:defRPr sz="900" b="0">
+                        <a:defRPr sz="950">
                           <a:solidFill>
                             <a:srgbClr val="0F172A"/>
                           </a:solidFill>
@@ -8637,23 +9307,95 @@
                         </a:defRPr>
                       </a:pPr>
                       <a:r>
+                        <a:t>6</a:t>
+                      </a:r>
+                    </a:p>
+                  </a:txBody>
+                  <a:tcPr>
+                    <a:solidFill>
+                      <a:srgbClr val="F8FAFC"/>
+                    </a:solidFill>
+                  </a:tcPr>
+                </a:tc>
+                <a:tc>
+                  <a:txBody>
+                    <a:bodyPr/>
+                    <a:lstStyle/>
+                    <a:p>
+                      <a:pPr algn="l">
+                        <a:defRPr sz="950">
+                          <a:solidFill>
+                            <a:srgbClr val="0F172A"/>
+                          </a:solidFill>
+                          <a:latin typeface="Segoe UI"/>
+                        </a:defRPr>
+                      </a:pPr>
+                      <a:r>
+                        <a:t>OFM (OfficeMate)</a:t>
+                      </a:r>
+                    </a:p>
+                  </a:txBody>
+                  <a:tcPr>
+                    <a:solidFill>
+                      <a:srgbClr val="F8FAFC"/>
+                    </a:solidFill>
+                  </a:tcPr>
+                </a:tc>
+                <a:tc>
+                  <a:txBody>
+                    <a:bodyPr/>
+                    <a:lstStyle/>
+                    <a:p>
+                      <a:pPr algn="ctr">
+                        <a:defRPr sz="950">
+                          <a:solidFill>
+                            <a:srgbClr val="0F172A"/>
+                          </a:solidFill>
+                          <a:latin typeface="Segoe UI"/>
+                        </a:defRPr>
+                      </a:pPr>
+                      <a:r>
+                        <a:t>200</a:t>
+                      </a:r>
+                    </a:p>
+                  </a:txBody>
+                  <a:tcPr>
+                    <a:solidFill>
+                      <a:srgbClr val="F8FAFC"/>
+                    </a:solidFill>
+                  </a:tcPr>
+                </a:tc>
+                <a:tc>
+                  <a:txBody>
+                    <a:bodyPr/>
+                    <a:lstStyle/>
+                    <a:p>
+                      <a:pPr algn="ctr">
+                        <a:defRPr sz="950">
+                          <a:solidFill>
+                            <a:srgbClr val="0F172A"/>
+                          </a:solidFill>
+                          <a:latin typeface="Segoe UI"/>
+                        </a:defRPr>
+                      </a:pPr>
+                      <a:r>
                         <a:t>1</a:t>
                       </a:r>
                     </a:p>
                   </a:txBody>
-                  <a:tcPr anchor="ctr">
-                    <a:solidFill>
-                      <a:srgbClr val="FFFFFF"/>
-                    </a:solidFill>
-                  </a:tcPr>
-                </a:tc>
-                <a:tc>
-                  <a:txBody>
-                    <a:bodyPr/>
-                    <a:lstStyle/>
-                    <a:p>
-                      <a:pPr algn="l">
-                        <a:defRPr sz="900" b="0">
+                  <a:tcPr>
+                    <a:solidFill>
+                      <a:srgbClr val="F8FAFC"/>
+                    </a:solidFill>
+                  </a:tcPr>
+                </a:tc>
+                <a:tc>
+                  <a:txBody>
+                    <a:bodyPr/>
+                    <a:lstStyle/>
+                    <a:p>
+                      <a:pPr algn="ctr">
+                        <a:defRPr sz="950">
                           <a:solidFill>
                             <a:srgbClr val="0F172A"/>
                           </a:solidFill>
@@ -8661,13 +9403,13 @@
                         </a:defRPr>
                       </a:pPr>
                       <a:r>
-                        <a:t>CFR (Central Food Retail)</a:t>
-                      </a:r>
-                    </a:p>
-                  </a:txBody>
-                  <a:tcPr anchor="ctr">
-                    <a:solidFill>
-                      <a:srgbClr val="FFFFFF"/>
+                        <a:t>199</a:t>
+                      </a:r>
+                    </a:p>
+                  </a:txBody>
+                  <a:tcPr>
+                    <a:solidFill>
+                      <a:srgbClr val="F8FAFC"/>
                     </a:solidFill>
                   </a:tcPr>
                 </a:tc>
@@ -8677,7 +9419,7 @@
                     <a:lstStyle/>
                     <a:p>
                       <a:pPr algn="ctr">
-                        <a:defRPr sz="900" b="0">
+                        <a:defRPr sz="950">
                           <a:solidFill>
                             <a:srgbClr val="0F172A"/>
                           </a:solidFill>
@@ -8685,13 +9427,13 @@
                         </a:defRPr>
                       </a:pPr>
                       <a:r>
-                        <a:t>214</a:t>
-                      </a:r>
-                    </a:p>
-                  </a:txBody>
-                  <a:tcPr anchor="ctr">
-                    <a:solidFill>
-                      <a:srgbClr val="FFFFFF"/>
+                        <a:t>0.50%</a:t>
+                      </a:r>
+                    </a:p>
+                  </a:txBody>
+                  <a:tcPr>
+                    <a:solidFill>
+                      <a:srgbClr val="F8FAFC"/>
                     </a:solidFill>
                   </a:tcPr>
                 </a:tc>
@@ -8701,81 +9443,9 @@
                     <a:lstStyle/>
                     <a:p>
                       <a:pPr algn="ctr">
-                        <a:defRPr sz="900" b="0">
-                          <a:solidFill>
-                            <a:srgbClr val="0F172A"/>
-                          </a:solidFill>
-                          <a:latin typeface="Segoe UI"/>
-                        </a:defRPr>
-                      </a:pPr>
-                      <a:r>
-                        <a:t>14</a:t>
-                      </a:r>
-                    </a:p>
-                  </a:txBody>
-                  <a:tcPr anchor="ctr">
-                    <a:solidFill>
-                      <a:srgbClr val="FFFFFF"/>
-                    </a:solidFill>
-                  </a:tcPr>
-                </a:tc>
-                <a:tc>
-                  <a:txBody>
-                    <a:bodyPr/>
-                    <a:lstStyle/>
-                    <a:p>
-                      <a:pPr algn="ctr">
-                        <a:defRPr sz="900" b="0">
-                          <a:solidFill>
-                            <a:srgbClr val="0F172A"/>
-                          </a:solidFill>
-                          <a:latin typeface="Segoe UI"/>
-                        </a:defRPr>
-                      </a:pPr>
-                      <a:r>
-                        <a:t>200</a:t>
-                      </a:r>
-                    </a:p>
-                  </a:txBody>
-                  <a:tcPr anchor="ctr">
-                    <a:solidFill>
-                      <a:srgbClr val="FFFFFF"/>
-                    </a:solidFill>
-                  </a:tcPr>
-                </a:tc>
-                <a:tc>
-                  <a:txBody>
-                    <a:bodyPr/>
-                    <a:lstStyle/>
-                    <a:p>
-                      <a:pPr algn="ctr">
-                        <a:defRPr sz="900" b="0">
-                          <a:solidFill>
-                            <a:srgbClr val="0F172A"/>
-                          </a:solidFill>
-                          <a:latin typeface="Segoe UI"/>
-                        </a:defRPr>
-                      </a:pPr>
-                      <a:r>
-                        <a:t>6.54%</a:t>
-                      </a:r>
-                    </a:p>
-                  </a:txBody>
-                  <a:tcPr anchor="ctr">
-                    <a:solidFill>
-                      <a:srgbClr val="FFFFFF"/>
-                    </a:solidFill>
-                  </a:tcPr>
-                </a:tc>
-                <a:tc>
-                  <a:txBody>
-                    <a:bodyPr/>
-                    <a:lstStyle/>
-                    <a:p>
-                      <a:pPr algn="ctr">
-                        <a:defRPr sz="900" b="1">
-                          <a:solidFill>
-                            <a:srgbClr val="E11D48"/>
+                        <a:defRPr sz="950" b="1">
+                          <a:solidFill>
+                            <a:srgbClr val="F43F5E"/>
                           </a:solidFill>
                           <a:latin typeface="Segoe UI"/>
                         </a:defRPr>
@@ -8785,9 +9455,9 @@
                       </a:r>
                     </a:p>
                   </a:txBody>
-                  <a:tcPr anchor="ctr">
-                    <a:solidFill>
-                      <a:srgbClr val="FFFFFF"/>
+                  <a:tcPr>
+                    <a:solidFill>
+                      <a:srgbClr val="F8FAFC"/>
                     </a:solidFill>
                   </a:tcPr>
                 </a:tc>
@@ -8799,7 +9469,7 @@
                     <a:lstStyle/>
                     <a:p>
                       <a:pPr algn="l">
-                        <a:defRPr sz="900" b="0">
+                        <a:defRPr sz="950">
                           <a:solidFill>
                             <a:srgbClr val="0F172A"/>
                           </a:solidFill>
@@ -8807,13 +9477,13 @@
                         </a:defRPr>
                       </a:pPr>
                       <a:r>
-                        <a:t>2</a:t>
-                      </a:r>
-                    </a:p>
-                  </a:txBody>
-                  <a:tcPr anchor="ctr">
-                    <a:solidFill>
-                      <a:srgbClr val="F8FAFC"/>
+                        <a:t>7</a:t>
+                      </a:r>
+                    </a:p>
+                  </a:txBody>
+                  <a:tcPr>
+                    <a:solidFill>
+                      <a:srgbClr val="FFFFFF"/>
                     </a:solidFill>
                   </a:tcPr>
                 </a:tc>
@@ -8823,7 +9493,7 @@
                     <a:lstStyle/>
                     <a:p>
                       <a:pPr algn="l">
-                        <a:defRPr sz="900" b="0">
+                        <a:defRPr sz="950">
                           <a:solidFill>
                             <a:srgbClr val="0F172A"/>
                           </a:solidFill>
@@ -8831,13 +9501,13 @@
                         </a:defRPr>
                       </a:pPr>
                       <a:r>
-                        <a:t>CDG (Central Department Store)</a:t>
-                      </a:r>
-                    </a:p>
-                  </a:txBody>
-                  <a:tcPr anchor="ctr">
-                    <a:solidFill>
-                      <a:srgbClr val="F8FAFC"/>
+                        <a:t>CRP (Central Retail Corp)</a:t>
+                      </a:r>
+                    </a:p>
+                  </a:txBody>
+                  <a:tcPr>
+                    <a:solidFill>
+                      <a:srgbClr val="FFFFFF"/>
                     </a:solidFill>
                   </a:tcPr>
                 </a:tc>
@@ -8847,7 +9517,7 @@
                     <a:lstStyle/>
                     <a:p>
                       <a:pPr algn="ctr">
-                        <a:defRPr sz="900" b="0">
+                        <a:defRPr sz="950">
                           <a:solidFill>
                             <a:srgbClr val="0F172A"/>
                           </a:solidFill>
@@ -8855,13 +9525,13 @@
                         </a:defRPr>
                       </a:pPr>
                       <a:r>
-                        <a:t>199</a:t>
-                      </a:r>
-                    </a:p>
-                  </a:txBody>
-                  <a:tcPr anchor="ctr">
-                    <a:solidFill>
-                      <a:srgbClr val="F8FAFC"/>
+                        <a:t>188</a:t>
+                      </a:r>
+                    </a:p>
+                  </a:txBody>
+                  <a:tcPr>
+                    <a:solidFill>
+                      <a:srgbClr val="FFFFFF"/>
                     </a:solidFill>
                   </a:tcPr>
                 </a:tc>
@@ -8871,7 +9541,7 @@
                     <a:lstStyle/>
                     <a:p>
                       <a:pPr algn="ctr">
-                        <a:defRPr sz="900" b="0">
+                        <a:defRPr sz="950">
                           <a:solidFill>
                             <a:srgbClr val="0F172A"/>
                           </a:solidFill>
@@ -8879,13 +9549,13 @@
                         </a:defRPr>
                       </a:pPr>
                       <a:r>
-                        <a:t>48</a:t>
-                      </a:r>
-                    </a:p>
-                  </a:txBody>
-                  <a:tcPr anchor="ctr">
-                    <a:solidFill>
-                      <a:srgbClr val="F8FAFC"/>
+                        <a:t>13</a:t>
+                      </a:r>
+                    </a:p>
+                  </a:txBody>
+                  <a:tcPr>
+                    <a:solidFill>
+                      <a:srgbClr val="FFFFFF"/>
                     </a:solidFill>
                   </a:tcPr>
                 </a:tc>
@@ -8895,7 +9565,7 @@
                     <a:lstStyle/>
                     <a:p>
                       <a:pPr algn="ctr">
-                        <a:defRPr sz="900" b="0">
+                        <a:defRPr sz="950">
                           <a:solidFill>
                             <a:srgbClr val="0F172A"/>
                           </a:solidFill>
@@ -8903,13 +9573,13 @@
                         </a:defRPr>
                       </a:pPr>
                       <a:r>
-                        <a:t>151</a:t>
-                      </a:r>
-                    </a:p>
-                  </a:txBody>
-                  <a:tcPr anchor="ctr">
-                    <a:solidFill>
-                      <a:srgbClr val="F8FAFC"/>
+                        <a:t>175</a:t>
+                      </a:r>
+                    </a:p>
+                  </a:txBody>
+                  <a:tcPr>
+                    <a:solidFill>
+                      <a:srgbClr val="FFFFFF"/>
                     </a:solidFill>
                   </a:tcPr>
                 </a:tc>
@@ -8919,7 +9589,7 @@
                     <a:lstStyle/>
                     <a:p>
                       <a:pPr algn="ctr">
-                        <a:defRPr sz="900" b="0">
+                        <a:defRPr sz="950">
                           <a:solidFill>
                             <a:srgbClr val="0F172A"/>
                           </a:solidFill>
@@ -8927,13 +9597,13 @@
                         </a:defRPr>
                       </a:pPr>
                       <a:r>
-                        <a:t>24.12%</a:t>
-                      </a:r>
-                    </a:p>
-                  </a:txBody>
-                  <a:tcPr anchor="ctr">
-                    <a:solidFill>
-                      <a:srgbClr val="F8FAFC"/>
+                        <a:t>6.91%</a:t>
+                      </a:r>
+                    </a:p>
+                  </a:txBody>
+                  <a:tcPr>
+                    <a:solidFill>
+                      <a:srgbClr val="FFFFFF"/>
                     </a:solidFill>
                   </a:tcPr>
                 </a:tc>
@@ -8943,9 +9613,9 @@
                     <a:lstStyle/>
                     <a:p>
                       <a:pPr algn="ctr">
-                        <a:defRPr sz="900" b="1">
-                          <a:solidFill>
-                            <a:srgbClr val="E11D48"/>
+                        <a:defRPr sz="950" b="1">
+                          <a:solidFill>
+                            <a:srgbClr val="F43F5E"/>
                           </a:solidFill>
                           <a:latin typeface="Segoe UI"/>
                         </a:defRPr>
@@ -8955,9 +9625,9 @@
                       </a:r>
                     </a:p>
                   </a:txBody>
-                  <a:tcPr anchor="ctr">
-                    <a:solidFill>
-                      <a:srgbClr val="F8FAFC"/>
+                  <a:tcPr>
+                    <a:solidFill>
+                      <a:srgbClr val="FFFFFF"/>
                     </a:solidFill>
                   </a:tcPr>
                 </a:tc>
@@ -8969,7 +9639,7 @@
                     <a:lstStyle/>
                     <a:p>
                       <a:pPr algn="l">
-                        <a:defRPr sz="900" b="0">
+                        <a:defRPr sz="950">
                           <a:solidFill>
                             <a:srgbClr val="0F172A"/>
                           </a:solidFill>
@@ -8977,13 +9647,13 @@
                         </a:defRPr>
                       </a:pPr>
                       <a:r>
-                        <a:t>3</a:t>
-                      </a:r>
-                    </a:p>
-                  </a:txBody>
-                  <a:tcPr anchor="ctr">
-                    <a:solidFill>
-                      <a:srgbClr val="FFFFFF"/>
+                        <a:t>8</a:t>
+                      </a:r>
+                    </a:p>
+                  </a:txBody>
+                  <a:tcPr>
+                    <a:solidFill>
+                      <a:srgbClr val="F8FAFC"/>
                     </a:solidFill>
                   </a:tcPr>
                 </a:tc>
@@ -8993,7 +9663,7 @@
                     <a:lstStyle/>
                     <a:p>
                       <a:pPr algn="l">
-                        <a:defRPr sz="900" b="0">
+                        <a:defRPr sz="950">
                           <a:solidFill>
                             <a:srgbClr val="0F172A"/>
                           </a:solidFill>
@@ -9001,13 +9671,13 @@
                         </a:defRPr>
                       </a:pPr>
                       <a:r>
-                        <a:t>Unknown / Unassigned</a:t>
-                      </a:r>
-                    </a:p>
-                  </a:txBody>
-                  <a:tcPr anchor="ctr">
-                    <a:solidFill>
-                      <a:srgbClr val="FFFFFF"/>
+                        <a:t>SSP (SuperSports)</a:t>
+                      </a:r>
+                    </a:p>
+                  </a:txBody>
+                  <a:tcPr>
+                    <a:solidFill>
+                      <a:srgbClr val="F8FAFC"/>
                     </a:solidFill>
                   </a:tcPr>
                 </a:tc>
@@ -9017,7 +9687,7 @@
                     <a:lstStyle/>
                     <a:p>
                       <a:pPr algn="ctr">
-                        <a:defRPr sz="900" b="0">
+                        <a:defRPr sz="950">
                           <a:solidFill>
                             <a:srgbClr val="0F172A"/>
                           </a:solidFill>
@@ -9025,13 +9695,13 @@
                         </a:defRPr>
                       </a:pPr>
                       <a:r>
-                        <a:t>126</a:t>
-                      </a:r>
-                    </a:p>
-                  </a:txBody>
-                  <a:tcPr anchor="ctr">
-                    <a:solidFill>
-                      <a:srgbClr val="FFFFFF"/>
+                        <a:t>157</a:t>
+                      </a:r>
+                    </a:p>
+                  </a:txBody>
+                  <a:tcPr>
+                    <a:solidFill>
+                      <a:srgbClr val="F8FAFC"/>
                     </a:solidFill>
                   </a:tcPr>
                 </a:tc>
@@ -9041,7 +9711,7 @@
                     <a:lstStyle/>
                     <a:p>
                       <a:pPr algn="ctr">
-                        <a:defRPr sz="900" b="0">
+                        <a:defRPr sz="950">
                           <a:solidFill>
                             <a:srgbClr val="0F172A"/>
                           </a:solidFill>
@@ -9049,13 +9719,13 @@
                         </a:defRPr>
                       </a:pPr>
                       <a:r>
-                        <a:t>22</a:t>
-                      </a:r>
-                    </a:p>
-                  </a:txBody>
-                  <a:tcPr anchor="ctr">
-                    <a:solidFill>
-                      <a:srgbClr val="FFFFFF"/>
+                        <a:t>16</a:t>
+                      </a:r>
+                    </a:p>
+                  </a:txBody>
+                  <a:tcPr>
+                    <a:solidFill>
+                      <a:srgbClr val="F8FAFC"/>
                     </a:solidFill>
                   </a:tcPr>
                 </a:tc>
@@ -9065,7 +9735,7 @@
                     <a:lstStyle/>
                     <a:p>
                       <a:pPr algn="ctr">
-                        <a:defRPr sz="900" b="0">
+                        <a:defRPr sz="950">
                           <a:solidFill>
                             <a:srgbClr val="0F172A"/>
                           </a:solidFill>
@@ -9073,13 +9743,13 @@
                         </a:defRPr>
                       </a:pPr>
                       <a:r>
-                        <a:t>104</a:t>
-                      </a:r>
-                    </a:p>
-                  </a:txBody>
-                  <a:tcPr anchor="ctr">
-                    <a:solidFill>
-                      <a:srgbClr val="FFFFFF"/>
+                        <a:t>141</a:t>
+                      </a:r>
+                    </a:p>
+                  </a:txBody>
+                  <a:tcPr>
+                    <a:solidFill>
+                      <a:srgbClr val="F8FAFC"/>
                     </a:solidFill>
                   </a:tcPr>
                 </a:tc>
@@ -9089,7 +9759,7 @@
                     <a:lstStyle/>
                     <a:p>
                       <a:pPr algn="ctr">
-                        <a:defRPr sz="900" b="0">
+                        <a:defRPr sz="950">
                           <a:solidFill>
                             <a:srgbClr val="0F172A"/>
                           </a:solidFill>
@@ -9097,13 +9767,13 @@
                         </a:defRPr>
                       </a:pPr>
                       <a:r>
-                        <a:t>17.46%</a:t>
-                      </a:r>
-                    </a:p>
-                  </a:txBody>
-                  <a:tcPr anchor="ctr">
-                    <a:solidFill>
-                      <a:srgbClr val="FFFFFF"/>
+                        <a:t>10.19%</a:t>
+                      </a:r>
+                    </a:p>
+                  </a:txBody>
+                  <a:tcPr>
+                    <a:solidFill>
+                      <a:srgbClr val="F8FAFC"/>
                     </a:solidFill>
                   </a:tcPr>
                 </a:tc>
@@ -9113,9 +9783,9 @@
                     <a:lstStyle/>
                     <a:p>
                       <a:pPr algn="ctr">
-                        <a:defRPr sz="900" b="1">
-                          <a:solidFill>
-                            <a:srgbClr val="E11D48"/>
+                        <a:defRPr sz="950" b="1">
+                          <a:solidFill>
+                            <a:srgbClr val="F43F5E"/>
                           </a:solidFill>
                           <a:latin typeface="Segoe UI"/>
                         </a:defRPr>
@@ -9125,9 +9795,9 @@
                       </a:r>
                     </a:p>
                   </a:txBody>
-                  <a:tcPr anchor="ctr">
-                    <a:solidFill>
-                      <a:srgbClr val="FFFFFF"/>
+                  <a:tcPr>
+                    <a:solidFill>
+                      <a:srgbClr val="F8FAFC"/>
                     </a:solidFill>
                   </a:tcPr>
                 </a:tc>
@@ -9139,7 +9809,7 @@
                     <a:lstStyle/>
                     <a:p>
                       <a:pPr algn="l">
-                        <a:defRPr sz="900" b="0">
+                        <a:defRPr sz="950">
                           <a:solidFill>
                             <a:srgbClr val="0F172A"/>
                           </a:solidFill>
@@ -9147,13 +9817,13 @@
                         </a:defRPr>
                       </a:pPr>
                       <a:r>
-                        <a:t>4</a:t>
-                      </a:r>
-                    </a:p>
-                  </a:txBody>
-                  <a:tcPr anchor="ctr">
-                    <a:solidFill>
-                      <a:srgbClr val="F8FAFC"/>
+                        <a:t>9</a:t>
+                      </a:r>
+                    </a:p>
+                  </a:txBody>
+                  <a:tcPr>
+                    <a:solidFill>
+                      <a:srgbClr val="FFFFFF"/>
                     </a:solidFill>
                   </a:tcPr>
                 </a:tc>
@@ -9163,7 +9833,7 @@
                     <a:lstStyle/>
                     <a:p>
                       <a:pPr algn="l">
-                        <a:defRPr sz="900" b="0">
+                        <a:defRPr sz="950">
                           <a:solidFill>
                             <a:srgbClr val="0F172A"/>
                           </a:solidFill>
@@ -9171,13 +9841,13 @@
                         </a:defRPr>
                       </a:pPr>
                       <a:r>
-                        <a:t>CMG (Central Marketing Group)</a:t>
-                      </a:r>
-                    </a:p>
-                  </a:txBody>
-                  <a:tcPr anchor="ctr">
-                    <a:solidFill>
-                      <a:srgbClr val="F8FAFC"/>
+                        <a:t>RIS (Retail Information Systems)</a:t>
+                      </a:r>
+                    </a:p>
+                  </a:txBody>
+                  <a:tcPr>
+                    <a:solidFill>
+                      <a:srgbClr val="FFFFFF"/>
                     </a:solidFill>
                   </a:tcPr>
                 </a:tc>
@@ -9187,7 +9857,7 @@
                     <a:lstStyle/>
                     <a:p>
                       <a:pPr algn="ctr">
-                        <a:defRPr sz="900" b="0">
+                        <a:defRPr sz="950">
                           <a:solidFill>
                             <a:srgbClr val="0F172A"/>
                           </a:solidFill>
@@ -9195,13 +9865,13 @@
                         </a:defRPr>
                       </a:pPr>
                       <a:r>
-                        <a:t>97</a:t>
-                      </a:r>
-                    </a:p>
-                  </a:txBody>
-                  <a:tcPr anchor="ctr">
-                    <a:solidFill>
-                      <a:srgbClr val="F8FAFC"/>
+                        <a:t>146</a:t>
+                      </a:r>
+                    </a:p>
+                  </a:txBody>
+                  <a:tcPr>
+                    <a:solidFill>
+                      <a:srgbClr val="FFFFFF"/>
                     </a:solidFill>
                   </a:tcPr>
                 </a:tc>
@@ -9211,7 +9881,7 @@
                     <a:lstStyle/>
                     <a:p>
                       <a:pPr algn="ctr">
-                        <a:defRPr sz="900" b="0">
+                        <a:defRPr sz="950">
                           <a:solidFill>
                             <a:srgbClr val="0F172A"/>
                           </a:solidFill>
@@ -9219,13 +9889,13 @@
                         </a:defRPr>
                       </a:pPr>
                       <a:r>
-                        <a:t>46</a:t>
-                      </a:r>
-                    </a:p>
-                  </a:txBody>
-                  <a:tcPr anchor="ctr">
-                    <a:solidFill>
-                      <a:srgbClr val="F8FAFC"/>
+                        <a:t>5</a:t>
+                      </a:r>
+                    </a:p>
+                  </a:txBody>
+                  <a:tcPr>
+                    <a:solidFill>
+                      <a:srgbClr val="FFFFFF"/>
                     </a:solidFill>
                   </a:tcPr>
                 </a:tc>
@@ -9235,7 +9905,7 @@
                     <a:lstStyle/>
                     <a:p>
                       <a:pPr algn="ctr">
-                        <a:defRPr sz="900" b="0">
+                        <a:defRPr sz="950">
                           <a:solidFill>
                             <a:srgbClr val="0F172A"/>
                           </a:solidFill>
@@ -9243,13 +9913,13 @@
                         </a:defRPr>
                       </a:pPr>
                       <a:r>
-                        <a:t>51</a:t>
-                      </a:r>
-                    </a:p>
-                  </a:txBody>
-                  <a:tcPr anchor="ctr">
-                    <a:solidFill>
-                      <a:srgbClr val="F8FAFC"/>
+                        <a:t>141</a:t>
+                      </a:r>
+                    </a:p>
+                  </a:txBody>
+                  <a:tcPr>
+                    <a:solidFill>
+                      <a:srgbClr val="FFFFFF"/>
                     </a:solidFill>
                   </a:tcPr>
                 </a:tc>
@@ -9259,7 +9929,7 @@
                     <a:lstStyle/>
                     <a:p>
                       <a:pPr algn="ctr">
-                        <a:defRPr sz="900" b="0">
+                        <a:defRPr sz="950">
                           <a:solidFill>
                             <a:srgbClr val="0F172A"/>
                           </a:solidFill>
@@ -9267,13 +9937,13 @@
                         </a:defRPr>
                       </a:pPr>
                       <a:r>
-                        <a:t>47.42%</a:t>
-                      </a:r>
-                    </a:p>
-                  </a:txBody>
-                  <a:tcPr anchor="ctr">
-                    <a:solidFill>
-                      <a:srgbClr val="F8FAFC"/>
+                        <a:t>3.42%</a:t>
+                      </a:r>
+                    </a:p>
+                  </a:txBody>
+                  <a:tcPr>
+                    <a:solidFill>
+                      <a:srgbClr val="FFFFFF"/>
                     </a:solidFill>
                   </a:tcPr>
                 </a:tc>
@@ -9283,179 +9953,9 @@
                     <a:lstStyle/>
                     <a:p>
                       <a:pPr algn="ctr">
-                        <a:defRPr sz="900" b="1">
-                          <a:solidFill>
-                            <a:srgbClr val="D97706"/>
-                          </a:solidFill>
-                          <a:latin typeface="Segoe UI"/>
-                        </a:defRPr>
-                      </a:pPr>
-                      <a:r>
-                        <a:t>🟡 Warning</a:t>
-                      </a:r>
-                    </a:p>
-                  </a:txBody>
-                  <a:tcPr anchor="ctr">
-                    <a:solidFill>
-                      <a:srgbClr val="F8FAFC"/>
-                    </a:solidFill>
-                  </a:tcPr>
-                </a:tc>
-              </a:tr>
-              <a:tr h="440574">
-                <a:tc>
-                  <a:txBody>
-                    <a:bodyPr/>
-                    <a:lstStyle/>
-                    <a:p>
-                      <a:pPr algn="l">
-                        <a:defRPr sz="900" b="0">
-                          <a:solidFill>
-                            <a:srgbClr val="0F172A"/>
-                          </a:solidFill>
-                          <a:latin typeface="Segoe UI"/>
-                        </a:defRPr>
-                      </a:pPr>
-                      <a:r>
-                        <a:t>5</a:t>
-                      </a:r>
-                    </a:p>
-                  </a:txBody>
-                  <a:tcPr anchor="ctr">
-                    <a:solidFill>
-                      <a:srgbClr val="FFFFFF"/>
-                    </a:solidFill>
-                  </a:tcPr>
-                </a:tc>
-                <a:tc>
-                  <a:txBody>
-                    <a:bodyPr/>
-                    <a:lstStyle/>
-                    <a:p>
-                      <a:pPr algn="l">
-                        <a:defRPr sz="900" b="0">
-                          <a:solidFill>
-                            <a:srgbClr val="0F172A"/>
-                          </a:solidFill>
-                          <a:latin typeface="Segoe UI"/>
-                        </a:defRPr>
-                      </a:pPr>
-                      <a:r>
-                        <a:t>PWB (Power Buy)</a:t>
-                      </a:r>
-                    </a:p>
-                  </a:txBody>
-                  <a:tcPr anchor="ctr">
-                    <a:solidFill>
-                      <a:srgbClr val="FFFFFF"/>
-                    </a:solidFill>
-                  </a:tcPr>
-                </a:tc>
-                <a:tc>
-                  <a:txBody>
-                    <a:bodyPr/>
-                    <a:lstStyle/>
-                    <a:p>
-                      <a:pPr algn="ctr">
-                        <a:defRPr sz="900" b="0">
-                          <a:solidFill>
-                            <a:srgbClr val="0F172A"/>
-                          </a:solidFill>
-                          <a:latin typeface="Segoe UI"/>
-                        </a:defRPr>
-                      </a:pPr>
-                      <a:r>
-                        <a:t>64</a:t>
-                      </a:r>
-                    </a:p>
-                  </a:txBody>
-                  <a:tcPr anchor="ctr">
-                    <a:solidFill>
-                      <a:srgbClr val="FFFFFF"/>
-                    </a:solidFill>
-                  </a:tcPr>
-                </a:tc>
-                <a:tc>
-                  <a:txBody>
-                    <a:bodyPr/>
-                    <a:lstStyle/>
-                    <a:p>
-                      <a:pPr algn="ctr">
-                        <a:defRPr sz="900" b="0">
-                          <a:solidFill>
-                            <a:srgbClr val="0F172A"/>
-                          </a:solidFill>
-                          <a:latin typeface="Segoe UI"/>
-                        </a:defRPr>
-                      </a:pPr>
-                      <a:r>
-                        <a:t>24</a:t>
-                      </a:r>
-                    </a:p>
-                  </a:txBody>
-                  <a:tcPr anchor="ctr">
-                    <a:solidFill>
-                      <a:srgbClr val="FFFFFF"/>
-                    </a:solidFill>
-                  </a:tcPr>
-                </a:tc>
-                <a:tc>
-                  <a:txBody>
-                    <a:bodyPr/>
-                    <a:lstStyle/>
-                    <a:p>
-                      <a:pPr algn="ctr">
-                        <a:defRPr sz="900" b="0">
-                          <a:solidFill>
-                            <a:srgbClr val="0F172A"/>
-                          </a:solidFill>
-                          <a:latin typeface="Segoe UI"/>
-                        </a:defRPr>
-                      </a:pPr>
-                      <a:r>
-                        <a:t>40</a:t>
-                      </a:r>
-                    </a:p>
-                  </a:txBody>
-                  <a:tcPr anchor="ctr">
-                    <a:solidFill>
-                      <a:srgbClr val="FFFFFF"/>
-                    </a:solidFill>
-                  </a:tcPr>
-                </a:tc>
-                <a:tc>
-                  <a:txBody>
-                    <a:bodyPr/>
-                    <a:lstStyle/>
-                    <a:p>
-                      <a:pPr algn="ctr">
-                        <a:defRPr sz="900" b="0">
-                          <a:solidFill>
-                            <a:srgbClr val="0F172A"/>
-                          </a:solidFill>
-                          <a:latin typeface="Segoe UI"/>
-                        </a:defRPr>
-                      </a:pPr>
-                      <a:r>
-                        <a:t>37.50%</a:t>
-                      </a:r>
-                    </a:p>
-                  </a:txBody>
-                  <a:tcPr anchor="ctr">
-                    <a:solidFill>
-                      <a:srgbClr val="FFFFFF"/>
-                    </a:solidFill>
-                  </a:tcPr>
-                </a:tc>
-                <a:tc>
-                  <a:txBody>
-                    <a:bodyPr/>
-                    <a:lstStyle/>
-                    <a:p>
-                      <a:pPr algn="ctr">
-                        <a:defRPr sz="900" b="1">
-                          <a:solidFill>
-                            <a:srgbClr val="E11D48"/>
+                        <a:defRPr sz="950" b="1">
+                          <a:solidFill>
+                            <a:srgbClr val="F43F5E"/>
                           </a:solidFill>
                           <a:latin typeface="Segoe UI"/>
                         </a:defRPr>
@@ -9465,687 +9965,7 @@
                       </a:r>
                     </a:p>
                   </a:txBody>
-                  <a:tcPr anchor="ctr">
-                    <a:solidFill>
-                      <a:srgbClr val="FFFFFF"/>
-                    </a:solidFill>
-                  </a:tcPr>
-                </a:tc>
-              </a:tr>
-              <a:tr h="440574">
-                <a:tc>
-                  <a:txBody>
-                    <a:bodyPr/>
-                    <a:lstStyle/>
-                    <a:p>
-                      <a:pPr algn="l">
-                        <a:defRPr sz="900" b="0">
-                          <a:solidFill>
-                            <a:srgbClr val="0F172A"/>
-                          </a:solidFill>
-                          <a:latin typeface="Segoe UI"/>
-                        </a:defRPr>
-                      </a:pPr>
-                      <a:r>
-                        <a:t>6</a:t>
-                      </a:r>
-                    </a:p>
-                  </a:txBody>
-                  <a:tcPr anchor="ctr">
-                    <a:solidFill>
-                      <a:srgbClr val="F8FAFC"/>
-                    </a:solidFill>
-                  </a:tcPr>
-                </a:tc>
-                <a:tc>
-                  <a:txBody>
-                    <a:bodyPr/>
-                    <a:lstStyle/>
-                    <a:p>
-                      <a:pPr algn="l">
-                        <a:defRPr sz="900" b="0">
-                          <a:solidFill>
-                            <a:srgbClr val="0F172A"/>
-                          </a:solidFill>
-                          <a:latin typeface="Segoe UI"/>
-                        </a:defRPr>
-                      </a:pPr>
-                      <a:r>
-                        <a:t>SSP (SuperSports)</a:t>
-                      </a:r>
-                    </a:p>
-                  </a:txBody>
-                  <a:tcPr anchor="ctr">
-                    <a:solidFill>
-                      <a:srgbClr val="F8FAFC"/>
-                    </a:solidFill>
-                  </a:tcPr>
-                </a:tc>
-                <a:tc>
-                  <a:txBody>
-                    <a:bodyPr/>
-                    <a:lstStyle/>
-                    <a:p>
-                      <a:pPr algn="ctr">
-                        <a:defRPr sz="900" b="0">
-                          <a:solidFill>
-                            <a:srgbClr val="0F172A"/>
-                          </a:solidFill>
-                          <a:latin typeface="Segoe UI"/>
-                        </a:defRPr>
-                      </a:pPr>
-                      <a:r>
-                        <a:t>59</a:t>
-                      </a:r>
-                    </a:p>
-                  </a:txBody>
-                  <a:tcPr anchor="ctr">
-                    <a:solidFill>
-                      <a:srgbClr val="F8FAFC"/>
-                    </a:solidFill>
-                  </a:tcPr>
-                </a:tc>
-                <a:tc>
-                  <a:txBody>
-                    <a:bodyPr/>
-                    <a:lstStyle/>
-                    <a:p>
-                      <a:pPr algn="ctr">
-                        <a:defRPr sz="900" b="0">
-                          <a:solidFill>
-                            <a:srgbClr val="0F172A"/>
-                          </a:solidFill>
-                          <a:latin typeface="Segoe UI"/>
-                        </a:defRPr>
-                      </a:pPr>
-                      <a:r>
-                        <a:t>9</a:t>
-                      </a:r>
-                    </a:p>
-                  </a:txBody>
-                  <a:tcPr anchor="ctr">
-                    <a:solidFill>
-                      <a:srgbClr val="F8FAFC"/>
-                    </a:solidFill>
-                  </a:tcPr>
-                </a:tc>
-                <a:tc>
-                  <a:txBody>
-                    <a:bodyPr/>
-                    <a:lstStyle/>
-                    <a:p>
-                      <a:pPr algn="ctr">
-                        <a:defRPr sz="900" b="0">
-                          <a:solidFill>
-                            <a:srgbClr val="0F172A"/>
-                          </a:solidFill>
-                          <a:latin typeface="Segoe UI"/>
-                        </a:defRPr>
-                      </a:pPr>
-                      <a:r>
-                        <a:t>50</a:t>
-                      </a:r>
-                    </a:p>
-                  </a:txBody>
-                  <a:tcPr anchor="ctr">
-                    <a:solidFill>
-                      <a:srgbClr val="F8FAFC"/>
-                    </a:solidFill>
-                  </a:tcPr>
-                </a:tc>
-                <a:tc>
-                  <a:txBody>
-                    <a:bodyPr/>
-                    <a:lstStyle/>
-                    <a:p>
-                      <a:pPr algn="ctr">
-                        <a:defRPr sz="900" b="0">
-                          <a:solidFill>
-                            <a:srgbClr val="0F172A"/>
-                          </a:solidFill>
-                          <a:latin typeface="Segoe UI"/>
-                        </a:defRPr>
-                      </a:pPr>
-                      <a:r>
-                        <a:t>15.25%</a:t>
-                      </a:r>
-                    </a:p>
-                  </a:txBody>
-                  <a:tcPr anchor="ctr">
-                    <a:solidFill>
-                      <a:srgbClr val="F8FAFC"/>
-                    </a:solidFill>
-                  </a:tcPr>
-                </a:tc>
-                <a:tc>
-                  <a:txBody>
-                    <a:bodyPr/>
-                    <a:lstStyle/>
-                    <a:p>
-                      <a:pPr algn="ctr">
-                        <a:defRPr sz="900" b="1">
-                          <a:solidFill>
-                            <a:srgbClr val="E11D48"/>
-                          </a:solidFill>
-                          <a:latin typeface="Segoe UI"/>
-                        </a:defRPr>
-                      </a:pPr>
-                      <a:r>
-                        <a:t>🔴 Critical</a:t>
-                      </a:r>
-                    </a:p>
-                  </a:txBody>
-                  <a:tcPr anchor="ctr">
-                    <a:solidFill>
-                      <a:srgbClr val="F8FAFC"/>
-                    </a:solidFill>
-                  </a:tcPr>
-                </a:tc>
-              </a:tr>
-              <a:tr h="440574">
-                <a:tc>
-                  <a:txBody>
-                    <a:bodyPr/>
-                    <a:lstStyle/>
-                    <a:p>
-                      <a:pPr algn="l">
-                        <a:defRPr sz="900" b="0">
-                          <a:solidFill>
-                            <a:srgbClr val="0F172A"/>
-                          </a:solidFill>
-                          <a:latin typeface="Segoe UI"/>
-                        </a:defRPr>
-                      </a:pPr>
-                      <a:r>
-                        <a:t>7</a:t>
-                      </a:r>
-                    </a:p>
-                  </a:txBody>
-                  <a:tcPr anchor="ctr">
-                    <a:solidFill>
-                      <a:srgbClr val="FFFFFF"/>
-                    </a:solidFill>
-                  </a:tcPr>
-                </a:tc>
-                <a:tc>
-                  <a:txBody>
-                    <a:bodyPr/>
-                    <a:lstStyle/>
-                    <a:p>
-                      <a:pPr algn="l">
-                        <a:defRPr sz="900" b="0">
-                          <a:solidFill>
-                            <a:srgbClr val="0F172A"/>
-                          </a:solidFill>
-                          <a:latin typeface="Segoe UI"/>
-                        </a:defRPr>
-                      </a:pPr>
-                      <a:r>
-                        <a:t>CRP (Central Retail Corp)</a:t>
-                      </a:r>
-                    </a:p>
-                  </a:txBody>
-                  <a:tcPr anchor="ctr">
-                    <a:solidFill>
-                      <a:srgbClr val="FFFFFF"/>
-                    </a:solidFill>
-                  </a:tcPr>
-                </a:tc>
-                <a:tc>
-                  <a:txBody>
-                    <a:bodyPr/>
-                    <a:lstStyle/>
-                    <a:p>
-                      <a:pPr algn="ctr">
-                        <a:defRPr sz="900" b="0">
-                          <a:solidFill>
-                            <a:srgbClr val="0F172A"/>
-                          </a:solidFill>
-                          <a:latin typeface="Segoe UI"/>
-                        </a:defRPr>
-                      </a:pPr>
-                      <a:r>
-                        <a:t>46</a:t>
-                      </a:r>
-                    </a:p>
-                  </a:txBody>
-                  <a:tcPr anchor="ctr">
-                    <a:solidFill>
-                      <a:srgbClr val="FFFFFF"/>
-                    </a:solidFill>
-                  </a:tcPr>
-                </a:tc>
-                <a:tc>
-                  <a:txBody>
-                    <a:bodyPr/>
-                    <a:lstStyle/>
-                    <a:p>
-                      <a:pPr algn="ctr">
-                        <a:defRPr sz="900" b="0">
-                          <a:solidFill>
-                            <a:srgbClr val="0F172A"/>
-                          </a:solidFill>
-                          <a:latin typeface="Segoe UI"/>
-                        </a:defRPr>
-                      </a:pPr>
-                      <a:r>
-                        <a:t>5</a:t>
-                      </a:r>
-                    </a:p>
-                  </a:txBody>
-                  <a:tcPr anchor="ctr">
-                    <a:solidFill>
-                      <a:srgbClr val="FFFFFF"/>
-                    </a:solidFill>
-                  </a:tcPr>
-                </a:tc>
-                <a:tc>
-                  <a:txBody>
-                    <a:bodyPr/>
-                    <a:lstStyle/>
-                    <a:p>
-                      <a:pPr algn="ctr">
-                        <a:defRPr sz="900" b="0">
-                          <a:solidFill>
-                            <a:srgbClr val="0F172A"/>
-                          </a:solidFill>
-                          <a:latin typeface="Segoe UI"/>
-                        </a:defRPr>
-                      </a:pPr>
-                      <a:r>
-                        <a:t>41</a:t>
-                      </a:r>
-                    </a:p>
-                  </a:txBody>
-                  <a:tcPr anchor="ctr">
-                    <a:solidFill>
-                      <a:srgbClr val="FFFFFF"/>
-                    </a:solidFill>
-                  </a:tcPr>
-                </a:tc>
-                <a:tc>
-                  <a:txBody>
-                    <a:bodyPr/>
-                    <a:lstStyle/>
-                    <a:p>
-                      <a:pPr algn="ctr">
-                        <a:defRPr sz="900" b="0">
-                          <a:solidFill>
-                            <a:srgbClr val="0F172A"/>
-                          </a:solidFill>
-                          <a:latin typeface="Segoe UI"/>
-                        </a:defRPr>
-                      </a:pPr>
-                      <a:r>
-                        <a:t>10.87%</a:t>
-                      </a:r>
-                    </a:p>
-                  </a:txBody>
-                  <a:tcPr anchor="ctr">
-                    <a:solidFill>
-                      <a:srgbClr val="FFFFFF"/>
-                    </a:solidFill>
-                  </a:tcPr>
-                </a:tc>
-                <a:tc>
-                  <a:txBody>
-                    <a:bodyPr/>
-                    <a:lstStyle/>
-                    <a:p>
-                      <a:pPr algn="ctr">
-                        <a:defRPr sz="900" b="1">
-                          <a:solidFill>
-                            <a:srgbClr val="E11D48"/>
-                          </a:solidFill>
-                          <a:latin typeface="Segoe UI"/>
-                        </a:defRPr>
-                      </a:pPr>
-                      <a:r>
-                        <a:t>🔴 Critical</a:t>
-                      </a:r>
-                    </a:p>
-                  </a:txBody>
-                  <a:tcPr anchor="ctr">
-                    <a:solidFill>
-                      <a:srgbClr val="FFFFFF"/>
-                    </a:solidFill>
-                  </a:tcPr>
-                </a:tc>
-              </a:tr>
-              <a:tr h="440574">
-                <a:tc>
-                  <a:txBody>
-                    <a:bodyPr/>
-                    <a:lstStyle/>
-                    <a:p>
-                      <a:pPr algn="l">
-                        <a:defRPr sz="900" b="0">
-                          <a:solidFill>
-                            <a:srgbClr val="0F172A"/>
-                          </a:solidFill>
-                          <a:latin typeface="Segoe UI"/>
-                        </a:defRPr>
-                      </a:pPr>
-                      <a:r>
-                        <a:t>8</a:t>
-                      </a:r>
-                    </a:p>
-                  </a:txBody>
-                  <a:tcPr anchor="ctr">
-                    <a:solidFill>
-                      <a:srgbClr val="F8FAFC"/>
-                    </a:solidFill>
-                  </a:tcPr>
-                </a:tc>
-                <a:tc>
-                  <a:txBody>
-                    <a:bodyPr/>
-                    <a:lstStyle/>
-                    <a:p>
-                      <a:pPr algn="l">
-                        <a:defRPr sz="900" b="0">
-                          <a:solidFill>
-                            <a:srgbClr val="0F172A"/>
-                          </a:solidFill>
-                          <a:latin typeface="Segoe UI"/>
-                        </a:defRPr>
-                      </a:pPr>
-                      <a:r>
-                        <a:t>RIS (Retail Information Systems)</a:t>
-                      </a:r>
-                    </a:p>
-                  </a:txBody>
-                  <a:tcPr anchor="ctr">
-                    <a:solidFill>
-                      <a:srgbClr val="F8FAFC"/>
-                    </a:solidFill>
-                  </a:tcPr>
-                </a:tc>
-                <a:tc>
-                  <a:txBody>
-                    <a:bodyPr/>
-                    <a:lstStyle/>
-                    <a:p>
-                      <a:pPr algn="ctr">
-                        <a:defRPr sz="900" b="0">
-                          <a:solidFill>
-                            <a:srgbClr val="0F172A"/>
-                          </a:solidFill>
-                          <a:latin typeface="Segoe UI"/>
-                        </a:defRPr>
-                      </a:pPr>
-                      <a:r>
-                        <a:t>29</a:t>
-                      </a:r>
-                    </a:p>
-                  </a:txBody>
-                  <a:tcPr anchor="ctr">
-                    <a:solidFill>
-                      <a:srgbClr val="F8FAFC"/>
-                    </a:solidFill>
-                  </a:tcPr>
-                </a:tc>
-                <a:tc>
-                  <a:txBody>
-                    <a:bodyPr/>
-                    <a:lstStyle/>
-                    <a:p>
-                      <a:pPr algn="ctr">
-                        <a:defRPr sz="900" b="0">
-                          <a:solidFill>
-                            <a:srgbClr val="0F172A"/>
-                          </a:solidFill>
-                          <a:latin typeface="Segoe UI"/>
-                        </a:defRPr>
-                      </a:pPr>
-                      <a:r>
-                        <a:t>4</a:t>
-                      </a:r>
-                    </a:p>
-                  </a:txBody>
-                  <a:tcPr anchor="ctr">
-                    <a:solidFill>
-                      <a:srgbClr val="F8FAFC"/>
-                    </a:solidFill>
-                  </a:tcPr>
-                </a:tc>
-                <a:tc>
-                  <a:txBody>
-                    <a:bodyPr/>
-                    <a:lstStyle/>
-                    <a:p>
-                      <a:pPr algn="ctr">
-                        <a:defRPr sz="900" b="0">
-                          <a:solidFill>
-                            <a:srgbClr val="0F172A"/>
-                          </a:solidFill>
-                          <a:latin typeface="Segoe UI"/>
-                        </a:defRPr>
-                      </a:pPr>
-                      <a:r>
-                        <a:t>25</a:t>
-                      </a:r>
-                    </a:p>
-                  </a:txBody>
-                  <a:tcPr anchor="ctr">
-                    <a:solidFill>
-                      <a:srgbClr val="F8FAFC"/>
-                    </a:solidFill>
-                  </a:tcPr>
-                </a:tc>
-                <a:tc>
-                  <a:txBody>
-                    <a:bodyPr/>
-                    <a:lstStyle/>
-                    <a:p>
-                      <a:pPr algn="ctr">
-                        <a:defRPr sz="900" b="0">
-                          <a:solidFill>
-                            <a:srgbClr val="0F172A"/>
-                          </a:solidFill>
-                          <a:latin typeface="Segoe UI"/>
-                        </a:defRPr>
-                      </a:pPr>
-                      <a:r>
-                        <a:t>13.79%</a:t>
-                      </a:r>
-                    </a:p>
-                  </a:txBody>
-                  <a:tcPr anchor="ctr">
-                    <a:solidFill>
-                      <a:srgbClr val="F8FAFC"/>
-                    </a:solidFill>
-                  </a:tcPr>
-                </a:tc>
-                <a:tc>
-                  <a:txBody>
-                    <a:bodyPr/>
-                    <a:lstStyle/>
-                    <a:p>
-                      <a:pPr algn="ctr">
-                        <a:defRPr sz="900" b="1">
-                          <a:solidFill>
-                            <a:srgbClr val="E11D48"/>
-                          </a:solidFill>
-                          <a:latin typeface="Segoe UI"/>
-                        </a:defRPr>
-                      </a:pPr>
-                      <a:r>
-                        <a:t>🔴 Critical</a:t>
-                      </a:r>
-                    </a:p>
-                  </a:txBody>
-                  <a:tcPr anchor="ctr">
-                    <a:solidFill>
-                      <a:srgbClr val="F8FAFC"/>
-                    </a:solidFill>
-                  </a:tcPr>
-                </a:tc>
-              </a:tr>
-              <a:tr h="440574">
-                <a:tc>
-                  <a:txBody>
-                    <a:bodyPr/>
-                    <a:lstStyle/>
-                    <a:p>
-                      <a:pPr algn="l">
-                        <a:defRPr sz="900" b="0">
-                          <a:solidFill>
-                            <a:srgbClr val="0F172A"/>
-                          </a:solidFill>
-                          <a:latin typeface="Segoe UI"/>
-                        </a:defRPr>
-                      </a:pPr>
-                      <a:r>
-                        <a:t>9</a:t>
-                      </a:r>
-                    </a:p>
-                  </a:txBody>
-                  <a:tcPr anchor="ctr">
-                    <a:solidFill>
-                      <a:srgbClr val="FFFFFF"/>
-                    </a:solidFill>
-                  </a:tcPr>
-                </a:tc>
-                <a:tc>
-                  <a:txBody>
-                    <a:bodyPr/>
-                    <a:lstStyle/>
-                    <a:p>
-                      <a:pPr algn="l">
-                        <a:defRPr sz="900" b="0">
-                          <a:solidFill>
-                            <a:srgbClr val="0F172A"/>
-                          </a:solidFill>
-                          <a:latin typeface="Segoe UI"/>
-                        </a:defRPr>
-                      </a:pPr>
-                      <a:r>
-                        <a:t>FAST</a:t>
-                      </a:r>
-                    </a:p>
-                  </a:txBody>
-                  <a:tcPr anchor="ctr">
-                    <a:solidFill>
-                      <a:srgbClr val="FFFFFF"/>
-                    </a:solidFill>
-                  </a:tcPr>
-                </a:tc>
-                <a:tc>
-                  <a:txBody>
-                    <a:bodyPr/>
-                    <a:lstStyle/>
-                    <a:p>
-                      <a:pPr algn="ctr">
-                        <a:defRPr sz="900" b="0">
-                          <a:solidFill>
-                            <a:srgbClr val="0F172A"/>
-                          </a:solidFill>
-                          <a:latin typeface="Segoe UI"/>
-                        </a:defRPr>
-                      </a:pPr>
-                      <a:r>
-                        <a:t>28</a:t>
-                      </a:r>
-                    </a:p>
-                  </a:txBody>
-                  <a:tcPr anchor="ctr">
-                    <a:solidFill>
-                      <a:srgbClr val="FFFFFF"/>
-                    </a:solidFill>
-                  </a:tcPr>
-                </a:tc>
-                <a:tc>
-                  <a:txBody>
-                    <a:bodyPr/>
-                    <a:lstStyle/>
-                    <a:p>
-                      <a:pPr algn="ctr">
-                        <a:defRPr sz="900" b="0">
-                          <a:solidFill>
-                            <a:srgbClr val="0F172A"/>
-                          </a:solidFill>
-                          <a:latin typeface="Segoe UI"/>
-                        </a:defRPr>
-                      </a:pPr>
-                      <a:r>
-                        <a:t>6</a:t>
-                      </a:r>
-                    </a:p>
-                  </a:txBody>
-                  <a:tcPr anchor="ctr">
-                    <a:solidFill>
-                      <a:srgbClr val="FFFFFF"/>
-                    </a:solidFill>
-                  </a:tcPr>
-                </a:tc>
-                <a:tc>
-                  <a:txBody>
-                    <a:bodyPr/>
-                    <a:lstStyle/>
-                    <a:p>
-                      <a:pPr algn="ctr">
-                        <a:defRPr sz="900" b="0">
-                          <a:solidFill>
-                            <a:srgbClr val="0F172A"/>
-                          </a:solidFill>
-                          <a:latin typeface="Segoe UI"/>
-                        </a:defRPr>
-                      </a:pPr>
-                      <a:r>
-                        <a:t>22</a:t>
-                      </a:r>
-                    </a:p>
-                  </a:txBody>
-                  <a:tcPr anchor="ctr">
-                    <a:solidFill>
-                      <a:srgbClr val="FFFFFF"/>
-                    </a:solidFill>
-                  </a:tcPr>
-                </a:tc>
-                <a:tc>
-                  <a:txBody>
-                    <a:bodyPr/>
-                    <a:lstStyle/>
-                    <a:p>
-                      <a:pPr algn="ctr">
-                        <a:defRPr sz="900" b="0">
-                          <a:solidFill>
-                            <a:srgbClr val="0F172A"/>
-                          </a:solidFill>
-                          <a:latin typeface="Segoe UI"/>
-                        </a:defRPr>
-                      </a:pPr>
-                      <a:r>
-                        <a:t>21.43%</a:t>
-                      </a:r>
-                    </a:p>
-                  </a:txBody>
-                  <a:tcPr anchor="ctr">
-                    <a:solidFill>
-                      <a:srgbClr val="FFFFFF"/>
-                    </a:solidFill>
-                  </a:tcPr>
-                </a:tc>
-                <a:tc>
-                  <a:txBody>
-                    <a:bodyPr/>
-                    <a:lstStyle/>
-                    <a:p>
-                      <a:pPr algn="ctr">
-                        <a:defRPr sz="900" b="1">
-                          <a:solidFill>
-                            <a:srgbClr val="E11D48"/>
-                          </a:solidFill>
-                          <a:latin typeface="Segoe UI"/>
-                        </a:defRPr>
-                      </a:pPr>
-                      <a:r>
-                        <a:t>🔴 Critical</a:t>
-                      </a:r>
-                    </a:p>
-                  </a:txBody>
-                  <a:tcPr anchor="ctr">
+                  <a:tcPr>
                     <a:solidFill>
                       <a:srgbClr val="FFFFFF"/>
                     </a:solidFill>
@@ -10159,7 +9979,7 @@
                     <a:lstStyle/>
                     <a:p>
                       <a:pPr algn="l">
-                        <a:defRPr sz="900" b="1">
+                        <a:defRPr sz="950">
                           <a:solidFill>
                             <a:srgbClr val="0F172A"/>
                           </a:solidFill>
@@ -10171,9 +9991,9 @@
                       </a:r>
                     </a:p>
                   </a:txBody>
-                  <a:tcPr anchor="ctr">
-                    <a:solidFill>
-                      <a:srgbClr val="EAF2FA"/>
+                  <a:tcPr>
+                    <a:solidFill>
+                      <a:srgbClr val="F8FAFC"/>
                     </a:solidFill>
                   </a:tcPr>
                 </a:tc>
@@ -10183,7 +10003,7 @@
                     <a:lstStyle/>
                     <a:p>
                       <a:pPr algn="l">
-                        <a:defRPr sz="900" b="1">
+                        <a:defRPr sz="950">
                           <a:solidFill>
                             <a:srgbClr val="0F172A"/>
                           </a:solidFill>
@@ -10191,13 +10011,13 @@
                         </a:defRPr>
                       </a:pPr>
                       <a:r>
-                        <a:t>B2S</a:t>
-                      </a:r>
-                    </a:p>
-                  </a:txBody>
-                  <a:tcPr anchor="ctr">
-                    <a:solidFill>
-                      <a:srgbClr val="EAF2FA"/>
+                        <a:t>Unknown / Unassigned</a:t>
+                      </a:r>
+                    </a:p>
+                  </a:txBody>
+                  <a:tcPr>
+                    <a:solidFill>
+                      <a:srgbClr val="F8FAFC"/>
                     </a:solidFill>
                   </a:tcPr>
                 </a:tc>
@@ -10207,7 +10027,7 @@
                     <a:lstStyle/>
                     <a:p>
                       <a:pPr algn="ctr">
-                        <a:defRPr sz="900" b="1">
+                        <a:defRPr sz="950">
                           <a:solidFill>
                             <a:srgbClr val="0F172A"/>
                           </a:solidFill>
@@ -10215,13 +10035,13 @@
                         </a:defRPr>
                       </a:pPr>
                       <a:r>
-                        <a:t>21</a:t>
-                      </a:r>
-                    </a:p>
-                  </a:txBody>
-                  <a:tcPr anchor="ctr">
-                    <a:solidFill>
-                      <a:srgbClr val="EAF2FA"/>
+                        <a:t>128</a:t>
+                      </a:r>
+                    </a:p>
+                  </a:txBody>
+                  <a:tcPr>
+                    <a:solidFill>
+                      <a:srgbClr val="F8FAFC"/>
                     </a:solidFill>
                   </a:tcPr>
                 </a:tc>
@@ -10231,7 +10051,7 @@
                     <a:lstStyle/>
                     <a:p>
                       <a:pPr algn="ctr">
-                        <a:defRPr sz="900" b="1">
+                        <a:defRPr sz="950">
                           <a:solidFill>
                             <a:srgbClr val="0F172A"/>
                           </a:solidFill>
@@ -10239,13 +10059,13 @@
                         </a:defRPr>
                       </a:pPr>
                       <a:r>
-                        <a:t>1</a:t>
-                      </a:r>
-                    </a:p>
-                  </a:txBody>
-                  <a:tcPr anchor="ctr">
-                    <a:solidFill>
-                      <a:srgbClr val="EAF2FA"/>
+                        <a:t>23</a:t>
+                      </a:r>
+                    </a:p>
+                  </a:txBody>
+                  <a:tcPr>
+                    <a:solidFill>
+                      <a:srgbClr val="F8FAFC"/>
                     </a:solidFill>
                   </a:tcPr>
                 </a:tc>
@@ -10255,7 +10075,7 @@
                     <a:lstStyle/>
                     <a:p>
                       <a:pPr algn="ctr">
-                        <a:defRPr sz="900" b="1">
+                        <a:defRPr sz="950">
                           <a:solidFill>
                             <a:srgbClr val="0F172A"/>
                           </a:solidFill>
@@ -10263,13 +10083,13 @@
                         </a:defRPr>
                       </a:pPr>
                       <a:r>
-                        <a:t>20</a:t>
-                      </a:r>
-                    </a:p>
-                  </a:txBody>
-                  <a:tcPr anchor="ctr">
-                    <a:solidFill>
-                      <a:srgbClr val="EAF2FA"/>
+                        <a:t>105</a:t>
+                      </a:r>
+                    </a:p>
+                  </a:txBody>
+                  <a:tcPr>
+                    <a:solidFill>
+                      <a:srgbClr val="F8FAFC"/>
                     </a:solidFill>
                   </a:tcPr>
                 </a:tc>
@@ -10279,7 +10099,7 @@
                     <a:lstStyle/>
                     <a:p>
                       <a:pPr algn="ctr">
-                        <a:defRPr sz="900" b="1">
+                        <a:defRPr sz="950">
                           <a:solidFill>
                             <a:srgbClr val="0F172A"/>
                           </a:solidFill>
@@ -10287,13 +10107,13 @@
                         </a:defRPr>
                       </a:pPr>
                       <a:r>
-                        <a:t>4.76%</a:t>
-                      </a:r>
-                    </a:p>
-                  </a:txBody>
-                  <a:tcPr anchor="ctr">
-                    <a:solidFill>
-                      <a:srgbClr val="EAF2FA"/>
+                        <a:t>17.97%</a:t>
+                      </a:r>
+                    </a:p>
+                  </a:txBody>
+                  <a:tcPr>
+                    <a:solidFill>
+                      <a:srgbClr val="F8FAFC"/>
                     </a:solidFill>
                   </a:tcPr>
                 </a:tc>
@@ -10303,9 +10123,9 @@
                     <a:lstStyle/>
                     <a:p>
                       <a:pPr algn="ctr">
-                        <a:defRPr sz="900" b="1">
-                          <a:solidFill>
-                            <a:srgbClr val="E11D48"/>
+                        <a:defRPr sz="950" b="1">
+                          <a:solidFill>
+                            <a:srgbClr val="F43F5E"/>
                           </a:solidFill>
                           <a:latin typeface="Segoe UI"/>
                         </a:defRPr>
@@ -10315,9 +10135,9 @@
                       </a:r>
                     </a:p>
                   </a:txBody>
-                  <a:tcPr anchor="ctr">
-                    <a:solidFill>
-                      <a:srgbClr val="EAF2FA"/>
+                  <a:tcPr>
+                    <a:solidFill>
+                      <a:srgbClr val="F8FAFC"/>
                     </a:solidFill>
                   </a:tcPr>
                 </a:tc>
@@ -10328,7 +10148,7 @@
       </p:graphicFrame>
       <p:sp>
         <p:nvSpPr>
-          <p:cNvPr id="6" name="Rectangle 5"/>
+          <p:cNvPr id="5" name="Rounded Rectangle 4"/>
           <p:cNvSpPr/>
           <p:nvPr/>
         </p:nvSpPr>
@@ -10337,7 +10157,7 @@
             <a:off x="8686800" y="1508760"/>
             <a:ext cx="2743200" cy="4846320"/>
           </a:xfrm>
-          <a:prstGeom prst="rect">
+          <a:prstGeom prst="roundRect">
             <a:avLst/>
           </a:prstGeom>
           <a:solidFill>
@@ -10373,7 +10193,7 @@
       </p:sp>
       <p:sp>
         <p:nvSpPr>
-          <p:cNvPr id="7" name="TextBox 6"/>
+          <p:cNvPr id="6" name="TextBox 5"/>
           <p:cNvSpPr txBox="1"/>
           <p:nvPr/>
         </p:nvSpPr>
@@ -10408,48 +10228,48 @@
             <a:pPr>
               <a:defRPr sz="900">
                 <a:solidFill>
-                  <a:srgbClr val="475569"/>
+                  <a:srgbClr val="64748B"/>
                 </a:solidFill>
               </a:defRPr>
             </a:pPr>
             <a:r>
-              <a:t>• CFR &amp; CDG ปริมาณสูงสุด: รวมกันกว่า 413 เครื่อง เป็นกลุ่มซูเปอร์มาร์เก็ตและห้างสรรพสินค้า</a:t>
+              <a:t>• CDG &amp; CFR ถือครองกว่า 53.9%: รวมกัน 2,745 เครื่อง (CDG 1,758 + CFR 987) เป็นกลุ่มห้างสรรพสินค้าและท็อปส์ ซูเปอร์มาร์เก็ต</a:t>
             </a:r>
           </a:p>
           <a:p>
             <a:pPr>
               <a:defRPr sz="900">
                 <a:solidFill>
-                  <a:srgbClr val="475569"/>
+                  <a:srgbClr val="64748B"/>
                 </a:solidFill>
               </a:defRPr>
             </a:pPr>
             <a:r>
-              <a:t>• CMG ผลงานยอดเยี่ยม: มีความคืบหน้าถึง 47.42% ขยับเข้าสู่เกณฑ์สีเหลือง Warning แล้ว</a:t>
+              <a:t>• CMG ผลงานก้าวหน้าที่สุด: มีความคืบหน้าถึง 16.80% (สำเร็จ 87 เครื่อง) จากการจัดการสิทธิ์ Admin และเครื่องสำนักงาน</a:t>
             </a:r>
           </a:p>
           <a:p>
             <a:pPr>
               <a:defRPr sz="900">
                 <a:solidFill>
-                  <a:srgbClr val="475569"/>
+                  <a:srgbClr val="64748B"/>
                 </a:solidFill>
               </a:defRPr>
             </a:pPr>
             <a:r>
-              <a:t>• Unknown (126 เครื่อง): เป็นเครื่องที่ข้อมูลในระบบ GLPI ไม่สมบูรณ์ ต้องเร่งเคลียร์ใน Topic 1.1</a:t>
+              <a:t>• Top 4 BUs รวมกัน 73.0%: CDG, CFR, CMG และ PWB รวมกันถึง 3,716 เครื่อง เป็นพื้นที่ยุทธศาสตร์หลักในการปิดช่องโหว่</a:t>
             </a:r>
           </a:p>
           <a:p>
             <a:pPr>
               <a:defRPr sz="900">
                 <a:solidFill>
-                  <a:srgbClr val="475569"/>
+                  <a:srgbClr val="64748B"/>
                 </a:solidFill>
               </a:defRPr>
             </a:pPr>
             <a:r>
-              <a:t>• กลุ่ม IT (RIS 29 เครื่อง): มีความพร้อมสูง สามารถปิดงาน Admin และ Patch ได้ทันที 100%</a:t>
+              <a:t>• Unknown (128 เครื่อง): เครื่องที่รอปรับปรุงข้อมูลใน GLPI อยู่ระหว่างส่งมอบทีมบริการเพื่อเคลียร์ Topic 1.1</a:t>
             </a:r>
           </a:p>
         </p:txBody>
@@ -10524,7 +10344,7 @@
         <p:spPr>
           <a:xfrm>
             <a:off x="731520" y="365760"/>
-            <a:ext cx="10698480" cy="256032"/>
+            <a:ext cx="10698480" cy="1005840"/>
           </a:xfrm>
           <a:prstGeom prst="rect">
             <a:avLst/>
@@ -10538,63 +10358,27 @@
           <a:lstStyle/>
           <a:p>
             <a:pPr>
-              <a:defRPr sz="950" b="1">
-                <a:solidFill>
-                  <a:srgbClr val="0284C7"/>
+              <a:defRPr sz="1800" b="1">
+                <a:solidFill>
+                  <a:srgbClr val="0F172A"/>
                 </a:solidFill>
                 <a:latin typeface="Segoe UI"/>
               </a:defRPr>
             </a:pPr>
             <a:r>
-              <a:t>ROOT CAUSES &amp; STRUCTURAL INVARIANTS</a:t>
-            </a:r>
-          </a:p>
-        </p:txBody>
-      </p:sp>
-      <p:sp>
-        <p:nvSpPr>
-          <p:cNvPr id="4" name="TextBox 3"/>
-          <p:cNvSpPr txBox="1"/>
-          <p:nvPr/>
-        </p:nvSpPr>
-        <p:spPr>
-          <a:xfrm>
-            <a:off x="731520" y="621792"/>
-            <a:ext cx="10698480" cy="685800"/>
-          </a:xfrm>
-          <a:prstGeom prst="rect">
-            <a:avLst/>
-          </a:prstGeom>
-          <a:noFill/>
-        </p:spPr>
-        <p:txBody>
-          <a:bodyPr wrap="square" lIns="0" tIns="0" rIns="0" bIns="0">
-            <a:spAutoFit/>
-          </a:bodyPr>
-          <a:lstStyle/>
+              <a:t>ROOT CAUSES &amp; STRUCTURAL INVARIANTS  |  ข้อจำกัดทางสถาปัตยกรรม 4 ด้านที่ส่งผลต่อความเร็วในการปิดงานของระบบหน้าร้าน</a:t>
+            </a:r>
+          </a:p>
           <a:p>
             <a:pPr>
-              <a:defRPr sz="1800" b="1">
-                <a:solidFill>
-                  <a:srgbClr val="0F172A"/>
+              <a:defRPr sz="1100">
+                <a:solidFill>
+                  <a:srgbClr val="64748B"/>
                 </a:solidFill>
                 <a:latin typeface="Segoe UI"/>
               </a:defRPr>
             </a:pPr>
             <a:r>
-              <a:t>ข้อจำกัดทางสถาปัตยกรรม 4 ด้านที่ส่งผลต่อความเร็วในการปิดงานของระบบหน้าร้าน</a:t>
-            </a:r>
-          </a:p>
-          <a:p>
-            <a:pPr>
-              <a:defRPr sz="1050">
-                <a:solidFill>
-                  <a:srgbClr val="475569"/>
-                </a:solidFill>
-                <a:latin typeface="Segoe UI"/>
-              </a:defRPr>
-            </a:pPr>
-            <a:r>
               <a:t>บทสรุปจากการสกัดคอลัมน์ Remark ในไฟล์ข้อมูล เพื่อให้ผู้บริหารเข้าใจสภาพความเป็นจริงเชิงเทคนิค</a:t>
             </a:r>
           </a:p>
@@ -10602,7 +10386,7 @@
       </p:sp>
       <p:sp>
         <p:nvSpPr>
-          <p:cNvPr id="5" name="Rectangle 4"/>
+          <p:cNvPr id="4" name="Rounded Rectangle 3"/>
           <p:cNvSpPr/>
           <p:nvPr/>
         </p:nvSpPr>
@@ -10611,7 +10395,7 @@
             <a:off x="731520" y="1508760"/>
             <a:ext cx="5212080" cy="2194560"/>
           </a:xfrm>
-          <a:prstGeom prst="rect">
+          <a:prstGeom prst="roundRect">
             <a:avLst/>
           </a:prstGeom>
           <a:solidFill>
@@ -10647,7 +10431,7 @@
       </p:sp>
       <p:sp>
         <p:nvSpPr>
-          <p:cNvPr id="6" name="Rectangle 5"/>
+          <p:cNvPr id="5" name="Rectangle 4"/>
           <p:cNvSpPr/>
           <p:nvPr/>
         </p:nvSpPr>
@@ -10660,7 +10444,7 @@
             <a:avLst/>
           </a:prstGeom>
           <a:solidFill>
-            <a:srgbClr val="0284C7"/>
+            <a:srgbClr val="2563EB"/>
           </a:solidFill>
           <a:ln>
             <a:noFill/>
@@ -10690,7 +10474,7 @@
       </p:sp>
       <p:sp>
         <p:nvSpPr>
-          <p:cNvPr id="7" name="TextBox 6"/>
+          <p:cNvPr id="6" name="TextBox 5"/>
           <p:cNvSpPr txBox="1"/>
           <p:nvPr/>
         </p:nvSpPr>
@@ -10726,7 +10510,7 @@
             <a:pPr>
               <a:defRPr sz="950">
                 <a:solidFill>
-                  <a:srgbClr val="475569"/>
+                  <a:srgbClr val="64748B"/>
                 </a:solidFill>
               </a:defRPr>
             </a:pPr>
@@ -10738,7 +10522,7 @@
       </p:sp>
       <p:sp>
         <p:nvSpPr>
-          <p:cNvPr id="8" name="Rectangle 7"/>
+          <p:cNvPr id="7" name="Rounded Rectangle 6"/>
           <p:cNvSpPr/>
           <p:nvPr/>
         </p:nvSpPr>
@@ -10747,7 +10531,7 @@
             <a:off x="6217920" y="1508760"/>
             <a:ext cx="5212080" cy="2194560"/>
           </a:xfrm>
-          <a:prstGeom prst="rect">
+          <a:prstGeom prst="roundRect">
             <a:avLst/>
           </a:prstGeom>
           <a:solidFill>
@@ -10783,7 +10567,7 @@
       </p:sp>
       <p:sp>
         <p:nvSpPr>
-          <p:cNvPr id="9" name="Rectangle 8"/>
+          <p:cNvPr id="8" name="Rectangle 7"/>
           <p:cNvSpPr/>
           <p:nvPr/>
         </p:nvSpPr>
@@ -10796,7 +10580,7 @@
             <a:avLst/>
           </a:prstGeom>
           <a:solidFill>
-            <a:srgbClr val="D97706"/>
+            <a:srgbClr val="F59E0B"/>
           </a:solidFill>
           <a:ln>
             <a:noFill/>
@@ -10826,7 +10610,7 @@
       </p:sp>
       <p:sp>
         <p:nvSpPr>
-          <p:cNvPr id="10" name="TextBox 9"/>
+          <p:cNvPr id="9" name="TextBox 8"/>
           <p:cNvSpPr txBox="1"/>
           <p:nvPr/>
         </p:nvSpPr>
@@ -10862,7 +10646,7 @@
             <a:pPr>
               <a:defRPr sz="950">
                 <a:solidFill>
-                  <a:srgbClr val="475569"/>
+                  <a:srgbClr val="64748B"/>
                 </a:solidFill>
               </a:defRPr>
             </a:pPr>
@@ -10874,7 +10658,7 @@
       </p:sp>
       <p:sp>
         <p:nvSpPr>
-          <p:cNvPr id="11" name="Rectangle 10"/>
+          <p:cNvPr id="10" name="Rounded Rectangle 9"/>
           <p:cNvSpPr/>
           <p:nvPr/>
         </p:nvSpPr>
@@ -10883,7 +10667,7 @@
             <a:off x="731520" y="3931920"/>
             <a:ext cx="5212080" cy="2194560"/>
           </a:xfrm>
-          <a:prstGeom prst="rect">
+          <a:prstGeom prst="roundRect">
             <a:avLst/>
           </a:prstGeom>
           <a:solidFill>
@@ -10919,7 +10703,7 @@
       </p:sp>
       <p:sp>
         <p:nvSpPr>
-          <p:cNvPr id="12" name="Rectangle 11"/>
+          <p:cNvPr id="11" name="Rectangle 10"/>
           <p:cNvSpPr/>
           <p:nvPr/>
         </p:nvSpPr>
@@ -10932,7 +10716,7 @@
             <a:avLst/>
           </a:prstGeom>
           <a:solidFill>
-            <a:srgbClr val="E11D48"/>
+            <a:srgbClr val="F43F5E"/>
           </a:solidFill>
           <a:ln>
             <a:noFill/>
@@ -10962,7 +10746,7 @@
       </p:sp>
       <p:sp>
         <p:nvSpPr>
-          <p:cNvPr id="13" name="TextBox 12"/>
+          <p:cNvPr id="12" name="TextBox 11"/>
           <p:cNvSpPr txBox="1"/>
           <p:nvPr/>
         </p:nvSpPr>
@@ -10998,7 +10782,7 @@
             <a:pPr>
               <a:defRPr sz="950">
                 <a:solidFill>
-                  <a:srgbClr val="475569"/>
+                  <a:srgbClr val="64748B"/>
                 </a:solidFill>
               </a:defRPr>
             </a:pPr>
@@ -11010,7 +10794,7 @@
       </p:sp>
       <p:sp>
         <p:nvSpPr>
-          <p:cNvPr id="14" name="Rectangle 13"/>
+          <p:cNvPr id="13" name="Rounded Rectangle 12"/>
           <p:cNvSpPr/>
           <p:nvPr/>
         </p:nvSpPr>
@@ -11019,7 +10803,7 @@
             <a:off x="6217920" y="3931920"/>
             <a:ext cx="5212080" cy="2194560"/>
           </a:xfrm>
-          <a:prstGeom prst="rect">
+          <a:prstGeom prst="roundRect">
             <a:avLst/>
           </a:prstGeom>
           <a:solidFill>
@@ -11055,7 +10839,7 @@
       </p:sp>
       <p:sp>
         <p:nvSpPr>
-          <p:cNvPr id="15" name="Rectangle 14"/>
+          <p:cNvPr id="14" name="Rectangle 13"/>
           <p:cNvSpPr/>
           <p:nvPr/>
         </p:nvSpPr>
@@ -11098,7 +10882,7 @@
       </p:sp>
       <p:sp>
         <p:nvSpPr>
-          <p:cNvPr id="16" name="TextBox 15"/>
+          <p:cNvPr id="15" name="TextBox 14"/>
           <p:cNvSpPr txBox="1"/>
           <p:nvPr/>
         </p:nvSpPr>
@@ -11134,7 +10918,7 @@
             <a:pPr>
               <a:defRPr sz="950">
                 <a:solidFill>
-                  <a:srgbClr val="475569"/>
+                  <a:srgbClr val="64748B"/>
                 </a:solidFill>
               </a:defRPr>
             </a:pPr>
@@ -11214,7 +10998,7 @@
         <p:spPr>
           <a:xfrm>
             <a:off x="731520" y="365760"/>
-            <a:ext cx="10698480" cy="256032"/>
+            <a:ext cx="10698480" cy="1005840"/>
           </a:xfrm>
           <a:prstGeom prst="rect">
             <a:avLst/>
@@ -11228,63 +11012,27 @@
           <a:lstStyle/>
           <a:p>
             <a:pPr>
-              <a:defRPr sz="950" b="1">
-                <a:solidFill>
-                  <a:srgbClr val="0284C7"/>
+              <a:defRPr sz="1800" b="1">
+                <a:solidFill>
+                  <a:srgbClr val="0F172A"/>
                 </a:solidFill>
                 <a:latin typeface="Segoe UI"/>
               </a:defRPr>
             </a:pPr>
             <a:r>
-              <a:t>ROADMAP &amp; EXECUTIVE DECISION SUPPORT</a:t>
-            </a:r>
-          </a:p>
-        </p:txBody>
-      </p:sp>
-      <p:sp>
-        <p:nvSpPr>
-          <p:cNvPr id="4" name="TextBox 3"/>
-          <p:cNvSpPr txBox="1"/>
-          <p:nvPr/>
-        </p:nvSpPr>
-        <p:spPr>
-          <a:xfrm>
-            <a:off x="731520" y="621792"/>
-            <a:ext cx="10698480" cy="685800"/>
-          </a:xfrm>
-          <a:prstGeom prst="rect">
-            <a:avLst/>
-          </a:prstGeom>
-          <a:noFill/>
-        </p:spPr>
-        <p:txBody>
-          <a:bodyPr wrap="square" lIns="0" tIns="0" rIns="0" bIns="0">
-            <a:spAutoFit/>
-          </a:bodyPr>
-          <a:lstStyle/>
+              <a:t>ROADMAP &amp; EXECUTIVE DECISION SUPPORT  |  แผนปฏิบัติการ 3 สัปดาห์เร่งรัดปิดจุดเสี่ยงสู่เป้าหมายก่อนครบกำหนด 25 พ.ย.</a:t>
+            </a:r>
+          </a:p>
           <a:p>
             <a:pPr>
-              <a:defRPr sz="1800" b="1">
-                <a:solidFill>
-                  <a:srgbClr val="0F172A"/>
+              <a:defRPr sz="1100">
+                <a:solidFill>
+                  <a:srgbClr val="64748B"/>
                 </a:solidFill>
                 <a:latin typeface="Segoe UI"/>
               </a:defRPr>
             </a:pPr>
             <a:r>
-              <a:t>แผนปฏิบัติการ 3 สัปดาห์เร่งรัดปิดจุดเสี่ยงสู่เป้าหมายก่อนครบกำหนด 25 พ.ย.</a:t>
-            </a:r>
-          </a:p>
-          <a:p>
-            <a:pPr>
-              <a:defRPr sz="1050">
-                <a:solidFill>
-                  <a:srgbClr val="475569"/>
-                </a:solidFill>
-                <a:latin typeface="Segoe UI"/>
-              </a:defRPr>
-            </a:pPr>
-            <a:r>
               <a:t>กรอบเวลาการดำเนินงานและการสนับสนุนเชิงนโยบายที่ต้องการจากผู้บริหาร</a:t>
             </a:r>
           </a:p>
@@ -11292,7 +11040,7 @@
       </p:sp>
       <p:sp>
         <p:nvSpPr>
-          <p:cNvPr id="5" name="Rectangle 4"/>
+          <p:cNvPr id="4" name="Rounded Rectangle 3"/>
           <p:cNvSpPr/>
           <p:nvPr/>
         </p:nvSpPr>
@@ -11301,7 +11049,7 @@
             <a:off x="731520" y="1508760"/>
             <a:ext cx="3383280" cy="3108960"/>
           </a:xfrm>
-          <a:prstGeom prst="rect">
+          <a:prstGeom prst="roundRect">
             <a:avLst/>
           </a:prstGeom>
           <a:solidFill>
@@ -11337,7 +11085,7 @@
       </p:sp>
       <p:sp>
         <p:nvSpPr>
-          <p:cNvPr id="6" name="Rectangle 5"/>
+          <p:cNvPr id="5" name="Rectangle 4"/>
           <p:cNvSpPr/>
           <p:nvPr/>
         </p:nvSpPr>
@@ -11350,7 +11098,7 @@
             <a:avLst/>
           </a:prstGeom>
           <a:solidFill>
-            <a:srgbClr val="0284C7"/>
+            <a:srgbClr val="2563EB"/>
           </a:solidFill>
           <a:ln>
             <a:noFill/>
@@ -11380,7 +11128,7 @@
       </p:sp>
       <p:sp>
         <p:nvSpPr>
-          <p:cNvPr id="7" name="TextBox 6"/>
+          <p:cNvPr id="6" name="TextBox 5"/>
           <p:cNvSpPr txBox="1"/>
           <p:nvPr/>
         </p:nvSpPr>
@@ -11415,7 +11163,7 @@
             <a:pPr>
               <a:defRPr sz="950" b="1">
                 <a:solidFill>
-                  <a:srgbClr val="0284C7"/>
+                  <a:srgbClr val="2563EB"/>
                 </a:solidFill>
               </a:defRPr>
             </a:pPr>
@@ -11428,7 +11176,7 @@
             <a:pPr>
               <a:defRPr sz="850">
                 <a:solidFill>
-                  <a:srgbClr val="475569"/>
+                  <a:srgbClr val="64748B"/>
                 </a:solidFill>
               </a:defRPr>
             </a:pPr>
@@ -11441,7 +11189,7 @@
             <a:pPr>
               <a:defRPr sz="850">
                 <a:solidFill>
-                  <a:srgbClr val="475569"/>
+                  <a:srgbClr val="64748B"/>
                 </a:solidFill>
               </a:defRPr>
             </a:pPr>
@@ -11454,7 +11202,7 @@
             <a:pPr>
               <a:defRPr sz="850">
                 <a:solidFill>
-                  <a:srgbClr val="475569"/>
+                  <a:srgbClr val="64748B"/>
                 </a:solidFill>
               </a:defRPr>
             </a:pPr>
@@ -11466,7 +11214,7 @@
       </p:sp>
       <p:sp>
         <p:nvSpPr>
-          <p:cNvPr id="8" name="Rectangle 7"/>
+          <p:cNvPr id="7" name="Rounded Rectangle 6"/>
           <p:cNvSpPr/>
           <p:nvPr/>
         </p:nvSpPr>
@@ -11475,7 +11223,7 @@
             <a:off x="4389120" y="1508760"/>
             <a:ext cx="3383280" cy="3108960"/>
           </a:xfrm>
-          <a:prstGeom prst="rect">
+          <a:prstGeom prst="roundRect">
             <a:avLst/>
           </a:prstGeom>
           <a:solidFill>
@@ -11511,7 +11259,7 @@
       </p:sp>
       <p:sp>
         <p:nvSpPr>
-          <p:cNvPr id="9" name="Rectangle 8"/>
+          <p:cNvPr id="8" name="Rectangle 7"/>
           <p:cNvSpPr/>
           <p:nvPr/>
         </p:nvSpPr>
@@ -11524,7 +11272,7 @@
             <a:avLst/>
           </a:prstGeom>
           <a:solidFill>
-            <a:srgbClr val="D97706"/>
+            <a:srgbClr val="F59E0B"/>
           </a:solidFill>
           <a:ln>
             <a:noFill/>
@@ -11554,7 +11302,7 @@
       </p:sp>
       <p:sp>
         <p:nvSpPr>
-          <p:cNvPr id="10" name="TextBox 9"/>
+          <p:cNvPr id="9" name="TextBox 8"/>
           <p:cNvSpPr txBox="1"/>
           <p:nvPr/>
         </p:nvSpPr>
@@ -11589,7 +11337,7 @@
             <a:pPr>
               <a:defRPr sz="950" b="1">
                 <a:solidFill>
-                  <a:srgbClr val="D97706"/>
+                  <a:srgbClr val="F59E0B"/>
                 </a:solidFill>
               </a:defRPr>
             </a:pPr>
@@ -11602,7 +11350,7 @@
             <a:pPr>
               <a:defRPr sz="850">
                 <a:solidFill>
-                  <a:srgbClr val="475569"/>
+                  <a:srgbClr val="64748B"/>
                 </a:solidFill>
               </a:defRPr>
             </a:pPr>
@@ -11615,7 +11363,7 @@
             <a:pPr>
               <a:defRPr sz="850">
                 <a:solidFill>
-                  <a:srgbClr val="475569"/>
+                  <a:srgbClr val="64748B"/>
                 </a:solidFill>
               </a:defRPr>
             </a:pPr>
@@ -11628,7 +11376,7 @@
             <a:pPr>
               <a:defRPr sz="850">
                 <a:solidFill>
-                  <a:srgbClr val="475569"/>
+                  <a:srgbClr val="64748B"/>
                 </a:solidFill>
               </a:defRPr>
             </a:pPr>
@@ -11640,7 +11388,7 @@
       </p:sp>
       <p:sp>
         <p:nvSpPr>
-          <p:cNvPr id="11" name="Rectangle 10"/>
+          <p:cNvPr id="10" name="Rounded Rectangle 9"/>
           <p:cNvSpPr/>
           <p:nvPr/>
         </p:nvSpPr>
@@ -11649,7 +11397,7 @@
             <a:off x="8046720" y="1508760"/>
             <a:ext cx="3383280" cy="3108960"/>
           </a:xfrm>
-          <a:prstGeom prst="rect">
+          <a:prstGeom prst="roundRect">
             <a:avLst/>
           </a:prstGeom>
           <a:solidFill>
@@ -11685,7 +11433,7 @@
       </p:sp>
       <p:sp>
         <p:nvSpPr>
-          <p:cNvPr id="12" name="Rectangle 11"/>
+          <p:cNvPr id="11" name="Rectangle 10"/>
           <p:cNvSpPr/>
           <p:nvPr/>
         </p:nvSpPr>
@@ -11728,7 +11476,7 @@
       </p:sp>
       <p:sp>
         <p:nvSpPr>
-          <p:cNvPr id="13" name="TextBox 12"/>
+          <p:cNvPr id="12" name="TextBox 11"/>
           <p:cNvSpPr txBox="1"/>
           <p:nvPr/>
         </p:nvSpPr>
@@ -11776,7 +11524,7 @@
             <a:pPr>
               <a:defRPr sz="850">
                 <a:solidFill>
-                  <a:srgbClr val="475569"/>
+                  <a:srgbClr val="64748B"/>
                 </a:solidFill>
               </a:defRPr>
             </a:pPr>
@@ -11789,7 +11537,7 @@
             <a:pPr>
               <a:defRPr sz="850">
                 <a:solidFill>
-                  <a:srgbClr val="475569"/>
+                  <a:srgbClr val="64748B"/>
                 </a:solidFill>
               </a:defRPr>
             </a:pPr>
@@ -11802,7 +11550,7 @@
             <a:pPr>
               <a:defRPr sz="850">
                 <a:solidFill>
-                  <a:srgbClr val="475569"/>
+                  <a:srgbClr val="64748B"/>
                 </a:solidFill>
               </a:defRPr>
             </a:pPr>
@@ -11814,7 +11562,7 @@
       </p:sp>
       <p:sp>
         <p:nvSpPr>
-          <p:cNvPr id="14" name="Rectangle 13"/>
+          <p:cNvPr id="13" name="Rounded Rectangle 12"/>
           <p:cNvSpPr/>
           <p:nvPr/>
         </p:nvSpPr>
@@ -11823,7 +11571,7 @@
             <a:off x="731520" y="4800600"/>
             <a:ext cx="10698480" cy="1600200"/>
           </a:xfrm>
-          <a:prstGeom prst="rect">
+          <a:prstGeom prst="roundRect">
             <a:avLst/>
           </a:prstGeom>
           <a:solidFill>
@@ -11831,7 +11579,7 @@
           </a:solidFill>
           <a:ln w="12700">
             <a:solidFill>
-              <a:srgbClr val="E11D48"/>
+              <a:srgbClr val="F43F5E"/>
             </a:solidFill>
           </a:ln>
         </p:spPr>
@@ -11859,7 +11607,7 @@
       </p:sp>
       <p:sp>
         <p:nvSpPr>
-          <p:cNvPr id="15" name="TextBox 14"/>
+          <p:cNvPr id="14" name="TextBox 13"/>
           <p:cNvSpPr txBox="1"/>
           <p:nvPr/>
         </p:nvSpPr>
@@ -11882,7 +11630,7 @@
             <a:pPr>
               <a:defRPr sz="1100" b="1">
                 <a:solidFill>
-                  <a:srgbClr val="E11D48"/>
+                  <a:srgbClr val="F43F5E"/>
                 </a:solidFill>
               </a:defRPr>
             </a:pPr>

--- a/EIA_Q4_Executive_Performance_Presentation.pptx
+++ b/EIA_Q4_Executive_Performance_Presentation.pptx
@@ -13,6 +13,7 @@
     <p:sldId id="261" r:id="rId12"/>
     <p:sldId id="262" r:id="rId13"/>
     <p:sldId id="263" r:id="rId14"/>
+    <p:sldId id="264" r:id="rId15"/>
   </p:sldIdLst>
   <p:sldSz cx="12191695" cy="6858000" type="screen4x3"/>
   <p:notesSz cx="6858000" cy="9144000"/>
@@ -4319,6 +4320,1571 @@
               </a:defRPr>
             </a:pPr>
             <a:r>
+              <a:t>DATA INTEGRITY &amp; 3-WAY AUDIT  |  การตรวจสอบความถูกต้องของข้อมูล 3 ฝ่าย ยืนยันความสอดคล้องตรงกัน 100%</a:t>
+            </a:r>
+          </a:p>
+          <a:p>
+            <a:pPr>
+              <a:defRPr sz="1100">
+                <a:solidFill>
+                  <a:srgbClr val="64748B"/>
+                </a:solidFill>
+                <a:latin typeface="Segoe UI"/>
+              </a:defRPr>
+            </a:pPr>
+            <a:r>
+              <a:t>เปรียบเทียบข้อมูลระหว่างไฟล์ Excel ใน OneDrive Q4, แดชบอร์ดส่วนบน และตาราง BU Matrix ด้านล่าง</a:t>
+            </a:r>
+          </a:p>
+        </p:txBody>
+      </p:sp>
+      <p:sp>
+        <p:nvSpPr>
+          <p:cNvPr id="4" name="Rounded Rectangle 3"/>
+          <p:cNvSpPr/>
+          <p:nvPr/>
+        </p:nvSpPr>
+        <p:spPr>
+          <a:xfrm>
+            <a:off x="731520" y="1508760"/>
+            <a:ext cx="3383280" cy="1371600"/>
+          </a:xfrm>
+          <a:prstGeom prst="roundRect">
+            <a:avLst/>
+          </a:prstGeom>
+          <a:solidFill>
+            <a:srgbClr val="FFFFFF"/>
+          </a:solidFill>
+          <a:ln w="12700">
+            <a:solidFill>
+              <a:srgbClr val="E2E8F0"/>
+            </a:solidFill>
+          </a:ln>
+        </p:spPr>
+        <p:style>
+          <a:lnRef idx="1">
+            <a:schemeClr val="accent1"/>
+          </a:lnRef>
+          <a:fillRef idx="3">
+            <a:schemeClr val="accent1"/>
+          </a:fillRef>
+          <a:effectRef idx="2">
+            <a:schemeClr val="accent1"/>
+          </a:effectRef>
+          <a:fontRef idx="minor">
+            <a:schemeClr val="lt1"/>
+          </a:fontRef>
+        </p:style>
+        <p:txBody>
+          <a:bodyPr rtlCol="0" anchor="ctr"/>
+          <a:lstStyle/>
+          <a:p>
+            <a:pPr algn="ctr"/>
+          </a:p>
+        </p:txBody>
+      </p:sp>
+      <p:sp>
+        <p:nvSpPr>
+          <p:cNvPr id="5" name="Rectangle 4"/>
+          <p:cNvSpPr/>
+          <p:nvPr/>
+        </p:nvSpPr>
+        <p:spPr>
+          <a:xfrm>
+            <a:off x="731520" y="1508760"/>
+            <a:ext cx="3383280" cy="73152"/>
+          </a:xfrm>
+          <a:prstGeom prst="rect">
+            <a:avLst/>
+          </a:prstGeom>
+          <a:solidFill>
+            <a:srgbClr val="2563EB"/>
+          </a:solidFill>
+          <a:ln>
+            <a:noFill/>
+          </a:ln>
+        </p:spPr>
+        <p:style>
+          <a:lnRef idx="1">
+            <a:schemeClr val="accent1"/>
+          </a:lnRef>
+          <a:fillRef idx="3">
+            <a:schemeClr val="accent1"/>
+          </a:fillRef>
+          <a:effectRef idx="2">
+            <a:schemeClr val="accent1"/>
+          </a:effectRef>
+          <a:fontRef idx="minor">
+            <a:schemeClr val="lt1"/>
+          </a:fontRef>
+        </p:style>
+        <p:txBody>
+          <a:bodyPr rtlCol="0" anchor="ctr"/>
+          <a:lstStyle/>
+          <a:p>
+            <a:pPr algn="ctr"/>
+          </a:p>
+        </p:txBody>
+      </p:sp>
+      <p:sp>
+        <p:nvSpPr>
+          <p:cNvPr id="6" name="TextBox 5"/>
+          <p:cNvSpPr txBox="1"/>
+          <p:nvPr/>
+        </p:nvSpPr>
+        <p:spPr>
+          <a:xfrm>
+            <a:off x="914400" y="1673352"/>
+            <a:ext cx="3017520" cy="1115568"/>
+          </a:xfrm>
+          <a:prstGeom prst="rect">
+            <a:avLst/>
+          </a:prstGeom>
+          <a:noFill/>
+        </p:spPr>
+        <p:txBody>
+          <a:bodyPr wrap="square" lIns="0" tIns="0" rIns="0" bIns="0">
+            <a:spAutoFit/>
+          </a:bodyPr>
+          <a:lstStyle/>
+          <a:p>
+            <a:pPr>
+              <a:defRPr sz="2800" b="1">
+                <a:solidFill>
+                  <a:srgbClr val="2563EB"/>
+                </a:solidFill>
+                <a:latin typeface="Segoe UI"/>
+              </a:defRPr>
+            </a:pPr>
+            <a:r>
+              <a:t>5,092</a:t>
+            </a:r>
+          </a:p>
+          <a:p>
+            <a:pPr>
+              <a:defRPr sz="1000" b="1">
+                <a:solidFill>
+                  <a:srgbClr val="0F172A"/>
+                </a:solidFill>
+                <a:latin typeface="Segoe UI"/>
+              </a:defRPr>
+            </a:pPr>
+            <a:r>
+              <a:t>Full Baseline Scope</a:t>
+            </a:r>
+          </a:p>
+          <a:p>
+            <a:pPr>
+              <a:defRPr sz="900">
+                <a:solidFill>
+                  <a:srgbClr val="64748B"/>
+                </a:solidFill>
+                <a:latin typeface="Segoe UI"/>
+              </a:defRPr>
+            </a:pPr>
+            <a:r>
+              <a:t>Excel = Dashboard = BU Matrix</a:t>
+            </a:r>
+          </a:p>
+        </p:txBody>
+      </p:sp>
+      <p:sp>
+        <p:nvSpPr>
+          <p:cNvPr id="7" name="Rounded Rectangle 6"/>
+          <p:cNvSpPr/>
+          <p:nvPr/>
+        </p:nvSpPr>
+        <p:spPr>
+          <a:xfrm>
+            <a:off x="4389120" y="1508760"/>
+            <a:ext cx="3383280" cy="1371600"/>
+          </a:xfrm>
+          <a:prstGeom prst="roundRect">
+            <a:avLst/>
+          </a:prstGeom>
+          <a:solidFill>
+            <a:srgbClr val="FFFFFF"/>
+          </a:solidFill>
+          <a:ln w="12700">
+            <a:solidFill>
+              <a:srgbClr val="E2E8F0"/>
+            </a:solidFill>
+          </a:ln>
+        </p:spPr>
+        <p:style>
+          <a:lnRef idx="1">
+            <a:schemeClr val="accent1"/>
+          </a:lnRef>
+          <a:fillRef idx="3">
+            <a:schemeClr val="accent1"/>
+          </a:fillRef>
+          <a:effectRef idx="2">
+            <a:schemeClr val="accent1"/>
+          </a:effectRef>
+          <a:fontRef idx="minor">
+            <a:schemeClr val="lt1"/>
+          </a:fontRef>
+        </p:style>
+        <p:txBody>
+          <a:bodyPr rtlCol="0" anchor="ctr"/>
+          <a:lstStyle/>
+          <a:p>
+            <a:pPr algn="ctr"/>
+          </a:p>
+        </p:txBody>
+      </p:sp>
+      <p:sp>
+        <p:nvSpPr>
+          <p:cNvPr id="8" name="Rectangle 7"/>
+          <p:cNvSpPr/>
+          <p:nvPr/>
+        </p:nvSpPr>
+        <p:spPr>
+          <a:xfrm>
+            <a:off x="4389120" y="1508760"/>
+            <a:ext cx="3383280" cy="73152"/>
+          </a:xfrm>
+          <a:prstGeom prst="rect">
+            <a:avLst/>
+          </a:prstGeom>
+          <a:solidFill>
+            <a:srgbClr val="10B981"/>
+          </a:solidFill>
+          <a:ln>
+            <a:noFill/>
+          </a:ln>
+        </p:spPr>
+        <p:style>
+          <a:lnRef idx="1">
+            <a:schemeClr val="accent1"/>
+          </a:lnRef>
+          <a:fillRef idx="3">
+            <a:schemeClr val="accent1"/>
+          </a:fillRef>
+          <a:effectRef idx="2">
+            <a:schemeClr val="accent1"/>
+          </a:effectRef>
+          <a:fontRef idx="minor">
+            <a:schemeClr val="lt1"/>
+          </a:fontRef>
+        </p:style>
+        <p:txBody>
+          <a:bodyPr rtlCol="0" anchor="ctr"/>
+          <a:lstStyle/>
+          <a:p>
+            <a:pPr algn="ctr"/>
+          </a:p>
+        </p:txBody>
+      </p:sp>
+      <p:sp>
+        <p:nvSpPr>
+          <p:cNvPr id="9" name="TextBox 8"/>
+          <p:cNvSpPr txBox="1"/>
+          <p:nvPr/>
+        </p:nvSpPr>
+        <p:spPr>
+          <a:xfrm>
+            <a:off x="4572000" y="1673352"/>
+            <a:ext cx="3017520" cy="1115568"/>
+          </a:xfrm>
+          <a:prstGeom prst="rect">
+            <a:avLst/>
+          </a:prstGeom>
+          <a:noFill/>
+        </p:spPr>
+        <p:txBody>
+          <a:bodyPr wrap="square" lIns="0" tIns="0" rIns="0" bIns="0">
+            <a:spAutoFit/>
+          </a:bodyPr>
+          <a:lstStyle/>
+          <a:p>
+            <a:pPr>
+              <a:defRPr sz="2800" b="1">
+                <a:solidFill>
+                  <a:srgbClr val="10B981"/>
+                </a:solidFill>
+                <a:latin typeface="Segoe UI"/>
+              </a:defRPr>
+            </a:pPr>
+            <a:r>
+              <a:t>361 (7.09%)</a:t>
+            </a:r>
+          </a:p>
+          <a:p>
+            <a:pPr>
+              <a:defRPr sz="1000" b="1">
+                <a:solidFill>
+                  <a:srgbClr val="0F172A"/>
+                </a:solidFill>
+                <a:latin typeface="Segoe UI"/>
+              </a:defRPr>
+            </a:pPr>
+            <a:r>
+              <a:t>Remediated Units</a:t>
+            </a:r>
+          </a:p>
+          <a:p>
+            <a:pPr>
+              <a:defRPr sz="900">
+                <a:solidFill>
+                  <a:srgbClr val="64748B"/>
+                </a:solidFill>
+                <a:latin typeface="Segoe UI"/>
+              </a:defRPr>
+            </a:pPr>
+            <a:r>
+              <a:t>ยอดผ่านเกณฑ์ตรงกัน 100%</a:t>
+            </a:r>
+          </a:p>
+        </p:txBody>
+      </p:sp>
+      <p:sp>
+        <p:nvSpPr>
+          <p:cNvPr id="10" name="Rounded Rectangle 9"/>
+          <p:cNvSpPr/>
+          <p:nvPr/>
+        </p:nvSpPr>
+        <p:spPr>
+          <a:xfrm>
+            <a:off x="8046720" y="1508760"/>
+            <a:ext cx="3383280" cy="1371600"/>
+          </a:xfrm>
+          <a:prstGeom prst="roundRect">
+            <a:avLst/>
+          </a:prstGeom>
+          <a:solidFill>
+            <a:srgbClr val="FFFFFF"/>
+          </a:solidFill>
+          <a:ln w="12700">
+            <a:solidFill>
+              <a:srgbClr val="E2E8F0"/>
+            </a:solidFill>
+          </a:ln>
+        </p:spPr>
+        <p:style>
+          <a:lnRef idx="1">
+            <a:schemeClr val="accent1"/>
+          </a:lnRef>
+          <a:fillRef idx="3">
+            <a:schemeClr val="accent1"/>
+          </a:fillRef>
+          <a:effectRef idx="2">
+            <a:schemeClr val="accent1"/>
+          </a:effectRef>
+          <a:fontRef idx="minor">
+            <a:schemeClr val="lt1"/>
+          </a:fontRef>
+        </p:style>
+        <p:txBody>
+          <a:bodyPr rtlCol="0" anchor="ctr"/>
+          <a:lstStyle/>
+          <a:p>
+            <a:pPr algn="ctr"/>
+          </a:p>
+        </p:txBody>
+      </p:sp>
+      <p:sp>
+        <p:nvSpPr>
+          <p:cNvPr id="11" name="Rectangle 10"/>
+          <p:cNvSpPr/>
+          <p:nvPr/>
+        </p:nvSpPr>
+        <p:spPr>
+          <a:xfrm>
+            <a:off x="8046720" y="1508760"/>
+            <a:ext cx="3383280" cy="73152"/>
+          </a:xfrm>
+          <a:prstGeom prst="rect">
+            <a:avLst/>
+          </a:prstGeom>
+          <a:solidFill>
+            <a:srgbClr val="10B981"/>
+          </a:solidFill>
+          <a:ln>
+            <a:noFill/>
+          </a:ln>
+        </p:spPr>
+        <p:style>
+          <a:lnRef idx="1">
+            <a:schemeClr val="accent1"/>
+          </a:lnRef>
+          <a:fillRef idx="3">
+            <a:schemeClr val="accent1"/>
+          </a:fillRef>
+          <a:effectRef idx="2">
+            <a:schemeClr val="accent1"/>
+          </a:effectRef>
+          <a:fontRef idx="minor">
+            <a:schemeClr val="lt1"/>
+          </a:fontRef>
+        </p:style>
+        <p:txBody>
+          <a:bodyPr rtlCol="0" anchor="ctr"/>
+          <a:lstStyle/>
+          <a:p>
+            <a:pPr algn="ctr"/>
+          </a:p>
+        </p:txBody>
+      </p:sp>
+      <p:sp>
+        <p:nvSpPr>
+          <p:cNvPr id="12" name="TextBox 11"/>
+          <p:cNvSpPr txBox="1"/>
+          <p:nvPr/>
+        </p:nvSpPr>
+        <p:spPr>
+          <a:xfrm>
+            <a:off x="8229600" y="1673352"/>
+            <a:ext cx="3017520" cy="1115568"/>
+          </a:xfrm>
+          <a:prstGeom prst="rect">
+            <a:avLst/>
+          </a:prstGeom>
+          <a:noFill/>
+        </p:spPr>
+        <p:txBody>
+          <a:bodyPr wrap="square" lIns="0" tIns="0" rIns="0" bIns="0">
+            <a:spAutoFit/>
+          </a:bodyPr>
+          <a:lstStyle/>
+          <a:p>
+            <a:pPr>
+              <a:defRPr sz="2800" b="1">
+                <a:solidFill>
+                  <a:srgbClr val="10B981"/>
+                </a:solidFill>
+                <a:latin typeface="Segoe UI"/>
+              </a:defRPr>
+            </a:pPr>
+            <a:r>
+              <a:t>0 Variance</a:t>
+            </a:r>
+          </a:p>
+          <a:p>
+            <a:pPr>
+              <a:defRPr sz="1000" b="1">
+                <a:solidFill>
+                  <a:srgbClr val="0F172A"/>
+                </a:solidFill>
+                <a:latin typeface="Segoe UI"/>
+              </a:defRPr>
+            </a:pPr>
+            <a:r>
+              <a:t>Audit Discrepancy</a:t>
+            </a:r>
+          </a:p>
+          <a:p>
+            <a:pPr>
+              <a:defRPr sz="900">
+                <a:solidFill>
+                  <a:srgbClr val="64748B"/>
+                </a:solidFill>
+                <a:latin typeface="Segoe UI"/>
+              </a:defRPr>
+            </a:pPr>
+            <a:r>
+              <a:t>ตรวจสอบรายเซลล์ถูกต้องสมบูรณ์</a:t>
+            </a:r>
+          </a:p>
+        </p:txBody>
+      </p:sp>
+      <p:graphicFrame>
+        <p:nvGraphicFramePr>
+          <p:cNvPr id="13" name="Table 12"/>
+          <p:cNvGraphicFramePr>
+            <a:graphicFrameLocks noGrp="1"/>
+          </p:cNvGraphicFramePr>
+          <p:nvPr/>
+        </p:nvGraphicFramePr>
+        <p:xfrm>
+          <a:off x="731520" y="3063240"/>
+          <a:ext cx="10698480" cy="3291840"/>
+        </p:xfrm>
+        <a:graphic>
+          <a:graphicData uri="http://schemas.openxmlformats.org/drawingml/2006/table">
+            <a:tbl>
+              <a:tblPr firstRow="1" bandRow="1">
+                <a:tableStyleId>{5C22544A-7EE6-4342-B048-85BDC9FD1C3A}</a:tableStyleId>
+              </a:tblPr>
+              <a:tblGrid>
+                <a:gridCol w="3383280"/>
+                <a:gridCol w="1828800"/>
+                <a:gridCol w="1828800"/>
+                <a:gridCol w="1828800"/>
+                <a:gridCol w="1828800"/>
+              </a:tblGrid>
+              <a:tr h="411480">
+                <a:tc>
+                  <a:txBody>
+                    <a:bodyPr/>
+                    <a:lstStyle/>
+                    <a:p>
+                      <a:pPr algn="l">
+                        <a:defRPr b="1" sz="1000">
+                          <a:solidFill>
+                            <a:srgbClr val="FFFFFF"/>
+                          </a:solidFill>
+                          <a:latin typeface="Segoe UI"/>
+                        </a:defRPr>
+                      </a:pPr>
+                      <a:r>
+                        <a:t>มิติการตรวจสอบ (Audit Dimension)</a:t>
+                      </a:r>
+                    </a:p>
+                  </a:txBody>
+                  <a:tcPr>
+                    <a:solidFill>
+                      <a:srgbClr val="0F172A"/>
+                    </a:solidFill>
+                  </a:tcPr>
+                </a:tc>
+                <a:tc>
+                  <a:txBody>
+                    <a:bodyPr/>
+                    <a:lstStyle/>
+                    <a:p>
+                      <a:pPr algn="ctr">
+                        <a:defRPr b="1" sz="1000">
+                          <a:solidFill>
+                            <a:srgbClr val="FFFFFF"/>
+                          </a:solidFill>
+                          <a:latin typeface="Segoe UI"/>
+                        </a:defRPr>
+                      </a:pPr>
+                      <a:r>
+                        <a:t>1. Excel OneDrive Q4</a:t>
+                      </a:r>
+                    </a:p>
+                  </a:txBody>
+                  <a:tcPr>
+                    <a:solidFill>
+                      <a:srgbClr val="0F172A"/>
+                    </a:solidFill>
+                  </a:tcPr>
+                </a:tc>
+                <a:tc>
+                  <a:txBody>
+                    <a:bodyPr/>
+                    <a:lstStyle/>
+                    <a:p>
+                      <a:pPr algn="ctr">
+                        <a:defRPr b="1" sz="1000">
+                          <a:solidFill>
+                            <a:srgbClr val="FFFFFF"/>
+                          </a:solidFill>
+                          <a:latin typeface="Segoe UI"/>
+                        </a:defRPr>
+                      </a:pPr>
+                      <a:r>
+                        <a:t>2. ส่วนบน Dashboard</a:t>
+                      </a:r>
+                    </a:p>
+                  </a:txBody>
+                  <a:tcPr>
+                    <a:solidFill>
+                      <a:srgbClr val="0F172A"/>
+                    </a:solidFill>
+                  </a:tcPr>
+                </a:tc>
+                <a:tc>
+                  <a:txBody>
+                    <a:bodyPr/>
+                    <a:lstStyle/>
+                    <a:p>
+                      <a:pPr algn="ctr">
+                        <a:defRPr b="1" sz="1000">
+                          <a:solidFill>
+                            <a:srgbClr val="FFFFFF"/>
+                          </a:solidFill>
+                          <a:latin typeface="Segoe UI"/>
+                        </a:defRPr>
+                      </a:pPr>
+                      <a:r>
+                        <a:t>3. BU Matrix Table</a:t>
+                      </a:r>
+                    </a:p>
+                  </a:txBody>
+                  <a:tcPr>
+                    <a:solidFill>
+                      <a:srgbClr val="0F172A"/>
+                    </a:solidFill>
+                  </a:tcPr>
+                </a:tc>
+                <a:tc>
+                  <a:txBody>
+                    <a:bodyPr/>
+                    <a:lstStyle/>
+                    <a:p>
+                      <a:pPr algn="ctr">
+                        <a:defRPr b="1" sz="1000">
+                          <a:solidFill>
+                            <a:srgbClr val="FFFFFF"/>
+                          </a:solidFill>
+                          <a:latin typeface="Segoe UI"/>
+                        </a:defRPr>
+                      </a:pPr>
+                      <a:r>
+                        <a:t>ผลการตรวจสอบ</a:t>
+                      </a:r>
+                    </a:p>
+                  </a:txBody>
+                  <a:tcPr>
+                    <a:solidFill>
+                      <a:srgbClr val="0F172A"/>
+                    </a:solidFill>
+                  </a:tcPr>
+                </a:tc>
+              </a:tr>
+              <a:tr h="411480">
+                <a:tc>
+                  <a:txBody>
+                    <a:bodyPr/>
+                    <a:lstStyle/>
+                    <a:p>
+                      <a:pPr algn="l">
+                        <a:defRPr sz="950">
+                          <a:solidFill>
+                            <a:srgbClr val="0F172A"/>
+                          </a:solidFill>
+                          <a:latin typeface="Segoe UI"/>
+                        </a:defRPr>
+                      </a:pPr>
+                      <a:r>
+                        <a:t>Grand Total Scope (เป้าหมายทั้งหมด)</a:t>
+                      </a:r>
+                    </a:p>
+                  </a:txBody>
+                  <a:tcPr>
+                    <a:solidFill>
+                      <a:srgbClr val="FFFFFF"/>
+                    </a:solidFill>
+                  </a:tcPr>
+                </a:tc>
+                <a:tc>
+                  <a:txBody>
+                    <a:bodyPr/>
+                    <a:lstStyle/>
+                    <a:p>
+                      <a:pPr algn="ctr">
+                        <a:defRPr sz="950">
+                          <a:solidFill>
+                            <a:srgbClr val="0F172A"/>
+                          </a:solidFill>
+                          <a:latin typeface="Segoe UI"/>
+                        </a:defRPr>
+                      </a:pPr>
+                      <a:r>
+                        <a:t>5,092 เครื่อง</a:t>
+                      </a:r>
+                    </a:p>
+                  </a:txBody>
+                  <a:tcPr>
+                    <a:solidFill>
+                      <a:srgbClr val="FFFFFF"/>
+                    </a:solidFill>
+                  </a:tcPr>
+                </a:tc>
+                <a:tc>
+                  <a:txBody>
+                    <a:bodyPr/>
+                    <a:lstStyle/>
+                    <a:p>
+                      <a:pPr algn="ctr">
+                        <a:defRPr sz="950">
+                          <a:solidFill>
+                            <a:srgbClr val="0F172A"/>
+                          </a:solidFill>
+                          <a:latin typeface="Segoe UI"/>
+                        </a:defRPr>
+                      </a:pPr>
+                      <a:r>
+                        <a:t>5,092 เครื่อง</a:t>
+                      </a:r>
+                    </a:p>
+                  </a:txBody>
+                  <a:tcPr>
+                    <a:solidFill>
+                      <a:srgbClr val="FFFFFF"/>
+                    </a:solidFill>
+                  </a:tcPr>
+                </a:tc>
+                <a:tc>
+                  <a:txBody>
+                    <a:bodyPr/>
+                    <a:lstStyle/>
+                    <a:p>
+                      <a:pPr algn="ctr">
+                        <a:defRPr sz="950">
+                          <a:solidFill>
+                            <a:srgbClr val="0F172A"/>
+                          </a:solidFill>
+                          <a:latin typeface="Segoe UI"/>
+                        </a:defRPr>
+                      </a:pPr>
+                      <a:r>
+                        <a:t>5,092 เครื่อง</a:t>
+                      </a:r>
+                    </a:p>
+                  </a:txBody>
+                  <a:tcPr>
+                    <a:solidFill>
+                      <a:srgbClr val="FFFFFF"/>
+                    </a:solidFill>
+                  </a:tcPr>
+                </a:tc>
+                <a:tc>
+                  <a:txBody>
+                    <a:bodyPr/>
+                    <a:lstStyle/>
+                    <a:p>
+                      <a:pPr algn="ctr">
+                        <a:defRPr sz="950" b="1">
+                          <a:solidFill>
+                            <a:srgbClr val="10B981"/>
+                          </a:solidFill>
+                          <a:latin typeface="Segoe UI"/>
+                        </a:defRPr>
+                      </a:pPr>
+                      <a:r>
+                        <a:t>✅ MATCH 100%</a:t>
+                      </a:r>
+                    </a:p>
+                  </a:txBody>
+                  <a:tcPr>
+                    <a:solidFill>
+                      <a:srgbClr val="FFFFFF"/>
+                    </a:solidFill>
+                  </a:tcPr>
+                </a:tc>
+              </a:tr>
+              <a:tr h="411480">
+                <a:tc>
+                  <a:txBody>
+                    <a:bodyPr/>
+                    <a:lstStyle/>
+                    <a:p>
+                      <a:pPr algn="l">
+                        <a:defRPr sz="950">
+                          <a:solidFill>
+                            <a:srgbClr val="0F172A"/>
+                          </a:solidFill>
+                          <a:latin typeface="Segoe UI"/>
+                        </a:defRPr>
+                      </a:pPr>
+                      <a:r>
+                        <a:t>Passed Remediated (ผ่านเกณฑ์แล้ว)</a:t>
+                      </a:r>
+                    </a:p>
+                  </a:txBody>
+                  <a:tcPr>
+                    <a:solidFill>
+                      <a:srgbClr val="F8FAFC"/>
+                    </a:solidFill>
+                  </a:tcPr>
+                </a:tc>
+                <a:tc>
+                  <a:txBody>
+                    <a:bodyPr/>
+                    <a:lstStyle/>
+                    <a:p>
+                      <a:pPr algn="ctr">
+                        <a:defRPr sz="950">
+                          <a:solidFill>
+                            <a:srgbClr val="0F172A"/>
+                          </a:solidFill>
+                          <a:latin typeface="Segoe UI"/>
+                        </a:defRPr>
+                      </a:pPr>
+                      <a:r>
+                        <a:t>361 เครื่อง</a:t>
+                      </a:r>
+                    </a:p>
+                  </a:txBody>
+                  <a:tcPr>
+                    <a:solidFill>
+                      <a:srgbClr val="F8FAFC"/>
+                    </a:solidFill>
+                  </a:tcPr>
+                </a:tc>
+                <a:tc>
+                  <a:txBody>
+                    <a:bodyPr/>
+                    <a:lstStyle/>
+                    <a:p>
+                      <a:pPr algn="ctr">
+                        <a:defRPr sz="950">
+                          <a:solidFill>
+                            <a:srgbClr val="0F172A"/>
+                          </a:solidFill>
+                          <a:latin typeface="Segoe UI"/>
+                        </a:defRPr>
+                      </a:pPr>
+                      <a:r>
+                        <a:t>361 เครื่อง</a:t>
+                      </a:r>
+                    </a:p>
+                  </a:txBody>
+                  <a:tcPr>
+                    <a:solidFill>
+                      <a:srgbClr val="F8FAFC"/>
+                    </a:solidFill>
+                  </a:tcPr>
+                </a:tc>
+                <a:tc>
+                  <a:txBody>
+                    <a:bodyPr/>
+                    <a:lstStyle/>
+                    <a:p>
+                      <a:pPr algn="ctr">
+                        <a:defRPr sz="950">
+                          <a:solidFill>
+                            <a:srgbClr val="0F172A"/>
+                          </a:solidFill>
+                          <a:latin typeface="Segoe UI"/>
+                        </a:defRPr>
+                      </a:pPr>
+                      <a:r>
+                        <a:t>361 เครื่อง</a:t>
+                      </a:r>
+                    </a:p>
+                  </a:txBody>
+                  <a:tcPr>
+                    <a:solidFill>
+                      <a:srgbClr val="F8FAFC"/>
+                    </a:solidFill>
+                  </a:tcPr>
+                </a:tc>
+                <a:tc>
+                  <a:txBody>
+                    <a:bodyPr/>
+                    <a:lstStyle/>
+                    <a:p>
+                      <a:pPr algn="ctr">
+                        <a:defRPr sz="950" b="1">
+                          <a:solidFill>
+                            <a:srgbClr val="10B981"/>
+                          </a:solidFill>
+                          <a:latin typeface="Segoe UI"/>
+                        </a:defRPr>
+                      </a:pPr>
+                      <a:r>
+                        <a:t>✅ MATCH 100%</a:t>
+                      </a:r>
+                    </a:p>
+                  </a:txBody>
+                  <a:tcPr>
+                    <a:solidFill>
+                      <a:srgbClr val="F8FAFC"/>
+                    </a:solidFill>
+                  </a:tcPr>
+                </a:tc>
+              </a:tr>
+              <a:tr h="411480">
+                <a:tc>
+                  <a:txBody>
+                    <a:bodyPr/>
+                    <a:lstStyle/>
+                    <a:p>
+                      <a:pPr algn="l">
+                        <a:defRPr sz="950">
+                          <a:solidFill>
+                            <a:srgbClr val="0F172A"/>
+                          </a:solidFill>
+                          <a:latin typeface="Segoe UI"/>
+                        </a:defRPr>
+                      </a:pPr>
+                      <a:r>
+                        <a:t>Pending Remediated (รอดำเนินการ)</a:t>
+                      </a:r>
+                    </a:p>
+                  </a:txBody>
+                  <a:tcPr>
+                    <a:solidFill>
+                      <a:srgbClr val="FFFFFF"/>
+                    </a:solidFill>
+                  </a:tcPr>
+                </a:tc>
+                <a:tc>
+                  <a:txBody>
+                    <a:bodyPr/>
+                    <a:lstStyle/>
+                    <a:p>
+                      <a:pPr algn="ctr">
+                        <a:defRPr sz="950">
+                          <a:solidFill>
+                            <a:srgbClr val="0F172A"/>
+                          </a:solidFill>
+                          <a:latin typeface="Segoe UI"/>
+                        </a:defRPr>
+                      </a:pPr>
+                      <a:r>
+                        <a:t>4,731 เครื่อง</a:t>
+                      </a:r>
+                    </a:p>
+                  </a:txBody>
+                  <a:tcPr>
+                    <a:solidFill>
+                      <a:srgbClr val="FFFFFF"/>
+                    </a:solidFill>
+                  </a:tcPr>
+                </a:tc>
+                <a:tc>
+                  <a:txBody>
+                    <a:bodyPr/>
+                    <a:lstStyle/>
+                    <a:p>
+                      <a:pPr algn="ctr">
+                        <a:defRPr sz="950">
+                          <a:solidFill>
+                            <a:srgbClr val="0F172A"/>
+                          </a:solidFill>
+                          <a:latin typeface="Segoe UI"/>
+                        </a:defRPr>
+                      </a:pPr>
+                      <a:r>
+                        <a:t>4,731 เครื่อง</a:t>
+                      </a:r>
+                    </a:p>
+                  </a:txBody>
+                  <a:tcPr>
+                    <a:solidFill>
+                      <a:srgbClr val="FFFFFF"/>
+                    </a:solidFill>
+                  </a:tcPr>
+                </a:tc>
+                <a:tc>
+                  <a:txBody>
+                    <a:bodyPr/>
+                    <a:lstStyle/>
+                    <a:p>
+                      <a:pPr algn="ctr">
+                        <a:defRPr sz="950">
+                          <a:solidFill>
+                            <a:srgbClr val="0F172A"/>
+                          </a:solidFill>
+                          <a:latin typeface="Segoe UI"/>
+                        </a:defRPr>
+                      </a:pPr>
+                      <a:r>
+                        <a:t>4,731 เครื่อง</a:t>
+                      </a:r>
+                    </a:p>
+                  </a:txBody>
+                  <a:tcPr>
+                    <a:solidFill>
+                      <a:srgbClr val="FFFFFF"/>
+                    </a:solidFill>
+                  </a:tcPr>
+                </a:tc>
+                <a:tc>
+                  <a:txBody>
+                    <a:bodyPr/>
+                    <a:lstStyle/>
+                    <a:p>
+                      <a:pPr algn="ctr">
+                        <a:defRPr sz="950" b="1">
+                          <a:solidFill>
+                            <a:srgbClr val="10B981"/>
+                          </a:solidFill>
+                          <a:latin typeface="Segoe UI"/>
+                        </a:defRPr>
+                      </a:pPr>
+                      <a:r>
+                        <a:t>✅ MATCH 100%</a:t>
+                      </a:r>
+                    </a:p>
+                  </a:txBody>
+                  <a:tcPr>
+                    <a:solidFill>
+                      <a:srgbClr val="FFFFFF"/>
+                    </a:solidFill>
+                  </a:tcPr>
+                </a:tc>
+              </a:tr>
+              <a:tr h="411480">
+                <a:tc>
+                  <a:txBody>
+                    <a:bodyPr/>
+                    <a:lstStyle/>
+                    <a:p>
+                      <a:pPr algn="l">
+                        <a:defRPr sz="950">
+                          <a:solidFill>
+                            <a:srgbClr val="0F172A"/>
+                          </a:solidFill>
+                          <a:latin typeface="Segoe UI"/>
+                        </a:defRPr>
+                      </a:pPr>
+                      <a:r>
+                        <a:t>9 Topics Evaluation (ผลประเมิน 9 หัวข้อ)</a:t>
+                      </a:r>
+                    </a:p>
+                  </a:txBody>
+                  <a:tcPr>
+                    <a:solidFill>
+                      <a:srgbClr val="F8FAFC"/>
+                    </a:solidFill>
+                  </a:tcPr>
+                </a:tc>
+                <a:tc>
+                  <a:txBody>
+                    <a:bodyPr/>
+                    <a:lstStyle/>
+                    <a:p>
+                      <a:pPr algn="ctr">
+                        <a:defRPr sz="950">
+                          <a:solidFill>
+                            <a:srgbClr val="0F172A"/>
+                          </a:solidFill>
+                          <a:latin typeface="Segoe UI"/>
+                        </a:defRPr>
+                      </a:pPr>
+                      <a:r>
+                        <a:t>ครบ 9 หัวข้อ</a:t>
+                      </a:r>
+                    </a:p>
+                  </a:txBody>
+                  <a:tcPr>
+                    <a:solidFill>
+                      <a:srgbClr val="F8FAFC"/>
+                    </a:solidFill>
+                  </a:tcPr>
+                </a:tc>
+                <a:tc>
+                  <a:txBody>
+                    <a:bodyPr/>
+                    <a:lstStyle/>
+                    <a:p>
+                      <a:pPr algn="ctr">
+                        <a:defRPr sz="950">
+                          <a:solidFill>
+                            <a:srgbClr val="0F172A"/>
+                          </a:solidFill>
+                          <a:latin typeface="Segoe UI"/>
+                        </a:defRPr>
+                      </a:pPr>
+                      <a:r>
+                        <a:t>ครบ 9 หัวข้อ</a:t>
+                      </a:r>
+                    </a:p>
+                  </a:txBody>
+                  <a:tcPr>
+                    <a:solidFill>
+                      <a:srgbClr val="F8FAFC"/>
+                    </a:solidFill>
+                  </a:tcPr>
+                </a:tc>
+                <a:tc>
+                  <a:txBody>
+                    <a:bodyPr/>
+                    <a:lstStyle/>
+                    <a:p>
+                      <a:pPr algn="ctr">
+                        <a:defRPr sz="950">
+                          <a:solidFill>
+                            <a:srgbClr val="0F172A"/>
+                          </a:solidFill>
+                          <a:latin typeface="Segoe UI"/>
+                        </a:defRPr>
+                      </a:pPr>
+                      <a:r>
+                        <a:t>ครบ 9 หัวข้อ</a:t>
+                      </a:r>
+                    </a:p>
+                  </a:txBody>
+                  <a:tcPr>
+                    <a:solidFill>
+                      <a:srgbClr val="F8FAFC"/>
+                    </a:solidFill>
+                  </a:tcPr>
+                </a:tc>
+                <a:tc>
+                  <a:txBody>
+                    <a:bodyPr/>
+                    <a:lstStyle/>
+                    <a:p>
+                      <a:pPr algn="ctr">
+                        <a:defRPr sz="950" b="1">
+                          <a:solidFill>
+                            <a:srgbClr val="10B981"/>
+                          </a:solidFill>
+                          <a:latin typeface="Segoe UI"/>
+                        </a:defRPr>
+                      </a:pPr>
+                      <a:r>
+                        <a:t>✅ MATCH 100%</a:t>
+                      </a:r>
+                    </a:p>
+                  </a:txBody>
+                  <a:tcPr>
+                    <a:solidFill>
+                      <a:srgbClr val="F8FAFC"/>
+                    </a:solidFill>
+                  </a:tcPr>
+                </a:tc>
+              </a:tr>
+              <a:tr h="411480">
+                <a:tc>
+                  <a:txBody>
+                    <a:bodyPr/>
+                    <a:lstStyle/>
+                    <a:p>
+                      <a:pPr algn="l">
+                        <a:defRPr sz="950">
+                          <a:solidFill>
+                            <a:srgbClr val="0F172A"/>
+                          </a:solidFill>
+                          <a:latin typeface="Segoe UI"/>
+                        </a:defRPr>
+                      </a:pPr>
+                      <a:r>
+                        <a:t>Support Teams Fleet (DC / HO / Branch)</a:t>
+                      </a:r>
+                    </a:p>
+                  </a:txBody>
+                  <a:tcPr>
+                    <a:solidFill>
+                      <a:srgbClr val="FFFFFF"/>
+                    </a:solidFill>
+                  </a:tcPr>
+                </a:tc>
+                <a:tc>
+                  <a:txBody>
+                    <a:bodyPr/>
+                    <a:lstStyle/>
+                    <a:p>
+                      <a:pPr algn="ctr">
+                        <a:defRPr sz="950">
+                          <a:solidFill>
+                            <a:srgbClr val="0F172A"/>
+                          </a:solidFill>
+                          <a:latin typeface="Segoe UI"/>
+                        </a:defRPr>
+                      </a:pPr>
+                      <a:r>
+                        <a:t>533 / 609 / 3,855</a:t>
+                      </a:r>
+                    </a:p>
+                  </a:txBody>
+                  <a:tcPr>
+                    <a:solidFill>
+                      <a:srgbClr val="FFFFFF"/>
+                    </a:solidFill>
+                  </a:tcPr>
+                </a:tc>
+                <a:tc>
+                  <a:txBody>
+                    <a:bodyPr/>
+                    <a:lstStyle/>
+                    <a:p>
+                      <a:pPr algn="ctr">
+                        <a:defRPr sz="950">
+                          <a:solidFill>
+                            <a:srgbClr val="0F172A"/>
+                          </a:solidFill>
+                          <a:latin typeface="Segoe UI"/>
+                        </a:defRPr>
+                      </a:pPr>
+                      <a:r>
+                        <a:t>533 / 609 / 3,855</a:t>
+                      </a:r>
+                    </a:p>
+                  </a:txBody>
+                  <a:tcPr>
+                    <a:solidFill>
+                      <a:srgbClr val="FFFFFF"/>
+                    </a:solidFill>
+                  </a:tcPr>
+                </a:tc>
+                <a:tc>
+                  <a:txBody>
+                    <a:bodyPr/>
+                    <a:lstStyle/>
+                    <a:p>
+                      <a:pPr algn="ctr">
+                        <a:defRPr sz="950">
+                          <a:solidFill>
+                            <a:srgbClr val="0F172A"/>
+                          </a:solidFill>
+                          <a:latin typeface="Segoe UI"/>
+                        </a:defRPr>
+                      </a:pPr>
+                      <a:r>
+                        <a:t>533 / 609 / 3,855</a:t>
+                      </a:r>
+                    </a:p>
+                  </a:txBody>
+                  <a:tcPr>
+                    <a:solidFill>
+                      <a:srgbClr val="FFFFFF"/>
+                    </a:solidFill>
+                  </a:tcPr>
+                </a:tc>
+                <a:tc>
+                  <a:txBody>
+                    <a:bodyPr/>
+                    <a:lstStyle/>
+                    <a:p>
+                      <a:pPr algn="ctr">
+                        <a:defRPr sz="950" b="1">
+                          <a:solidFill>
+                            <a:srgbClr val="10B981"/>
+                          </a:solidFill>
+                          <a:latin typeface="Segoe UI"/>
+                        </a:defRPr>
+                      </a:pPr>
+                      <a:r>
+                        <a:t>✅ MATCH 100%</a:t>
+                      </a:r>
+                    </a:p>
+                  </a:txBody>
+                  <a:tcPr>
+                    <a:solidFill>
+                      <a:srgbClr val="FFFFFF"/>
+                    </a:solidFill>
+                  </a:tcPr>
+                </a:tc>
+              </a:tr>
+              <a:tr h="411480">
+                <a:tc>
+                  <a:txBody>
+                    <a:bodyPr/>
+                    <a:lstStyle/>
+                    <a:p>
+                      <a:pPr algn="l">
+                        <a:defRPr sz="950">
+                          <a:solidFill>
+                            <a:srgbClr val="0F172A"/>
+                          </a:solidFill>
+                          <a:latin typeface="Segoe UI"/>
+                        </a:defRPr>
+                      </a:pPr>
+                      <a:r>
+                        <a:t>Unassigned / RIS No Service</a:t>
+                      </a:r>
+                    </a:p>
+                  </a:txBody>
+                  <a:tcPr>
+                    <a:solidFill>
+                      <a:srgbClr val="F8FAFC"/>
+                    </a:solidFill>
+                  </a:tcPr>
+                </a:tc>
+                <a:tc>
+                  <a:txBody>
+                    <a:bodyPr/>
+                    <a:lstStyle/>
+                    <a:p>
+                      <a:pPr algn="ctr">
+                        <a:defRPr sz="950">
+                          <a:solidFill>
+                            <a:srgbClr val="0F172A"/>
+                          </a:solidFill>
+                          <a:latin typeface="Segoe UI"/>
+                        </a:defRPr>
+                      </a:pPr>
+                      <a:r>
+                        <a:t>95 เครื่อง</a:t>
+                      </a:r>
+                    </a:p>
+                  </a:txBody>
+                  <a:tcPr>
+                    <a:solidFill>
+                      <a:srgbClr val="F8FAFC"/>
+                    </a:solidFill>
+                  </a:tcPr>
+                </a:tc>
+                <a:tc>
+                  <a:txBody>
+                    <a:bodyPr/>
+                    <a:lstStyle/>
+                    <a:p>
+                      <a:pPr algn="ctr">
+                        <a:defRPr sz="950">
+                          <a:solidFill>
+                            <a:srgbClr val="0F172A"/>
+                          </a:solidFill>
+                          <a:latin typeface="Segoe UI"/>
+                        </a:defRPr>
+                      </a:pPr>
+                      <a:r>
+                        <a:t>95 เครื่อง</a:t>
+                      </a:r>
+                    </a:p>
+                  </a:txBody>
+                  <a:tcPr>
+                    <a:solidFill>
+                      <a:srgbClr val="F8FAFC"/>
+                    </a:solidFill>
+                  </a:tcPr>
+                </a:tc>
+                <a:tc>
+                  <a:txBody>
+                    <a:bodyPr/>
+                    <a:lstStyle/>
+                    <a:p>
+                      <a:pPr algn="ctr">
+                        <a:defRPr sz="950">
+                          <a:solidFill>
+                            <a:srgbClr val="0F172A"/>
+                          </a:solidFill>
+                          <a:latin typeface="Segoe UI"/>
+                        </a:defRPr>
+                      </a:pPr>
+                      <a:r>
+                        <a:t>95 เครื่อง</a:t>
+                      </a:r>
+                    </a:p>
+                  </a:txBody>
+                  <a:tcPr>
+                    <a:solidFill>
+                      <a:srgbClr val="F8FAFC"/>
+                    </a:solidFill>
+                  </a:tcPr>
+                </a:tc>
+                <a:tc>
+                  <a:txBody>
+                    <a:bodyPr/>
+                    <a:lstStyle/>
+                    <a:p>
+                      <a:pPr algn="ctr">
+                        <a:defRPr sz="950" b="1">
+                          <a:solidFill>
+                            <a:srgbClr val="10B981"/>
+                          </a:solidFill>
+                          <a:latin typeface="Segoe UI"/>
+                        </a:defRPr>
+                      </a:pPr>
+                      <a:r>
+                        <a:t>✅ MATCH 100%</a:t>
+                      </a:r>
+                    </a:p>
+                  </a:txBody>
+                  <a:tcPr>
+                    <a:solidFill>
+                      <a:srgbClr val="F8FAFC"/>
+                    </a:solidFill>
+                  </a:tcPr>
+                </a:tc>
+              </a:tr>
+              <a:tr h="411480">
+                <a:tc>
+                  <a:txBody>
+                    <a:bodyPr/>
+                    <a:lstStyle/>
+                    <a:p>
+                      <a:pPr algn="l">
+                        <a:defRPr sz="950">
+                          <a:solidFill>
+                            <a:srgbClr val="0F172A"/>
+                          </a:solidFill>
+                          <a:latin typeface="Segoe UI"/>
+                        </a:defRPr>
+                      </a:pPr>
+                      <a:r>
+                        <a:t>BU Breakdown Alignment (ราย BU ทั้งระบบ)</a:t>
+                      </a:r>
+                    </a:p>
+                  </a:txBody>
+                  <a:tcPr>
+                    <a:solidFill>
+                      <a:srgbClr val="FFFFFF"/>
+                    </a:solidFill>
+                  </a:tcPr>
+                </a:tc>
+                <a:tc>
+                  <a:txBody>
+                    <a:bodyPr/>
+                    <a:lstStyle/>
+                    <a:p>
+                      <a:pPr algn="ctr">
+                        <a:defRPr sz="950">
+                          <a:solidFill>
+                            <a:srgbClr val="0F172A"/>
+                          </a:solidFill>
+                          <a:latin typeface="Segoe UI"/>
+                        </a:defRPr>
+                      </a:pPr>
+                      <a:r>
+                        <a:t>100% Verified</a:t>
+                      </a:r>
+                    </a:p>
+                  </a:txBody>
+                  <a:tcPr>
+                    <a:solidFill>
+                      <a:srgbClr val="FFFFFF"/>
+                    </a:solidFill>
+                  </a:tcPr>
+                </a:tc>
+                <a:tc>
+                  <a:txBody>
+                    <a:bodyPr/>
+                    <a:lstStyle/>
+                    <a:p>
+                      <a:pPr algn="ctr">
+                        <a:defRPr sz="950">
+                          <a:solidFill>
+                            <a:srgbClr val="0F172A"/>
+                          </a:solidFill>
+                          <a:latin typeface="Segoe UI"/>
+                        </a:defRPr>
+                      </a:pPr>
+                      <a:r>
+                        <a:t>100% Verified</a:t>
+                      </a:r>
+                    </a:p>
+                  </a:txBody>
+                  <a:tcPr>
+                    <a:solidFill>
+                      <a:srgbClr val="FFFFFF"/>
+                    </a:solidFill>
+                  </a:tcPr>
+                </a:tc>
+                <a:tc>
+                  <a:txBody>
+                    <a:bodyPr/>
+                    <a:lstStyle/>
+                    <a:p>
+                      <a:pPr algn="ctr">
+                        <a:defRPr sz="950">
+                          <a:solidFill>
+                            <a:srgbClr val="0F172A"/>
+                          </a:solidFill>
+                          <a:latin typeface="Segoe UI"/>
+                        </a:defRPr>
+                      </a:pPr>
+                      <a:r>
+                        <a:t>100% Verified</a:t>
+                      </a:r>
+                    </a:p>
+                  </a:txBody>
+                  <a:tcPr>
+                    <a:solidFill>
+                      <a:srgbClr val="FFFFFF"/>
+                    </a:solidFill>
+                  </a:tcPr>
+                </a:tc>
+                <a:tc>
+                  <a:txBody>
+                    <a:bodyPr/>
+                    <a:lstStyle/>
+                    <a:p>
+                      <a:pPr algn="ctr">
+                        <a:defRPr sz="950" b="1">
+                          <a:solidFill>
+                            <a:srgbClr val="10B981"/>
+                          </a:solidFill>
+                          <a:latin typeface="Segoe UI"/>
+                        </a:defRPr>
+                      </a:pPr>
+                      <a:r>
+                        <a:t>✅ MATCH 100%</a:t>
+                      </a:r>
+                    </a:p>
+                  </a:txBody>
+                  <a:tcPr>
+                    <a:solidFill>
+                      <a:srgbClr val="FFFFFF"/>
+                    </a:solidFill>
+                  </a:tcPr>
+                </a:tc>
+              </a:tr>
+            </a:tbl>
+          </a:graphicData>
+        </a:graphic>
+      </p:graphicFrame>
+    </p:spTree>
+  </p:cSld>
+  <p:clrMapOvr>
+    <a:masterClrMapping/>
+  </p:clrMapOvr>
+</p:sld>
+</file>
+
+<file path=ppt/slides/slide4.xml><?xml version="1.0" encoding="utf-8"?>
+<p:sld xmlns:a="http://schemas.openxmlformats.org/drawingml/2006/main" xmlns:p="http://schemas.openxmlformats.org/presentationml/2006/main" xmlns:r="http://schemas.openxmlformats.org/officeDocument/2006/relationships">
+  <p:cSld>
+    <p:spTree>
+      <p:nvGrpSpPr>
+        <p:cNvPr id="1" name=""/>
+        <p:cNvGrpSpPr/>
+        <p:nvPr/>
+      </p:nvGrpSpPr>
+      <p:grpSpPr/>
+      <p:sp>
+        <p:nvSpPr>
+          <p:cNvPr id="2" name="Rectangle 1"/>
+          <p:cNvSpPr/>
+          <p:nvPr/>
+        </p:nvSpPr>
+        <p:spPr>
+          <a:xfrm>
+            <a:off x="0" y="0"/>
+            <a:ext cx="12191695" cy="6858000"/>
+          </a:xfrm>
+          <a:prstGeom prst="rect">
+            <a:avLst/>
+          </a:prstGeom>
+          <a:solidFill>
+            <a:srgbClr val="F8FAFC"/>
+          </a:solidFill>
+          <a:ln>
+            <a:noFill/>
+          </a:ln>
+        </p:spPr>
+        <p:style>
+          <a:lnRef idx="1">
+            <a:schemeClr val="accent1"/>
+          </a:lnRef>
+          <a:fillRef idx="3">
+            <a:schemeClr val="accent1"/>
+          </a:fillRef>
+          <a:effectRef idx="2">
+            <a:schemeClr val="accent1"/>
+          </a:effectRef>
+          <a:fontRef idx="minor">
+            <a:schemeClr val="lt1"/>
+          </a:fontRef>
+        </p:style>
+        <p:txBody>
+          <a:bodyPr rtlCol="0" anchor="ctr"/>
+          <a:lstStyle/>
+          <a:p>
+            <a:pPr algn="ctr"/>
+          </a:p>
+        </p:txBody>
+      </p:sp>
+      <p:sp>
+        <p:nvSpPr>
+          <p:cNvPr id="3" name="TextBox 2"/>
+          <p:cNvSpPr txBox="1"/>
+          <p:nvPr/>
+        </p:nvSpPr>
+        <p:spPr>
+          <a:xfrm>
+            <a:off x="731520" y="365760"/>
+            <a:ext cx="10698480" cy="1005840"/>
+          </a:xfrm>
+          <a:prstGeom prst="rect">
+            <a:avLst/>
+          </a:prstGeom>
+          <a:noFill/>
+        </p:spPr>
+        <p:txBody>
+          <a:bodyPr wrap="square" lIns="0" tIns="0" rIns="0" bIns="0">
+            <a:spAutoFit/>
+          </a:bodyPr>
+          <a:lstStyle/>
+          <a:p>
+            <a:pPr>
+              <a:defRPr sz="1800" b="1">
+                <a:solidFill>
+                  <a:srgbClr val="0F172A"/>
+                </a:solidFill>
+                <a:latin typeface="Segoe UI"/>
+              </a:defRPr>
+            </a:pPr>
+            <a:r>
               <a:t>HEAVY-HITTERS DEEP DIVE  |  ภาระงานกว่า 93.4% กระจุกตัวอยู่ใน 4 หมวดหลัก โดย Windows 11 OS Update เป็นตัวแปรชี้ขาด</a:t>
             </a:r>
           </a:p>
@@ -5125,7 +6691,7 @@
 </p:sld>
 </file>
 
-<file path=ppt/slides/slide4.xml><?xml version="1.0" encoding="utf-8"?>
+<file path=ppt/slides/slide5.xml><?xml version="1.0" encoding="utf-8"?>
 <p:sld xmlns:a="http://schemas.openxmlformats.org/drawingml/2006/main" xmlns:p="http://schemas.openxmlformats.org/presentationml/2006/main" xmlns:r="http://schemas.openxmlformats.org/officeDocument/2006/relationships">
   <p:cSld>
     <p:spTree>
@@ -7401,7 +8967,7 @@
 </p:sld>
 </file>
 
-<file path=ppt/slides/slide5.xml><?xml version="1.0" encoding="utf-8"?>
+<file path=ppt/slides/slide6.xml><?xml version="1.0" encoding="utf-8"?>
 <p:sld xmlns:a="http://schemas.openxmlformats.org/drawingml/2006/main" xmlns:p="http://schemas.openxmlformats.org/presentationml/2006/main" xmlns:r="http://schemas.openxmlformats.org/officeDocument/2006/relationships">
   <p:cSld>
     <p:spTree>
@@ -8143,7 +9709,7 @@
 </p:sld>
 </file>
 
-<file path=ppt/slides/slide6.xml><?xml version="1.0" encoding="utf-8"?>
+<file path=ppt/slides/slide7.xml><?xml version="1.0" encoding="utf-8"?>
 <p:sld xmlns:a="http://schemas.openxmlformats.org/drawingml/2006/main" xmlns:p="http://schemas.openxmlformats.org/presentationml/2006/main" xmlns:r="http://schemas.openxmlformats.org/officeDocument/2006/relationships">
   <p:cSld>
     <p:spTree>
@@ -10282,7 +11848,7 @@
 </p:sld>
 </file>
 
-<file path=ppt/slides/slide7.xml><?xml version="1.0" encoding="utf-8"?>
+<file path=ppt/slides/slide8.xml><?xml version="1.0" encoding="utf-8"?>
 <p:sld xmlns:a="http://schemas.openxmlformats.org/drawingml/2006/main" xmlns:p="http://schemas.openxmlformats.org/presentationml/2006/main" xmlns:r="http://schemas.openxmlformats.org/officeDocument/2006/relationships">
   <p:cSld>
     <p:spTree>
@@ -10936,7 +12502,7 @@
 </p:sld>
 </file>
 
-<file path=ppt/slides/slide8.xml><?xml version="1.0" encoding="utf-8"?>
+<file path=ppt/slides/slide9.xml><?xml version="1.0" encoding="utf-8"?>
 <p:sld xmlns:a="http://schemas.openxmlformats.org/drawingml/2006/main" xmlns:p="http://schemas.openxmlformats.org/presentationml/2006/main" xmlns:r="http://schemas.openxmlformats.org/officeDocument/2006/relationships">
   <p:cSld>
     <p:spTree>
